--- a/docs/reports/VN_Infra_MI_Weekly_Report_20260509.pptx
+++ b/docs/reports/VN_Infra_MI_Weekly_Report_20260509.pptx
@@ -3529,7 +3529,7 @@
                 <a:ea typeface="Calibri" pitchFamily="34" charset="-122"/>
                 <a:cs typeface="Calibri" pitchFamily="34" charset="-120"/>
               </a:rPr>
-              <a:t>수집 기사 (신규 81건)</a:t>
+              <a:t>수집 기사 (신규 82건)</a:t>
             </a:r>
             <a:endParaRPr lang="en-US" sz="800" dirty="0"/>
           </a:p>
@@ -3568,7 +3568,7 @@
                 <a:ea typeface="Calibri" pitchFamily="34" charset="-122"/>
                 <a:cs typeface="Calibri" pitchFamily="34" charset="-120"/>
               </a:rPr>
-              <a:t>445건</a:t>
+              <a:t>446건</a:t>
             </a:r>
             <a:endParaRPr lang="en-US" sz="1800" dirty="0"/>
           </a:p>
@@ -3632,7 +3632,7 @@
                 <a:ea typeface="Calibri" pitchFamily="34" charset="-122"/>
                 <a:cs typeface="Calibri" pitchFamily="34" charset="-120"/>
               </a:rPr>
-              <a:t>★ 이번 주 신규 기사 81건 — 슬라이드 내 노란색 배지로 표시  /  기존 기사는 회색 배지</a:t>
+              <a:t>★ 이번 주 신규 기사 82건 — 슬라이드 내 노란색 배지로 표시  /  기존 기사는 회색 배지</a:t>
             </a:r>
             <a:endParaRPr lang="en-US" sz="900" dirty="0"/>
           </a:p>
@@ -4977,7 +4977,7 @@
                 <a:ea typeface="Calibri" pitchFamily="34" charset="-122"/>
                 <a:cs typeface="Calibri" pitchFamily="34" charset="-120"/>
               </a:rPr>
-              <a:t>**사업 진행단계 맥락:**</a:t>
+              <a:t>**진행단계 평가:**</a:t>
             </a:r>
             <a:endParaRPr lang="en-US" sz="800" dirty="0"/>
           </a:p>
@@ -4994,7 +4994,7 @@
                 <a:ea typeface="Calibri" pitchFamily="34" charset="-122"/>
                 <a:cs typeface="Calibri" pitchFamily="34" charset="-120"/>
               </a:rPr>
-              <a:t>베트남 석유가스 분야는 ★**상류(탐사·생산) → 중류(정제·LNG) → 하류(유통·소비)**의 전 가치사슬 구축 단계에 진입했습니다. </a:t>
+              <a:t>VN-OG-2030은 실행 초기 단계(2026년 5월 기준)에서 공급망 다층화 및 정제·에너지 인프라 고도화 추진 중입니다. 히스토리 기사 분석 결과:</a:t>
             </a:r>
             <a:endParaRPr lang="en-US" sz="800" dirty="0"/>
           </a:p>
@@ -5002,6 +5002,17 @@
             <a:pPr indent="0" marL="0">
               <a:buNone/>
             </a:pPr>
+            <a:r>
+              <a:rPr lang="en-US" sz="800" dirty="0">
+                <a:solidFill>
+                  <a:srgbClr val="374151"/>
+                </a:solidFill>
+                <a:latin typeface="Calibri" pitchFamily="34" charset="0"/>
+                <a:ea typeface="Calibri" pitchFamily="34" charset="-122"/>
+                <a:cs typeface="Calibri" pitchFamily="34" charset="-120"/>
+              </a:rPr>
+              <a:t>- ★ **원유 확보 다원화**: Idemitsu와의 4백만 배럴 계약, UAE-OPEC+ 재편 영향 속 안정적 수급선 구축</a:t>
+            </a:r>
             <a:endParaRPr lang="en-US" sz="800" dirty="0"/>
           </a:p>
           <a:p>
@@ -5017,7 +5028,7 @@
                 <a:ea typeface="Calibri" pitchFamily="34" charset="-122"/>
                 <a:cs typeface="Calibri" pitchFamily="34" charset="-120"/>
               </a:rPr>
-              <a:t>히스토리를 보면 4월까지 **일본 Idemitsu의 원유 확보(4M배럴), PV GAS의 LNG 수취(6만톤), PVOIL·BSR의 바이오연료 협력, Dung Quat 정제센터 정책 추진** 등 상·중류 사업들이 구체화되고 …</a:t>
+              <a:t>- **LNG 수입 강화**: PV GAS 6만 톤 수취(2026년 4월)로 가스 에너지믹스…</a:t>
             </a:r>
             <a:endParaRPr lang="en-US" sz="800" dirty="0"/>
           </a:p>
@@ -5120,7 +5131,7 @@
                 <a:ea typeface="Calibri" pitchFamily="34" charset="-122"/>
                 <a:cs typeface="Calibri" pitchFamily="34" charset="-120"/>
               </a:rPr>
-              <a:t>국제유가 변동성 속에서 국내 정제·소비 기반 강화는 긍정 신호이나, **KPI 미공시로 인해 정량적 목표 달성도 추적 불가**한 상태입니다. Dung Quat 정제센터 완성도와 …</a:t>
+              <a:t>베트남의 석유가스 자립도 강화 전략이 본격 실행 국면에 진입했으나, 국제 유가 변동성(OPEC+ 재편)과 국내 가격 상승 압력이 동시 진행되는 상황입니다. **Dung Quat …</a:t>
             </a:r>
             <a:endParaRPr lang="en-US" sz="750" dirty="0"/>
           </a:p>
@@ -7656,7 +7667,7 @@
         <p:spPr>
           <a:xfrm>
             <a:off x="4325112" y="1353312"/>
-            <a:ext cx="4498848" cy="1243584"/>
+            <a:ext cx="4498848" cy="1700784"/>
           </a:xfrm>
           <a:prstGeom prst="rect">
             <a:avLst/>
@@ -7681,7 +7692,7 @@
         <p:spPr>
           <a:xfrm>
             <a:off x="4325112" y="1353312"/>
-            <a:ext cx="36576" cy="1243584"/>
+            <a:ext cx="36576" cy="1700784"/>
           </a:xfrm>
           <a:prstGeom prst="rect">
             <a:avLst/>
@@ -7706,7 +7717,7 @@
         <p:spPr>
           <a:xfrm>
             <a:off x="4398264" y="1353312"/>
-            <a:ext cx="4389120" cy="1243584"/>
+            <a:ext cx="4389120" cy="1700784"/>
           </a:xfrm>
           <a:prstGeom prst="rect">
             <a:avLst/>
@@ -7730,7 +7741,7 @@
                 <a:ea typeface="Calibri" pitchFamily="34" charset="-122"/>
                 <a:cs typeface="Calibri" pitchFamily="34" charset="-120"/>
               </a:rPr>
-              <a:t>**현황:** 이번 주 신규 기사가 수집되지 않았으며, 기존 히스토리는 2026년 4월 하노이 배수시스템 프로젝트 시행 1건만 존재합니다. </a:t>
+              <a:t># VN-WW-2030 베트남 국가 하수처리 프로그램 2030 | 주간 분석 리포트</a:t>
             </a:r>
             <a:endParaRPr lang="en-US" sz="800" dirty="0"/>
           </a:p>
@@ -7753,118 +7764,141 @@
                 <a:ea typeface="Calibri" pitchFamily="34" charset="-122"/>
                 <a:cs typeface="Calibri" pitchFamily="34" charset="-120"/>
               </a:rPr>
-              <a:t>**진행단계 평가:** 마스터플랜 수립(2016년 Decision 1085) 이후 약 10년간 **구성 및 초기 시행 단계**로 평가되나, KPI 목표 누락으로 정량적 달성도 산정 불가입니다. ★ **기사 부재로 최근 3개월간 사업 모멘텀 파악 불가…</a:t>
+              <a:t>---</a:t>
             </a:r>
             <a:endParaRPr lang="en-US" sz="800" dirty="0"/>
           </a:p>
-        </p:txBody>
-      </p:sp>
-      <p:sp>
-        <p:nvSpPr>
-          <p:cNvPr id="19" name="Shape 17"/>
-          <p:cNvSpPr/>
-          <p:nvPr/>
-        </p:nvSpPr>
-        <p:spPr>
-          <a:xfrm>
-            <a:off x="4325112" y="2651760"/>
-            <a:ext cx="4498848" cy="402336"/>
-          </a:xfrm>
-          <a:prstGeom prst="rect">
-            <a:avLst/>
-          </a:prstGeom>
-          <a:solidFill>
-            <a:srgbClr val="E8EEF4"/>
-          </a:solidFill>
-          <a:ln w="12700">
-            <a:solidFill>
-              <a:srgbClr val="0C2340"/>
-            </a:solidFill>
-            <a:prstDash val="solid"/>
-          </a:ln>
-        </p:spPr>
-      </p:sp>
-      <p:sp>
-        <p:nvSpPr>
-          <p:cNvPr id="20" name="Text 18"/>
-          <p:cNvSpPr/>
-          <p:nvPr/>
-        </p:nvSpPr>
-        <p:spPr>
-          <a:xfrm>
-            <a:off x="4370832" y="2670048"/>
-            <a:ext cx="594360" cy="146304"/>
-          </a:xfrm>
-          <a:prstGeom prst="rect">
-            <a:avLst/>
-          </a:prstGeom>
-          <a:noFill/>
-          <a:ln/>
-        </p:spPr>
-        <p:txBody>
-          <a:bodyPr wrap="square" lIns="0" tIns="0" rIns="0" bIns="0" rtlCol="0" anchor="ctr"/>
-          <a:lstStyle/>
-          <a:p>
-            <a:pPr indent="0" marL="0">
-              <a:buNone/>
-            </a:pPr>
-            <a:r>
-              <a:rPr lang="en-US" sz="700" b="1" dirty="0">
-                <a:solidFill>
-                  <a:srgbClr val="0C2340"/>
-                </a:solidFill>
-                <a:latin typeface="Calibri" pitchFamily="34" charset="0"/>
-                <a:ea typeface="Calibri" pitchFamily="34" charset="-122"/>
-                <a:cs typeface="Calibri" pitchFamily="34" charset="-120"/>
-              </a:rPr>
-              <a:t>Insight</a:t>
-            </a:r>
-            <a:endParaRPr lang="en-US" sz="700" dirty="0"/>
-          </a:p>
-        </p:txBody>
-      </p:sp>
-      <p:sp>
-        <p:nvSpPr>
-          <p:cNvPr id="21" name="Text 19"/>
-          <p:cNvSpPr/>
-          <p:nvPr/>
-        </p:nvSpPr>
-        <p:spPr>
-          <a:xfrm>
-            <a:off x="4370832" y="2834640"/>
-            <a:ext cx="4407408" cy="201168"/>
-          </a:xfrm>
-          <a:prstGeom prst="rect">
-            <a:avLst/>
-          </a:prstGeom>
-          <a:noFill/>
-          <a:ln/>
-        </p:spPr>
-        <p:txBody>
-          <a:bodyPr wrap="square" lIns="0" tIns="0" rIns="0" bIns="0" rtlCol="0" anchor="ctr"/>
-          <a:lstStyle/>
-          <a:p>
-            <a:pPr indent="0" marL="0">
-              <a:buNone/>
-            </a:pPr>
-            <a:r>
-              <a:rPr lang="en-US" sz="750" b="1" dirty="0">
-                <a:solidFill>
-                  <a:srgbClr val="0C2340"/>
-                </a:solidFill>
-                <a:latin typeface="Calibri" pitchFamily="34" charset="0"/>
-                <a:ea typeface="Calibri" pitchFamily="34" charset="-122"/>
-                <a:cs typeface="Calibri" pitchFamily="34" charset="-120"/>
-              </a:rPr>
-              <a:t>KPI 목표 부재와 기사 단절이 사업 추적성을 심각히 제약합니다. 투자자는 **공식 부처(건설교통부) 진도율 공시**, 자금 배분 현황, 지역별 착공 일정을 직접 확인**할 필요…</a:t>
-            </a:r>
-            <a:endParaRPr lang="en-US" sz="750" dirty="0"/>
-          </a:p>
-        </p:txBody>
-      </p:sp>
-      <p:sp>
-        <p:nvSpPr>
-          <p:cNvPr id="22" name="Text 20"/>
+          <a:p>
+            <a:pPr indent="0" marL="0">
+              <a:buNone/>
+            </a:pPr>
+            <a:endParaRPr lang="en-US" sz="800" dirty="0"/>
+          </a:p>
+          <a:p>
+            <a:pPr indent="0" marL="0">
+              <a:buNone/>
+            </a:pPr>
+            <a:r>
+              <a:rPr lang="en-US" sz="800" dirty="0">
+                <a:solidFill>
+                  <a:srgbClr val="374151"/>
+                </a:solidFill>
+                <a:latin typeface="Calibri" pitchFamily="34" charset="0"/>
+                <a:ea typeface="Calibri" pitchFamily="34" charset="-122"/>
+                <a:cs typeface="Calibri" pitchFamily="34" charset="-120"/>
+              </a:rPr>
+              <a:t>## 1. 최신 뉴스 분석</a:t>
+            </a:r>
+            <a:endParaRPr lang="en-US" sz="800" dirty="0"/>
+          </a:p>
+          <a:p>
+            <a:pPr indent="0" marL="0">
+              <a:buNone/>
+            </a:pPr>
+            <a:endParaRPr lang="en-US" sz="800" dirty="0"/>
+          </a:p>
+          <a:p>
+            <a:pPr indent="0" marL="0">
+              <a:buNone/>
+            </a:pPr>
+            <a:r>
+              <a:rPr lang="en-US" sz="800" dirty="0">
+                <a:solidFill>
+                  <a:srgbClr val="374151"/>
+                </a:solidFill>
+                <a:latin typeface="Calibri" pitchFamily="34" charset="0"/>
+                <a:ea typeface="Calibri" pitchFamily="34" charset="-122"/>
+                <a:cs typeface="Calibri" pitchFamily="34" charset="-120"/>
+              </a:rPr>
+              <a:t>**이번 주 신규 기사 수집 불가**</a:t>
+            </a:r>
+            <a:endParaRPr lang="en-US" sz="800" dirty="0"/>
+          </a:p>
+          <a:p>
+            <a:pPr indent="0" marL="0">
+              <a:buNone/>
+            </a:pPr>
+            <a:endParaRPr lang="en-US" sz="800" dirty="0"/>
+          </a:p>
+          <a:p>
+            <a:pPr indent="0" marL="0">
+              <a:buNone/>
+            </a:pPr>
+            <a:r>
+              <a:rPr lang="en-US" sz="800" dirty="0">
+                <a:solidFill>
+                  <a:srgbClr val="374151"/>
+                </a:solidFill>
+                <a:latin typeface="Calibri" pitchFamily="34" charset="0"/>
+                <a:ea typeface="Calibri" pitchFamily="34" charset="-122"/>
+                <a:cs typeface="Calibri" pitchFamily="34" charset="-120"/>
+              </a:rPr>
+              <a:t>제공된 신규 기사 데이터가 공백(None)으로 입력되어 기사 분석이 불가능합니다. </a:t>
+            </a:r>
+            <a:endParaRPr lang="en-US" sz="800" dirty="0"/>
+          </a:p>
+          <a:p>
+            <a:pPr indent="0" marL="0">
+              <a:buNone/>
+            </a:pPr>
+            <a:endParaRPr lang="en-US" sz="800" dirty="0"/>
+          </a:p>
+          <a:p>
+            <a:pPr indent="0" marL="0">
+              <a:buNone/>
+            </a:pPr>
+            <a:r>
+              <a:rPr lang="en-US" sz="800" dirty="0">
+                <a:solidFill>
+                  <a:srgbClr val="374151"/>
+                </a:solidFill>
+                <a:latin typeface="Calibri" pitchFamily="34" charset="0"/>
+                <a:ea typeface="Calibri" pitchFamily="34" charset="-122"/>
+                <a:cs typeface="Calibri" pitchFamily="34" charset="-120"/>
+              </a:rPr>
+              <a:t>**히스토리 맥락:**</a:t>
+            </a:r>
+            <a:endParaRPr lang="en-US" sz="800" dirty="0"/>
+          </a:p>
+          <a:p>
+            <a:pPr indent="0" marL="0">
+              <a:buNone/>
+            </a:pPr>
+            <a:r>
+              <a:rPr lang="en-US" sz="800" dirty="0">
+                <a:solidFill>
+                  <a:srgbClr val="374151"/>
+                </a:solidFill>
+                <a:latin typeface="Calibri" pitchFamily="34" charset="0"/>
+                <a:ea typeface="Calibri" pitchFamily="34" charset="-122"/>
+                <a:cs typeface="Calibri" pitchFamily="34" charset="-120"/>
+              </a:rPr>
+              <a:t>- 2026년 4월 현재 하노이 중심의 배수 시스템 프로젝트가 진행 중(건설 단계)</a:t>
+            </a:r>
+            <a:endParaRPr lang="en-US" sz="800" dirty="0"/>
+          </a:p>
+          <a:p>
+            <a:pPr indent="0" marL="0">
+              <a:buNone/>
+            </a:pPr>
+            <a:r>
+              <a:rPr lang="en-US" sz="800" dirty="0">
+                <a:solidFill>
+                  <a:srgbClr val="374151"/>
+                </a:solidFill>
+                <a:latin typeface="Calibri" pitchFamily="34" charset="0"/>
+                <a:ea typeface="Calibri" pitchFamily="34" charset="-122"/>
+                <a:cs typeface="Calibri" pitchFamily="34" charset="-120"/>
+              </a:rPr>
+              <a:t>- 최근 기사 1건만 수집으로 사업 …</a:t>
+            </a:r>
+            <a:endParaRPr lang="en-US" sz="800" dirty="0"/>
+          </a:p>
+        </p:txBody>
+      </p:sp>
+      <p:sp>
+        <p:nvSpPr>
+          <p:cNvPr id="19" name="Text 17"/>
           <p:cNvSpPr/>
           <p:nvPr/>
         </p:nvSpPr>
@@ -7903,7 +7937,7 @@
       </p:sp>
       <p:sp>
         <p:nvSpPr>
-          <p:cNvPr id="23" name="Shape 21"/>
+          <p:cNvPr id="20" name="Shape 18"/>
           <p:cNvSpPr/>
           <p:nvPr/>
         </p:nvSpPr>
@@ -7928,7 +7962,7 @@
       </p:sp>
       <p:sp>
         <p:nvSpPr>
-          <p:cNvPr id="24" name="Text 22"/>
+          <p:cNvPr id="21" name="Text 19"/>
           <p:cNvSpPr/>
           <p:nvPr/>
         </p:nvSpPr>
@@ -7967,7 +8001,7 @@
       </p:sp>
       <p:sp>
         <p:nvSpPr>
-          <p:cNvPr id="25" name="Text 23"/>
+          <p:cNvPr id="22" name="Text 20"/>
           <p:cNvSpPr/>
           <p:nvPr/>
         </p:nvSpPr>
@@ -8006,7 +8040,7 @@
       </p:sp>
       <p:sp>
         <p:nvSpPr>
-          <p:cNvPr id="26" name="Text 24"/>
+          <p:cNvPr id="23" name="Text 21"/>
           <p:cNvSpPr/>
           <p:nvPr/>
         </p:nvSpPr>
@@ -8045,7 +8079,7 @@
       </p:sp>
       <p:sp>
         <p:nvSpPr>
-          <p:cNvPr id="27" name="Text 25"/>
+          <p:cNvPr id="24" name="Text 22"/>
           <p:cNvSpPr/>
           <p:nvPr/>
         </p:nvSpPr>
@@ -8084,7 +8118,7 @@
       </p:sp>
       <p:sp>
         <p:nvSpPr>
-          <p:cNvPr id="28" name="Shape 26"/>
+          <p:cNvPr id="25" name="Shape 23"/>
           <p:cNvSpPr/>
           <p:nvPr/>
         </p:nvSpPr>
@@ -8109,7 +8143,7 @@
       </p:sp>
       <p:sp>
         <p:nvSpPr>
-          <p:cNvPr id="29" name="Shape 27"/>
+          <p:cNvPr id="26" name="Shape 24"/>
           <p:cNvSpPr/>
           <p:nvPr/>
         </p:nvSpPr>
@@ -8134,7 +8168,7 @@
       </p:sp>
       <p:sp>
         <p:nvSpPr>
-          <p:cNvPr id="30" name="Text 28"/>
+          <p:cNvPr id="27" name="Text 25"/>
           <p:cNvSpPr/>
           <p:nvPr/>
         </p:nvSpPr>
@@ -8173,7 +8207,7 @@
       </p:sp>
       <p:sp>
         <p:nvSpPr>
-          <p:cNvPr id="31" name="Text 29"/>
+          <p:cNvPr id="28" name="Text 26"/>
           <p:cNvSpPr/>
           <p:nvPr/>
         </p:nvSpPr>
@@ -8201,7 +8235,7 @@
       </p:sp>
       <p:sp>
         <p:nvSpPr>
-          <p:cNvPr id="32" name="Text 30"/>
+          <p:cNvPr id="29" name="Text 27"/>
           <p:cNvSpPr/>
           <p:nvPr/>
         </p:nvSpPr>
@@ -8240,7 +8274,7 @@
       </p:sp>
       <p:sp>
         <p:nvSpPr>
-          <p:cNvPr id="33" name="Text 31"/>
+          <p:cNvPr id="30" name="Text 28"/>
           <p:cNvSpPr/>
           <p:nvPr/>
         </p:nvSpPr>
@@ -8279,7 +8313,7 @@
       </p:sp>
       <p:sp>
         <p:nvSpPr>
-          <p:cNvPr id="34" name="Shape 32"/>
+          <p:cNvPr id="31" name="Shape 29"/>
           <p:cNvSpPr/>
           <p:nvPr/>
         </p:nvSpPr>
@@ -8304,7 +8338,7 @@
       </p:sp>
       <p:sp>
         <p:nvSpPr>
-          <p:cNvPr id="35" name="Shape 33"/>
+          <p:cNvPr id="32" name="Shape 30"/>
           <p:cNvSpPr/>
           <p:nvPr/>
         </p:nvSpPr>
@@ -8329,7 +8363,7 @@
       </p:sp>
       <p:sp>
         <p:nvSpPr>
-          <p:cNvPr id="36" name="Text 34"/>
+          <p:cNvPr id="33" name="Text 31"/>
           <p:cNvSpPr/>
           <p:nvPr/>
         </p:nvSpPr>
@@ -8368,7 +8402,7 @@
       </p:sp>
       <p:sp>
         <p:nvSpPr>
-          <p:cNvPr id="37" name="Text 35"/>
+          <p:cNvPr id="34" name="Text 32"/>
           <p:cNvSpPr/>
           <p:nvPr/>
         </p:nvSpPr>
@@ -8407,7 +8441,7 @@
       </p:sp>
       <p:sp>
         <p:nvSpPr>
-          <p:cNvPr id="38" name="Text 36"/>
+          <p:cNvPr id="35" name="Text 33"/>
           <p:cNvSpPr/>
           <p:nvPr/>
         </p:nvSpPr>
@@ -8446,7 +8480,7 @@
       </p:sp>
       <p:sp>
         <p:nvSpPr>
-          <p:cNvPr id="39" name="Text 37"/>
+          <p:cNvPr id="36" name="Text 34"/>
           <p:cNvSpPr/>
           <p:nvPr/>
         </p:nvSpPr>
@@ -8485,7 +8519,7 @@
       </p:sp>
       <p:sp>
         <p:nvSpPr>
-          <p:cNvPr id="40" name="Shape 38"/>
+          <p:cNvPr id="37" name="Shape 35"/>
           <p:cNvSpPr/>
           <p:nvPr/>
         </p:nvSpPr>
@@ -8510,7 +8544,7 @@
       </p:sp>
       <p:sp>
         <p:nvSpPr>
-          <p:cNvPr id="41" name="Shape 39"/>
+          <p:cNvPr id="38" name="Shape 36"/>
           <p:cNvSpPr/>
           <p:nvPr/>
         </p:nvSpPr>
@@ -8535,7 +8569,7 @@
       </p:sp>
       <p:sp>
         <p:nvSpPr>
-          <p:cNvPr id="42" name="Text 40"/>
+          <p:cNvPr id="39" name="Text 37"/>
           <p:cNvSpPr/>
           <p:nvPr/>
         </p:nvSpPr>
@@ -8574,7 +8608,7 @@
       </p:sp>
       <p:sp>
         <p:nvSpPr>
-          <p:cNvPr id="43" name="Text 41"/>
+          <p:cNvPr id="40" name="Text 38"/>
           <p:cNvSpPr/>
           <p:nvPr/>
         </p:nvSpPr>
@@ -8613,7 +8647,7 @@
       </p:sp>
       <p:sp>
         <p:nvSpPr>
-          <p:cNvPr id="44" name="Text 42"/>
+          <p:cNvPr id="41" name="Text 39"/>
           <p:cNvSpPr/>
           <p:nvPr/>
         </p:nvSpPr>
@@ -8652,7 +8686,7 @@
       </p:sp>
       <p:sp>
         <p:nvSpPr>
-          <p:cNvPr id="45" name="Text 43"/>
+          <p:cNvPr id="42" name="Text 40"/>
           <p:cNvSpPr/>
           <p:nvPr/>
         </p:nvSpPr>
@@ -8691,7 +8725,7 @@
       </p:sp>
       <p:sp>
         <p:nvSpPr>
-          <p:cNvPr id="46" name="Shape 44"/>
+          <p:cNvPr id="43" name="Shape 41"/>
           <p:cNvSpPr/>
           <p:nvPr/>
         </p:nvSpPr>
@@ -8716,7 +8750,7 @@
       </p:sp>
       <p:sp>
         <p:nvSpPr>
-          <p:cNvPr id="47" name="Text 45"/>
+          <p:cNvPr id="44" name="Text 42"/>
           <p:cNvSpPr/>
           <p:nvPr/>
         </p:nvSpPr>
@@ -8755,7 +8789,7 @@
       </p:sp>
       <p:sp>
         <p:nvSpPr>
-          <p:cNvPr id="48" name="Text 46"/>
+          <p:cNvPr id="45" name="Text 43"/>
           <p:cNvSpPr/>
           <p:nvPr/>
         </p:nvSpPr>
@@ -9312,7 +9346,7 @@
         <p:spPr>
           <a:xfrm>
             <a:off x="4325112" y="1353312"/>
-            <a:ext cx="4498848" cy="1700784"/>
+            <a:ext cx="4498848" cy="1243584"/>
           </a:xfrm>
           <a:prstGeom prst="rect">
             <a:avLst/>
@@ -9337,7 +9371,7 @@
         <p:spPr>
           <a:xfrm>
             <a:off x="4325112" y="1353312"/>
-            <a:ext cx="36576" cy="1700784"/>
+            <a:ext cx="36576" cy="1243584"/>
           </a:xfrm>
           <a:prstGeom prst="rect">
             <a:avLst/>
@@ -9362,7 +9396,7 @@
         <p:spPr>
           <a:xfrm>
             <a:off x="4398264" y="1353312"/>
-            <a:ext cx="4389120" cy="1700784"/>
+            <a:ext cx="4389120" cy="1243584"/>
           </a:xfrm>
           <a:prstGeom prst="rect">
             <a:avLst/>
@@ -9386,7 +9420,7 @@
                 <a:ea typeface="Calibri" pitchFamily="34" charset="-122"/>
                 <a:cs typeface="Calibri" pitchFamily="34" charset="-120"/>
               </a:rPr>
-              <a:t># VN-WAT-RESOURCES 진행현황 분석 (2026년 5월)</a:t>
+              <a:t>**진행단계 맥락:**</a:t>
             </a:r>
             <a:endParaRPr lang="en-US" sz="800" dirty="0"/>
           </a:p>
@@ -9394,12 +9428,29 @@
             <a:pPr indent="0" marL="0">
               <a:buNone/>
             </a:pPr>
+            <a:r>
+              <a:rPr lang="en-US" sz="800" dirty="0">
+                <a:solidFill>
+                  <a:srgbClr val="374151"/>
+                </a:solidFill>
+                <a:latin typeface="Calibri" pitchFamily="34" charset="0"/>
+                <a:ea typeface="Calibri" pitchFamily="34" charset="-122"/>
+                <a:cs typeface="Calibri" pitchFamily="34" charset="-120"/>
+              </a:rPr>
+              <a:t>히스토리 기사(2026년 3월~4월)는 지역 단위 상수도 운영·가뭄대응 사례 중심이었으나, 이번 주 신규 기사는 **전국 규모 기후위기 대응 체계 구축 단계**로 진전되었음을 시사합니다. 수력발전-저수지 물 저장-에너지·식량안보 연계 논의가 정책 수준에서 가시화된 상황입니다.</a:t>
+            </a:r>
             <a:endParaRPr lang="en-US" sz="800" dirty="0"/>
           </a:p>
           <a:p>
             <a:pPr indent="0" marL="0">
               <a:buNone/>
             </a:pPr>
+            <a:endParaRPr lang="en-US" sz="800" dirty="0"/>
+          </a:p>
+          <a:p>
+            <a:pPr indent="0" marL="0">
+              <a:buNone/>
+            </a:pPr>
             <a:r>
               <a:rPr lang="en-US" sz="800" dirty="0">
                 <a:solidFill>
@@ -9409,7 +9460,7 @@
                 <a:ea typeface="Calibri" pitchFamily="34" charset="-122"/>
                 <a:cs typeface="Calibri" pitchFamily="34" charset="-120"/>
               </a:rPr>
-              <a:t>## 1. 최신 뉴스 분석</a:t>
+              <a:t>**KPI 목표 대비 진행도:**</a:t>
             </a:r>
             <a:endParaRPr lang="en-US" sz="800" dirty="0"/>
           </a:p>
@@ -9417,53 +9468,144 @@
             <a:pPr indent="0" marL="0">
               <a:buNone/>
             </a:pPr>
+            <a:r>
+              <a:rPr lang="en-US" sz="800" dirty="0">
+                <a:solidFill>
+                  <a:srgbClr val="374151"/>
+                </a:solidFill>
+                <a:latin typeface="Calibri" pitchFamily="34" charset="0"/>
+                <a:ea typeface="Calibri" pitchFamily="34" charset="-122"/>
+                <a:cs typeface="Calibri" pitchFamily="34" charset="-120"/>
+              </a:rPr>
+              <a:t>공식 KPI 부재로 정량 평가 불가능하나, **인프라 기…</a:t>
+            </a:r>
             <a:endParaRPr lang="en-US" sz="800" dirty="0"/>
           </a:p>
-          <a:p>
-            <a:pPr indent="0" marL="0">
-              <a:buNone/>
-            </a:pPr>
-            <a:r>
-              <a:rPr lang="en-US" sz="800" dirty="0">
-                <a:solidFill>
-                  <a:srgbClr val="374151"/>
-                </a:solidFill>
-                <a:latin typeface="Calibri" pitchFamily="34" charset="0"/>
-                <a:ea typeface="Calibri" pitchFamily="34" charset="-122"/>
-                <a:cs typeface="Calibri" pitchFamily="34" charset="-120"/>
-              </a:rPr>
-              <a:t>**진행단계 맥락:** 베트남 수자원 개발 전략이 **기후변동 대응 실행 단계**로 전환되고 있습니다. 히스토리의 지역별 가뭄·염분 대응(3월~4월)에서 이번 주는 ★**국가 차원의 통합 위기관리 체계 구축**으로 확대되는 추세를 보입니다. </a:t>
-            </a:r>
-            <a:endParaRPr lang="en-US" sz="800" dirty="0"/>
-          </a:p>
-          <a:p>
-            <a:pPr indent="0" marL="0">
-              <a:buNone/>
-            </a:pPr>
-            <a:endParaRPr lang="en-US" sz="800" dirty="0"/>
-          </a:p>
-          <a:p>
-            <a:pPr indent="0" marL="0">
-              <a:buNone/>
-            </a:pPr>
-            <a:r>
-              <a:rPr lang="en-US" sz="800" dirty="0">
-                <a:solidFill>
-                  <a:srgbClr val="374151"/>
-                </a:solidFill>
-                <a:latin typeface="Calibri" pitchFamily="34" charset="0"/>
-                <a:ea typeface="Calibri" pitchFamily="34" charset="-122"/>
-                <a:cs typeface="Calibri" pitchFamily="34" charset="-120"/>
-              </a:rPr>
-              <a:t>수력발전소의 물 저장 긴급 확대와 환경부 주도의 …</a:t>
-            </a:r>
-            <a:endParaRPr lang="en-US" sz="800" dirty="0"/>
-          </a:p>
-        </p:txBody>
-      </p:sp>
-      <p:sp>
-        <p:nvSpPr>
-          <p:cNvPr id="19" name="Text 17"/>
+        </p:txBody>
+      </p:sp>
+      <p:sp>
+        <p:nvSpPr>
+          <p:cNvPr id="19" name="Shape 17"/>
+          <p:cNvSpPr/>
+          <p:nvPr/>
+        </p:nvSpPr>
+        <p:spPr>
+          <a:xfrm>
+            <a:off x="4325112" y="2651760"/>
+            <a:ext cx="4498848" cy="402336"/>
+          </a:xfrm>
+          <a:prstGeom prst="rect">
+            <a:avLst/>
+          </a:prstGeom>
+          <a:solidFill>
+            <a:srgbClr val="E8EEF4"/>
+          </a:solidFill>
+          <a:ln w="12700">
+            <a:solidFill>
+              <a:srgbClr val="0C2340"/>
+            </a:solidFill>
+            <a:prstDash val="solid"/>
+          </a:ln>
+        </p:spPr>
+      </p:sp>
+      <p:sp>
+        <p:nvSpPr>
+          <p:cNvPr id="20" name="Text 18"/>
+          <p:cNvSpPr/>
+          <p:nvPr/>
+        </p:nvSpPr>
+        <p:spPr>
+          <a:xfrm>
+            <a:off x="4370832" y="2670048"/>
+            <a:ext cx="594360" cy="146304"/>
+          </a:xfrm>
+          <a:prstGeom prst="rect">
+            <a:avLst/>
+          </a:prstGeom>
+          <a:noFill/>
+          <a:ln/>
+        </p:spPr>
+        <p:txBody>
+          <a:bodyPr wrap="square" lIns="0" tIns="0" rIns="0" bIns="0" rtlCol="0" anchor="ctr"/>
+          <a:lstStyle/>
+          <a:p>
+            <a:pPr indent="0" marL="0">
+              <a:buNone/>
+            </a:pPr>
+            <a:r>
+              <a:rPr lang="en-US" sz="700" b="1" dirty="0">
+                <a:solidFill>
+                  <a:srgbClr val="0C2340"/>
+                </a:solidFill>
+                <a:latin typeface="Calibri" pitchFamily="34" charset="0"/>
+                <a:ea typeface="Calibri" pitchFamily="34" charset="-122"/>
+                <a:cs typeface="Calibri" pitchFamily="34" charset="-120"/>
+              </a:rPr>
+              <a:t>Insight</a:t>
+            </a:r>
+            <a:endParaRPr lang="en-US" sz="700" dirty="0"/>
+          </a:p>
+        </p:txBody>
+      </p:sp>
+      <p:sp>
+        <p:nvSpPr>
+          <p:cNvPr id="21" name="Text 19"/>
+          <p:cNvSpPr/>
+          <p:nvPr/>
+        </p:nvSpPr>
+        <p:spPr>
+          <a:xfrm>
+            <a:off x="4370832" y="2834640"/>
+            <a:ext cx="4407408" cy="201168"/>
+          </a:xfrm>
+          <a:prstGeom prst="rect">
+            <a:avLst/>
+          </a:prstGeom>
+          <a:noFill/>
+          <a:ln/>
+        </p:spPr>
+        <p:txBody>
+          <a:bodyPr wrap="square" lIns="0" tIns="0" rIns="0" bIns="0" rtlCol="0" anchor="ctr"/>
+          <a:lstStyle/>
+          <a:p>
+            <a:pPr indent="0" marL="0">
+              <a:buNone/>
+            </a:pPr>
+            <a:r>
+              <a:rPr lang="en-US" sz="750" b="1" dirty="0">
+                <a:solidFill>
+                  <a:srgbClr val="0C2340"/>
+                </a:solidFill>
+                <a:latin typeface="Calibri" pitchFamily="34" charset="0"/>
+                <a:ea typeface="Calibri" pitchFamily="34" charset="-122"/>
+                <a:cs typeface="Calibri" pitchFamily="34" charset="-120"/>
+              </a:rPr>
+              <a:t>**투자 관점 시사점:**</a:t>
+            </a:r>
+            <a:endParaRPr lang="en-US" sz="750" dirty="0"/>
+          </a:p>
+          <a:p>
+            <a:pPr indent="0" marL="0">
+              <a:buNone/>
+            </a:pPr>
+            <a:r>
+              <a:rPr lang="en-US" sz="750" b="1" dirty="0">
+                <a:solidFill>
+                  <a:srgbClr val="0C2340"/>
+                </a:solidFill>
+                <a:latin typeface="Calibri" pitchFamily="34" charset="0"/>
+                <a:ea typeface="Calibri" pitchFamily="34" charset="-122"/>
+                <a:cs typeface="Calibri" pitchFamily="34" charset="-120"/>
+              </a:rPr>
+              <a:t>상하수도·저수지·정수 인프라 부문의 정부 투자 또는 공공-민간 협력(PPP) 기회가 향후 1~2년 중 가시화될 가능성이 높습니다. 엘니뇨 대응 정책 결…</a:t>
+            </a:r>
+            <a:endParaRPr lang="en-US" sz="750" dirty="0"/>
+          </a:p>
+        </p:txBody>
+      </p:sp>
+      <p:sp>
+        <p:nvSpPr>
+          <p:cNvPr id="22" name="Text 20"/>
           <p:cNvSpPr/>
           <p:nvPr/>
         </p:nvSpPr>
@@ -9502,7 +9644,7 @@
       </p:sp>
       <p:sp>
         <p:nvSpPr>
-          <p:cNvPr id="20" name="Shape 18"/>
+          <p:cNvPr id="23" name="Shape 21"/>
           <p:cNvSpPr/>
           <p:nvPr/>
         </p:nvSpPr>
@@ -9527,7 +9669,7 @@
       </p:sp>
       <p:sp>
         <p:nvSpPr>
-          <p:cNvPr id="21" name="Text 19"/>
+          <p:cNvPr id="24" name="Text 22"/>
           <p:cNvSpPr/>
           <p:nvPr/>
         </p:nvSpPr>
@@ -9566,7 +9708,7 @@
       </p:sp>
       <p:sp>
         <p:nvSpPr>
-          <p:cNvPr id="22" name="Text 20"/>
+          <p:cNvPr id="25" name="Text 23"/>
           <p:cNvSpPr/>
           <p:nvPr/>
         </p:nvSpPr>
@@ -9605,7 +9747,7 @@
       </p:sp>
       <p:sp>
         <p:nvSpPr>
-          <p:cNvPr id="23" name="Text 21"/>
+          <p:cNvPr id="26" name="Text 24"/>
           <p:cNvSpPr/>
           <p:nvPr/>
         </p:nvSpPr>
@@ -9644,7 +9786,7 @@
       </p:sp>
       <p:sp>
         <p:nvSpPr>
-          <p:cNvPr id="24" name="Text 22"/>
+          <p:cNvPr id="27" name="Text 25"/>
           <p:cNvSpPr/>
           <p:nvPr/>
         </p:nvSpPr>
@@ -9683,7 +9825,7 @@
       </p:sp>
       <p:sp>
         <p:nvSpPr>
-          <p:cNvPr id="25" name="Shape 23"/>
+          <p:cNvPr id="28" name="Shape 26"/>
           <p:cNvSpPr/>
           <p:nvPr/>
         </p:nvSpPr>
@@ -9708,7 +9850,7 @@
       </p:sp>
       <p:sp>
         <p:nvSpPr>
-          <p:cNvPr id="26" name="Shape 24"/>
+          <p:cNvPr id="29" name="Shape 27"/>
           <p:cNvSpPr/>
           <p:nvPr/>
         </p:nvSpPr>
@@ -9733,7 +9875,7 @@
       </p:sp>
       <p:sp>
         <p:nvSpPr>
-          <p:cNvPr id="27" name="Text 25"/>
+          <p:cNvPr id="30" name="Text 28"/>
           <p:cNvSpPr/>
           <p:nvPr/>
         </p:nvSpPr>
@@ -9772,7 +9914,7 @@
       </p:sp>
       <p:sp>
         <p:nvSpPr>
-          <p:cNvPr id="28" name="Text 26"/>
+          <p:cNvPr id="31" name="Text 29"/>
           <p:cNvSpPr/>
           <p:nvPr/>
         </p:nvSpPr>
@@ -9811,7 +9953,7 @@
       </p:sp>
       <p:sp>
         <p:nvSpPr>
-          <p:cNvPr id="29" name="Text 27"/>
+          <p:cNvPr id="32" name="Text 30"/>
           <p:cNvSpPr/>
           <p:nvPr/>
         </p:nvSpPr>
@@ -9850,7 +9992,7 @@
       </p:sp>
       <p:sp>
         <p:nvSpPr>
-          <p:cNvPr id="30" name="Text 28"/>
+          <p:cNvPr id="33" name="Text 31"/>
           <p:cNvSpPr/>
           <p:nvPr/>
         </p:nvSpPr>
@@ -9889,7 +10031,7 @@
       </p:sp>
       <p:sp>
         <p:nvSpPr>
-          <p:cNvPr id="31" name="Shape 29"/>
+          <p:cNvPr id="34" name="Shape 32"/>
           <p:cNvSpPr/>
           <p:nvPr/>
         </p:nvSpPr>
@@ -9914,7 +10056,7 @@
       </p:sp>
       <p:sp>
         <p:nvSpPr>
-          <p:cNvPr id="32" name="Shape 30"/>
+          <p:cNvPr id="35" name="Shape 33"/>
           <p:cNvSpPr/>
           <p:nvPr/>
         </p:nvSpPr>
@@ -9939,7 +10081,7 @@
       </p:sp>
       <p:sp>
         <p:nvSpPr>
-          <p:cNvPr id="33" name="Text 31"/>
+          <p:cNvPr id="36" name="Text 34"/>
           <p:cNvSpPr/>
           <p:nvPr/>
         </p:nvSpPr>
@@ -9978,7 +10120,7 @@
       </p:sp>
       <p:sp>
         <p:nvSpPr>
-          <p:cNvPr id="34" name="Text 32"/>
+          <p:cNvPr id="37" name="Text 35"/>
           <p:cNvSpPr/>
           <p:nvPr/>
         </p:nvSpPr>
@@ -10017,7 +10159,7 @@
       </p:sp>
       <p:sp>
         <p:nvSpPr>
-          <p:cNvPr id="35" name="Text 33"/>
+          <p:cNvPr id="38" name="Text 36"/>
           <p:cNvSpPr/>
           <p:nvPr/>
         </p:nvSpPr>
@@ -10056,7 +10198,7 @@
       </p:sp>
       <p:sp>
         <p:nvSpPr>
-          <p:cNvPr id="36" name="Text 34"/>
+          <p:cNvPr id="39" name="Text 37"/>
           <p:cNvSpPr/>
           <p:nvPr/>
         </p:nvSpPr>
@@ -10095,7 +10237,7 @@
       </p:sp>
       <p:sp>
         <p:nvSpPr>
-          <p:cNvPr id="37" name="Shape 35"/>
+          <p:cNvPr id="40" name="Shape 38"/>
           <p:cNvSpPr/>
           <p:nvPr/>
         </p:nvSpPr>
@@ -10120,7 +10262,7 @@
       </p:sp>
       <p:sp>
         <p:nvSpPr>
-          <p:cNvPr id="38" name="Shape 36"/>
+          <p:cNvPr id="41" name="Shape 39"/>
           <p:cNvSpPr/>
           <p:nvPr/>
         </p:nvSpPr>
@@ -10145,7 +10287,7 @@
       </p:sp>
       <p:sp>
         <p:nvSpPr>
-          <p:cNvPr id="39" name="Text 37"/>
+          <p:cNvPr id="42" name="Text 40"/>
           <p:cNvSpPr/>
           <p:nvPr/>
         </p:nvSpPr>
@@ -10184,7 +10326,7 @@
       </p:sp>
       <p:sp>
         <p:nvSpPr>
-          <p:cNvPr id="40" name="Text 38"/>
+          <p:cNvPr id="43" name="Text 41"/>
           <p:cNvSpPr/>
           <p:nvPr/>
         </p:nvSpPr>
@@ -10223,7 +10365,7 @@
       </p:sp>
       <p:sp>
         <p:nvSpPr>
-          <p:cNvPr id="41" name="Text 39"/>
+          <p:cNvPr id="44" name="Text 42"/>
           <p:cNvSpPr/>
           <p:nvPr/>
         </p:nvSpPr>
@@ -10262,7 +10404,7 @@
       </p:sp>
       <p:sp>
         <p:nvSpPr>
-          <p:cNvPr id="42" name="Text 40"/>
+          <p:cNvPr id="45" name="Text 43"/>
           <p:cNvSpPr/>
           <p:nvPr/>
         </p:nvSpPr>
@@ -10301,7 +10443,7 @@
       </p:sp>
       <p:sp>
         <p:nvSpPr>
-          <p:cNvPr id="43" name="Shape 41"/>
+          <p:cNvPr id="46" name="Shape 44"/>
           <p:cNvSpPr/>
           <p:nvPr/>
         </p:nvSpPr>
@@ -10326,7 +10468,7 @@
       </p:sp>
       <p:sp>
         <p:nvSpPr>
-          <p:cNvPr id="44" name="Shape 42"/>
+          <p:cNvPr id="47" name="Shape 45"/>
           <p:cNvSpPr/>
           <p:nvPr/>
         </p:nvSpPr>
@@ -10351,7 +10493,7 @@
       </p:sp>
       <p:sp>
         <p:nvSpPr>
-          <p:cNvPr id="45" name="Text 43"/>
+          <p:cNvPr id="48" name="Text 46"/>
           <p:cNvSpPr/>
           <p:nvPr/>
         </p:nvSpPr>
@@ -10390,7 +10532,7 @@
       </p:sp>
       <p:sp>
         <p:nvSpPr>
-          <p:cNvPr id="46" name="Text 44"/>
+          <p:cNvPr id="49" name="Text 47"/>
           <p:cNvSpPr/>
           <p:nvPr/>
         </p:nvSpPr>
@@ -10429,7 +10571,7 @@
       </p:sp>
       <p:sp>
         <p:nvSpPr>
-          <p:cNvPr id="47" name="Text 45"/>
+          <p:cNvPr id="50" name="Text 48"/>
           <p:cNvSpPr/>
           <p:nvPr/>
         </p:nvSpPr>
@@ -10468,7 +10610,7 @@
       </p:sp>
       <p:sp>
         <p:nvSpPr>
-          <p:cNvPr id="48" name="Text 46"/>
+          <p:cNvPr id="51" name="Text 49"/>
           <p:cNvSpPr/>
           <p:nvPr/>
         </p:nvSpPr>
@@ -10507,7 +10649,7 @@
       </p:sp>
       <p:sp>
         <p:nvSpPr>
-          <p:cNvPr id="49" name="Shape 47"/>
+          <p:cNvPr id="52" name="Shape 50"/>
           <p:cNvSpPr/>
           <p:nvPr/>
         </p:nvSpPr>
@@ -10532,7 +10674,7 @@
       </p:sp>
       <p:sp>
         <p:nvSpPr>
-          <p:cNvPr id="50" name="Shape 48"/>
+          <p:cNvPr id="53" name="Shape 51"/>
           <p:cNvSpPr/>
           <p:nvPr/>
         </p:nvSpPr>
@@ -10557,7 +10699,7 @@
       </p:sp>
       <p:sp>
         <p:nvSpPr>
-          <p:cNvPr id="51" name="Text 49"/>
+          <p:cNvPr id="54" name="Text 52"/>
           <p:cNvSpPr/>
           <p:nvPr/>
         </p:nvSpPr>
@@ -10596,7 +10738,7 @@
       </p:sp>
       <p:sp>
         <p:nvSpPr>
-          <p:cNvPr id="52" name="Text 50"/>
+          <p:cNvPr id="55" name="Text 53"/>
           <p:cNvSpPr/>
           <p:nvPr/>
         </p:nvSpPr>
@@ -10635,7 +10777,7 @@
       </p:sp>
       <p:sp>
         <p:nvSpPr>
-          <p:cNvPr id="53" name="Text 51"/>
+          <p:cNvPr id="56" name="Text 54"/>
           <p:cNvSpPr/>
           <p:nvPr/>
         </p:nvSpPr>
@@ -10674,7 +10816,7 @@
       </p:sp>
       <p:sp>
         <p:nvSpPr>
-          <p:cNvPr id="54" name="Text 52"/>
+          <p:cNvPr id="57" name="Text 55"/>
           <p:cNvSpPr/>
           <p:nvPr/>
         </p:nvSpPr>
@@ -10713,7 +10855,7 @@
       </p:sp>
       <p:sp>
         <p:nvSpPr>
-          <p:cNvPr id="55" name="Shape 53"/>
+          <p:cNvPr id="58" name="Shape 56"/>
           <p:cNvSpPr/>
           <p:nvPr/>
         </p:nvSpPr>
@@ -10738,7 +10880,7 @@
       </p:sp>
       <p:sp>
         <p:nvSpPr>
-          <p:cNvPr id="56" name="Shape 54"/>
+          <p:cNvPr id="59" name="Shape 57"/>
           <p:cNvSpPr/>
           <p:nvPr/>
         </p:nvSpPr>
@@ -10763,7 +10905,7 @@
       </p:sp>
       <p:sp>
         <p:nvSpPr>
-          <p:cNvPr id="57" name="Text 55"/>
+          <p:cNvPr id="60" name="Text 58"/>
           <p:cNvSpPr/>
           <p:nvPr/>
         </p:nvSpPr>
@@ -10802,7 +10944,7 @@
       </p:sp>
       <p:sp>
         <p:nvSpPr>
-          <p:cNvPr id="58" name="Text 56"/>
+          <p:cNvPr id="61" name="Text 59"/>
           <p:cNvSpPr/>
           <p:nvPr/>
         </p:nvSpPr>
@@ -10841,7 +10983,7 @@
       </p:sp>
       <p:sp>
         <p:nvSpPr>
-          <p:cNvPr id="59" name="Text 57"/>
+          <p:cNvPr id="62" name="Text 60"/>
           <p:cNvSpPr/>
           <p:nvPr/>
         </p:nvSpPr>
@@ -10880,7 +11022,7 @@
       </p:sp>
       <p:sp>
         <p:nvSpPr>
-          <p:cNvPr id="60" name="Text 58"/>
+          <p:cNvPr id="63" name="Text 61"/>
           <p:cNvSpPr/>
           <p:nvPr/>
         </p:nvSpPr>
@@ -10919,7 +11061,7 @@
       </p:sp>
       <p:sp>
         <p:nvSpPr>
-          <p:cNvPr id="61" name="Shape 59"/>
+          <p:cNvPr id="64" name="Shape 62"/>
           <p:cNvSpPr/>
           <p:nvPr/>
         </p:nvSpPr>
@@ -10944,7 +11086,7 @@
       </p:sp>
       <p:sp>
         <p:nvSpPr>
-          <p:cNvPr id="62" name="Shape 60"/>
+          <p:cNvPr id="65" name="Shape 63"/>
           <p:cNvSpPr/>
           <p:nvPr/>
         </p:nvSpPr>
@@ -10969,7 +11111,7 @@
       </p:sp>
       <p:sp>
         <p:nvSpPr>
-          <p:cNvPr id="63" name="Text 61"/>
+          <p:cNvPr id="66" name="Text 64"/>
           <p:cNvSpPr/>
           <p:nvPr/>
         </p:nvSpPr>
@@ -11008,7 +11150,7 @@
       </p:sp>
       <p:sp>
         <p:nvSpPr>
-          <p:cNvPr id="64" name="Text 62"/>
+          <p:cNvPr id="67" name="Text 65"/>
           <p:cNvSpPr/>
           <p:nvPr/>
         </p:nvSpPr>
@@ -11047,7 +11189,7 @@
       </p:sp>
       <p:sp>
         <p:nvSpPr>
-          <p:cNvPr id="65" name="Text 63"/>
+          <p:cNvPr id="68" name="Text 66"/>
           <p:cNvSpPr/>
           <p:nvPr/>
         </p:nvSpPr>
@@ -11086,7 +11228,7 @@
       </p:sp>
       <p:sp>
         <p:nvSpPr>
-          <p:cNvPr id="66" name="Text 64"/>
+          <p:cNvPr id="69" name="Text 67"/>
           <p:cNvSpPr/>
           <p:nvPr/>
         </p:nvSpPr>
@@ -11125,7 +11267,7 @@
       </p:sp>
       <p:sp>
         <p:nvSpPr>
-          <p:cNvPr id="67" name="Shape 65"/>
+          <p:cNvPr id="70" name="Shape 68"/>
           <p:cNvSpPr/>
           <p:nvPr/>
         </p:nvSpPr>
@@ -11150,7 +11292,7 @@
       </p:sp>
       <p:sp>
         <p:nvSpPr>
-          <p:cNvPr id="68" name="Shape 66"/>
+          <p:cNvPr id="71" name="Shape 69"/>
           <p:cNvSpPr/>
           <p:nvPr/>
         </p:nvSpPr>
@@ -11175,7 +11317,7 @@
       </p:sp>
       <p:sp>
         <p:nvSpPr>
-          <p:cNvPr id="69" name="Text 67"/>
+          <p:cNvPr id="72" name="Text 70"/>
           <p:cNvSpPr/>
           <p:nvPr/>
         </p:nvSpPr>
@@ -11214,7 +11356,7 @@
       </p:sp>
       <p:sp>
         <p:nvSpPr>
-          <p:cNvPr id="70" name="Text 68"/>
+          <p:cNvPr id="73" name="Text 71"/>
           <p:cNvSpPr/>
           <p:nvPr/>
         </p:nvSpPr>
@@ -11253,7 +11395,7 @@
       </p:sp>
       <p:sp>
         <p:nvSpPr>
-          <p:cNvPr id="71" name="Text 69"/>
+          <p:cNvPr id="74" name="Text 72"/>
           <p:cNvSpPr/>
           <p:nvPr/>
         </p:nvSpPr>
@@ -11292,7 +11434,7 @@
       </p:sp>
       <p:sp>
         <p:nvSpPr>
-          <p:cNvPr id="72" name="Text 70"/>
+          <p:cNvPr id="75" name="Text 73"/>
           <p:cNvSpPr/>
           <p:nvPr/>
         </p:nvSpPr>
@@ -11331,7 +11473,7 @@
       </p:sp>
       <p:sp>
         <p:nvSpPr>
-          <p:cNvPr id="73" name="Shape 71"/>
+          <p:cNvPr id="76" name="Shape 74"/>
           <p:cNvSpPr/>
           <p:nvPr/>
         </p:nvSpPr>
@@ -11356,7 +11498,7 @@
       </p:sp>
       <p:sp>
         <p:nvSpPr>
-          <p:cNvPr id="74" name="Text 72"/>
+          <p:cNvPr id="77" name="Text 75"/>
           <p:cNvSpPr/>
           <p:nvPr/>
         </p:nvSpPr>
@@ -11395,7 +11537,7 @@
       </p:sp>
       <p:sp>
         <p:nvSpPr>
-          <p:cNvPr id="75" name="Text 73"/>
+          <p:cNvPr id="78" name="Text 76"/>
           <p:cNvSpPr/>
           <p:nvPr/>
         </p:nvSpPr>
@@ -12015,7 +12157,7 @@
                 <a:ea typeface="Calibri" pitchFamily="34" charset="-122"/>
                 <a:cs typeface="Calibri" pitchFamily="34" charset="-120"/>
               </a:rPr>
-              <a:t>**진행 단계 맥락:**</a:t>
+              <a:t>**진행단계 맥락:**</a:t>
             </a:r>
             <a:endParaRPr lang="en-US" sz="800" dirty="0"/>
           </a:p>
@@ -12032,7 +12174,47 @@
                 <a:ea typeface="Calibri" pitchFamily="34" charset="-122"/>
                 <a:cs typeface="Calibri" pitchFamily="34" charset="-120"/>
               </a:rPr>
-              <a:t>히스토리의 '내수 프로젝트 가속화(4월1일)', 'Nha Be·Long Cuong 배수 문제 논의(3월30일)'에 이어 신규 기사는 **도시·농촌 이원화된 실행 단계**임을 반영합니다. 나트랑 만 오염 악화(5월4일)는 기존 배수 인프라의 **현재적 한계**를 노출하며, 농촌조정중앙사무소와의 협력강화(5월8일)는 정책 차원의 **통합 거버넌스 구축**을 시작한 것으…</a:t>
+              <a:t>히스토리 기사(3월~4월)는 정책 협의 단계(Nha Be·Long Cuong 배수 검토, 채용 확대)였으나, 신규 기사(5월)는 구체적 실행 단계로 전환되었습니다. 나트랑 만 오염 심화 사례가 규제 강화를 촉발했고, 신농촌 지역 청정수·환경 개선 협력체계가 본격 가동 중입니다.</a:t>
+            </a:r>
+            <a:endParaRPr lang="en-US" sz="800" dirty="0"/>
+          </a:p>
+          <a:p>
+            <a:pPr indent="0" marL="0">
+              <a:buNone/>
+            </a:pPr>
+            <a:endParaRPr lang="en-US" sz="800" dirty="0"/>
+          </a:p>
+          <a:p>
+            <a:pPr indent="0" marL="0">
+              <a:buNone/>
+            </a:pPr>
+            <a:r>
+              <a:rPr lang="en-US" sz="800" dirty="0">
+                <a:solidFill>
+                  <a:srgbClr val="374151"/>
+                </a:solidFill>
+                <a:latin typeface="Calibri" pitchFamily="34" charset="0"/>
+                <a:ea typeface="Calibri" pitchFamily="34" charset="-122"/>
+                <a:cs typeface="Calibri" pitchFamily="34" charset="-120"/>
+              </a:rPr>
+              <a:t>**KPI 목표 대비 진행도:**</a:t>
+            </a:r>
+            <a:endParaRPr lang="en-US" sz="800" dirty="0"/>
+          </a:p>
+          <a:p>
+            <a:pPr indent="0" marL="0">
+              <a:buNone/>
+            </a:pPr>
+            <a:r>
+              <a:rPr lang="en-US" sz="800" dirty="0">
+                <a:solidFill>
+                  <a:srgbClr val="374151"/>
+                </a:solidFill>
+                <a:latin typeface="Calibri" pitchFamily="34" charset="0"/>
+                <a:ea typeface="Calibri" pitchFamily="34" charset="-122"/>
+                <a:cs typeface="Calibri" pitchFamily="34" charset="-120"/>
+              </a:rPr>
+              <a:t>KPI 목표값 미공시로 정량 평가 제한적이나, 광역 도…</a:t>
             </a:r>
             <a:endParaRPr lang="en-US" sz="800" dirty="0"/>
           </a:p>
@@ -12135,7 +12317,7 @@
                 <a:ea typeface="Calibri" pitchFamily="34" charset="-122"/>
                 <a:cs typeface="Calibri" pitchFamily="34" charset="-120"/>
               </a:rPr>
-              <a:t>나트랑 오염 실태와 농촌-도시 통합 거버넌스 동시 추진은 **인프라 신규 투자 및 운영권 민간위탁 사업화의 타이밍**을 암시합니다. 규제 강화 국면에서 기술/운영 전문 사업자의 …</a:t>
+              <a:t>현장 환경 악화(나트랑 만 오염)가 정책 가속화의 촉매역할을 하고 있으며, 부처 간 협력체계 구축으로 자금 조성·실행 속도 가능성이 높아졌습니다. 도시-농촌 이원적 배수·식수 문…</a:t>
             </a:r>
             <a:endParaRPr lang="en-US" sz="750" dirty="0"/>
           </a:p>
@@ -14259,17 +14441,17 @@
         <p:spPr>
           <a:xfrm>
             <a:off x="1069848" y="813816"/>
-            <a:ext cx="4114800" cy="82296"/>
+            <a:ext cx="2468880" cy="82296"/>
           </a:xfrm>
           <a:prstGeom prst="rect">
             <a:avLst/>
           </a:prstGeom>
           <a:solidFill>
-            <a:srgbClr val="0D6E6E"/>
+            <a:srgbClr val="D4820A"/>
           </a:solidFill>
           <a:ln w="12700">
             <a:solidFill>
-              <a:srgbClr val="0D6E6E"/>
+              <a:srgbClr val="D4820A"/>
             </a:solidFill>
             <a:prstDash val="solid"/>
           </a:ln>
@@ -14302,13 +14484,13 @@
             <a:r>
               <a:rPr lang="en-US" sz="750" b="1" dirty="0">
                 <a:solidFill>
-                  <a:srgbClr val="0D6E6E"/>
-                </a:solidFill>
-                <a:latin typeface="Calibri" pitchFamily="34" charset="0"/>
-                <a:ea typeface="Calibri" pitchFamily="34" charset="-122"/>
-                <a:cs typeface="Calibri" pitchFamily="34" charset="-120"/>
-              </a:rPr>
-              <a:t>운영·확장</a:t>
+                  <a:srgbClr val="D4820A"/>
+                </a:solidFill>
+                <a:latin typeface="Calibri" pitchFamily="34" charset="0"/>
+                <a:ea typeface="Calibri" pitchFamily="34" charset="-122"/>
+                <a:cs typeface="Calibri" pitchFamily="34" charset="-120"/>
+              </a:rPr>
+              <a:t>건설·시공</a:t>
             </a:r>
             <a:endParaRPr lang="en-US" sz="750" dirty="0"/>
           </a:p>
@@ -14500,7 +14682,7 @@
                 <a:ea typeface="Calibri" pitchFamily="34" charset="-122"/>
                 <a:cs typeface="Calibri" pitchFamily="34" charset="-120"/>
               </a:rPr>
-              <a:t># 【VN-SWM-NATIONAL-2030】이번 주 진행현황 분석</a:t>
+              <a:t># VN-SWM-NATIONAL-2030 진행현황 분석 보고서</a:t>
             </a:r>
             <a:endParaRPr lang="en-US" sz="800" dirty="0"/>
           </a:p>
@@ -14523,7 +14705,7 @@
                 <a:ea typeface="Calibri" pitchFamily="34" charset="-122"/>
                 <a:cs typeface="Calibri" pitchFamily="34" charset="-120"/>
               </a:rPr>
-              <a:t>---</a:t>
+              <a:t>## 1. 최신 뉴스 분석</a:t>
             </a:r>
             <a:endParaRPr lang="en-US" sz="800" dirty="0"/>
           </a:p>
@@ -14546,7 +14728,7 @@
                 <a:ea typeface="Calibri" pitchFamily="34" charset="-122"/>
                 <a:cs typeface="Calibri" pitchFamily="34" charset="-120"/>
               </a:rPr>
-              <a:t>## 1. 최신 뉴스 분석</a:t>
+              <a:t>**사업 진행단계 평가:**</a:t>
             </a:r>
             <a:endParaRPr lang="en-US" sz="800" dirty="0"/>
           </a:p>
@@ -14554,12 +14736,6 @@
             <a:pPr indent="0" marL="0">
               <a:buNone/>
             </a:pPr>
-            <a:endParaRPr lang="en-US" sz="800" dirty="0"/>
-          </a:p>
-          <a:p>
-            <a:pPr indent="0" marL="0">
-              <a:buNone/>
-            </a:pPr>
             <a:r>
               <a:rPr lang="en-US" sz="800" dirty="0">
                 <a:solidFill>
@@ -14569,24 +14745,7 @@
                 <a:ea typeface="Calibri" pitchFamily="34" charset="-122"/>
                 <a:cs typeface="Calibri" pitchFamily="34" charset="-120"/>
               </a:rPr>
-              <a:t>**사업 진행단계 맥락:**</a:t>
-            </a:r>
-            <a:endParaRPr lang="en-US" sz="800" dirty="0"/>
-          </a:p>
-          <a:p>
-            <a:pPr indent="0" marL="0">
-              <a:buNone/>
-            </a:pPr>
-            <a:r>
-              <a:rPr lang="en-US" sz="800" dirty="0">
-                <a:solidFill>
-                  <a:srgbClr val="374151"/>
-                </a:solidFill>
-                <a:latin typeface="Calibri" pitchFamily="34" charset="0"/>
-                <a:ea typeface="Calibri" pitchFamily="34" charset="-122"/>
-                <a:cs typeface="Calibri" pitchFamily="34" charset="-120"/>
-              </a:rPr>
-              <a:t>베트남 국가 폐기물 관리 전략이 ★정책 수립 단계(2018~2024)에서 **현장 실행 단계(2025~)로 전환**되고 있습니다. 4월의 EPR(확대생산자책임) 메커니즘 도입, HCMC 자동계량 시스템 배치에 이어, 5월에는 **생산 단계 책임(배터리·전자기…</a:t>
+              <a:t>베트남 국가 고형폐기물 관리 전략은 현재 **정책 수립 → 지역 시범 → 시스템 도입** 다단계 진행 중입니다. 히스토리 기사는 지역 폐기물 처리 재정 개선(EPR 메커니즘, 4월)과 HCMC 자동 계량 시스템 배치(4월)로 **하드웨어 기반 현대화**에 집중했으나, 이…</a:t>
             </a:r>
             <a:endParaRPr lang="en-US" sz="800" dirty="0"/>
           </a:p>
@@ -16745,7 +16904,7 @@
                 <a:ea typeface="Calibri" pitchFamily="34" charset="-122"/>
                 <a:cs typeface="Calibri" pitchFamily="34" charset="-120"/>
               </a:rPr>
-              <a:t># VN-ENV-IND-1894 진행현황 분석</a:t>
+              <a:t># 【VN-ENV-IND-1894】베트남 환경산업 발전 프로그램 – 주간 분석 보고서</a:t>
             </a:r>
             <a:endParaRPr lang="en-US" sz="800" dirty="0"/>
           </a:p>
@@ -16768,6 +16927,29 @@
                 <a:ea typeface="Calibri" pitchFamily="34" charset="-122"/>
                 <a:cs typeface="Calibri" pitchFamily="34" charset="-120"/>
               </a:rPr>
+              <a:t>---</a:t>
+            </a:r>
+            <a:endParaRPr lang="en-US" sz="800" dirty="0"/>
+          </a:p>
+          <a:p>
+            <a:pPr indent="0" marL="0">
+              <a:buNone/>
+            </a:pPr>
+            <a:endParaRPr lang="en-US" sz="800" dirty="0"/>
+          </a:p>
+          <a:p>
+            <a:pPr indent="0" marL="0">
+              <a:buNone/>
+            </a:pPr>
+            <a:r>
+              <a:rPr lang="en-US" sz="800" dirty="0">
+                <a:solidFill>
+                  <a:srgbClr val="374151"/>
+                </a:solidFill>
+                <a:latin typeface="Calibri" pitchFamily="34" charset="0"/>
+                <a:ea typeface="Calibri" pitchFamily="34" charset="-122"/>
+                <a:cs typeface="Calibri" pitchFamily="34" charset="-120"/>
+              </a:rPr>
               <a:t>## 1. 【최신 뉴스 분석】</a:t>
             </a:r>
             <a:endParaRPr lang="en-US" sz="800" dirty="0"/>
@@ -16791,7 +16973,7 @@
                 <a:ea typeface="Calibri" pitchFamily="34" charset="-122"/>
                 <a:cs typeface="Calibri" pitchFamily="34" charset="-120"/>
               </a:rPr>
-              <a:t>**사업 진행단계 맥락 평가:**</a:t>
+              <a:t>**사업 진행단계 맥락:**</a:t>
             </a:r>
             <a:endParaRPr lang="en-US" sz="800" dirty="0"/>
           </a:p>
@@ -16808,30 +16990,7 @@
                 <a:ea typeface="Calibri" pitchFamily="34" charset="-122"/>
                 <a:cs typeface="Calibri" pitchFamily="34" charset="-120"/>
               </a:rPr>
-              <a:t>마스터플랜은 정책 수립 단계(2024년 결정)에서 본격 이행 단계(2026년 5월 정책 시행)로 전환하고 있습니다. 히스토리의 푸옌·동나이 산업단지 착공 기사와 신규 기사의 호아팟 산업단지 건설(1.3억 달러)이 북부·남부 동시 확산을 시사합니다. </a:t>
-            </a:r>
-            <a:endParaRPr lang="en-US" sz="800" dirty="0"/>
-          </a:p>
-          <a:p>
-            <a:pPr indent="0" marL="0">
-              <a:buNone/>
-            </a:pPr>
-            <a:endParaRPr lang="en-US" sz="800" dirty="0"/>
-          </a:p>
-          <a:p>
-            <a:pPr indent="0" marL="0">
-              <a:buNone/>
-            </a:pPr>
-            <a:r>
-              <a:rPr lang="en-US" sz="800" dirty="0">
-                <a:solidFill>
-                  <a:srgbClr val="374151"/>
-                </a:solidFill>
-                <a:latin typeface="Calibri" pitchFamily="34" charset="0"/>
-                <a:ea typeface="Calibri" pitchFamily="34" charset="-122"/>
-                <a:cs typeface="Calibri" pitchFamily="34" charset="-120"/>
-              </a:rPr>
-              <a:t>★ **핵심 변화 포인트:…</a:t>
+              <a:t>마스터플랜 이행이 이중 궤도에서 진행 중입니다. 히스토리 기사(4월)는 푸옌·동나이 산업단지의 인프라 착공 단계를 보도했으나, 신규 기사(5월)는 ★**르민쑤언 산업단지 오염 실태 노출과 정책 거버넌스 강화**로 전환되었습니다. 정책 …</a:t>
             </a:r>
             <a:endParaRPr lang="en-US" sz="800" dirty="0"/>
           </a:p>
@@ -19356,7 +19515,7 @@
         <p:spPr>
           <a:xfrm>
             <a:off x="4325112" y="1353312"/>
-            <a:ext cx="4498848" cy="1700784"/>
+            <a:ext cx="4498848" cy="1243584"/>
           </a:xfrm>
           <a:prstGeom prst="rect">
             <a:avLst/>
@@ -19381,7 +19540,7 @@
         <p:spPr>
           <a:xfrm>
             <a:off x="4325112" y="1353312"/>
-            <a:ext cx="36576" cy="1700784"/>
+            <a:ext cx="36576" cy="1243584"/>
           </a:xfrm>
           <a:prstGeom prst="rect">
             <a:avLst/>
@@ -19406,7 +19565,7 @@
         <p:spPr>
           <a:xfrm>
             <a:off x="4398264" y="1353312"/>
-            <a:ext cx="4389120" cy="1700784"/>
+            <a:ext cx="4389120" cy="1243584"/>
           </a:xfrm>
           <a:prstGeom prst="rect">
             <a:avLst/>
@@ -19430,7 +19589,7 @@
                 <a:ea typeface="Calibri" pitchFamily="34" charset="-122"/>
                 <a:cs typeface="Calibri" pitchFamily="34" charset="-120"/>
               </a:rPr>
-              <a:t># VN-IP-NORTH-2030 진행현황 분석 리포트</a:t>
+              <a:t>**진행단계 맥락:**</a:t>
             </a:r>
             <a:endParaRPr lang="en-US" sz="800" dirty="0"/>
           </a:p>
@@ -19447,7 +19606,7 @@
                 <a:ea typeface="Calibri" pitchFamily="34" charset="-122"/>
                 <a:cs typeface="Calibri" pitchFamily="34" charset="-120"/>
               </a:rPr>
-              <a:t>**분석일시: 2026-05-08 기준**</a:t>
+              <a:t>북부 산업단지 마스터플랜은 현재 **전략 수립 단계(2026년 상반기)**에서 **실행 준비 단계**로 전환 중입니다. 4월의 FDI 금융·정책 신호(환규정 개편, FDI Connect 행사) 이후, 5월 신규 기사들은 구체적 인프라 추진(공항망 동기화 계획, 친환경 산업단지 재구성)을 반영합니다.</a:t>
             </a:r>
             <a:endParaRPr lang="en-US" sz="800" dirty="0"/>
           </a:p>
@@ -19470,7 +19629,7 @@
                 <a:ea typeface="Calibri" pitchFamily="34" charset="-122"/>
                 <a:cs typeface="Calibri" pitchFamily="34" charset="-120"/>
               </a:rPr>
-              <a:t>---</a:t>
+              <a:t>**KPI 진행률 평가:**</a:t>
             </a:r>
             <a:endParaRPr lang="en-US" sz="800" dirty="0"/>
           </a:p>
@@ -19478,70 +19637,127 @@
             <a:pPr indent="0" marL="0">
               <a:buNone/>
             </a:pPr>
+            <a:r>
+              <a:rPr lang="en-US" sz="800" dirty="0">
+                <a:solidFill>
+                  <a:srgbClr val="374151"/>
+                </a:solidFill>
+                <a:latin typeface="Calibri" pitchFamily="34" charset="0"/>
+                <a:ea typeface="Calibri" pitchFamily="34" charset="-122"/>
+                <a:cs typeface="Calibri" pitchFamily="34" charset="-120"/>
+              </a:rPr>
+              <a:t>- 공시된 KPI 목표 없으나, **F…</a:t>
+            </a:r>
             <a:endParaRPr lang="en-US" sz="800" dirty="0"/>
           </a:p>
-          <a:p>
-            <a:pPr indent="0" marL="0">
-              <a:buNone/>
-            </a:pPr>
-            <a:r>
-              <a:rPr lang="en-US" sz="800" dirty="0">
-                <a:solidFill>
-                  <a:srgbClr val="374151"/>
-                </a:solidFill>
-                <a:latin typeface="Calibri" pitchFamily="34" charset="0"/>
-                <a:ea typeface="Calibri" pitchFamily="34" charset="-122"/>
-                <a:cs typeface="Calibri" pitchFamily="34" charset="-120"/>
-              </a:rPr>
-              <a:t>## 1. 【최신 뉴스 분석】</a:t>
-            </a:r>
-            <a:endParaRPr lang="en-US" sz="800" dirty="0"/>
-          </a:p>
-          <a:p>
-            <a:pPr indent="0" marL="0">
-              <a:buNone/>
-            </a:pPr>
-            <a:endParaRPr lang="en-US" sz="800" dirty="0"/>
-          </a:p>
-          <a:p>
-            <a:pPr indent="0" marL="0">
-              <a:buNone/>
-            </a:pPr>
-            <a:r>
-              <a:rPr lang="en-US" sz="800" dirty="0">
-                <a:solidFill>
-                  <a:srgbClr val="374151"/>
-                </a:solidFill>
-                <a:latin typeface="Calibri" pitchFamily="34" charset="0"/>
-                <a:ea typeface="Calibri" pitchFamily="34" charset="-122"/>
-                <a:cs typeface="Calibri" pitchFamily="34" charset="-120"/>
-              </a:rPr>
-              <a:t>**사업 진행단계 맥락**</a:t>
-            </a:r>
-            <a:endParaRPr lang="en-US" sz="800" dirty="0"/>
-          </a:p>
-          <a:p>
-            <a:pPr indent="0" marL="0">
-              <a:buNone/>
-            </a:pPr>
-            <a:r>
-              <a:rPr lang="en-US" sz="800" dirty="0">
-                <a:solidFill>
-                  <a:srgbClr val="374151"/>
-                </a:solidFill>
-                <a:latin typeface="Calibri" pitchFamily="34" charset="0"/>
-                <a:ea typeface="Calibri" pitchFamily="34" charset="-122"/>
-                <a:cs typeface="Calibri" pitchFamily="34" charset="-120"/>
-              </a:rPr>
-              <a:t>마스터플랜은 **정책 수립 단계(2022년 결정)에서 구체적 인프라 구축 단계로 전환 중**입니다. 히스토리 기사(4월)의 FDI 규제 개편 제안 → 신규 기사(5월)의 공항·산업단지·데이터센터 연계 개발로 이어지며, 단순 …</a:t>
-            </a:r>
-            <a:endParaRPr lang="en-US" sz="800" dirty="0"/>
-          </a:p>
-        </p:txBody>
-      </p:sp>
-      <p:sp>
-        <p:nvSpPr>
-          <p:cNvPr id="19" name="Text 17"/>
+        </p:txBody>
+      </p:sp>
+      <p:sp>
+        <p:nvSpPr>
+          <p:cNvPr id="19" name="Shape 17"/>
+          <p:cNvSpPr/>
+          <p:nvPr/>
+        </p:nvSpPr>
+        <p:spPr>
+          <a:xfrm>
+            <a:off x="4325112" y="2651760"/>
+            <a:ext cx="4498848" cy="402336"/>
+          </a:xfrm>
+          <a:prstGeom prst="rect">
+            <a:avLst/>
+          </a:prstGeom>
+          <a:solidFill>
+            <a:srgbClr val="E8EEF4"/>
+          </a:solidFill>
+          <a:ln w="12700">
+            <a:solidFill>
+              <a:srgbClr val="0C2340"/>
+            </a:solidFill>
+            <a:prstDash val="solid"/>
+          </a:ln>
+        </p:spPr>
+      </p:sp>
+      <p:sp>
+        <p:nvSpPr>
+          <p:cNvPr id="20" name="Text 18"/>
+          <p:cNvSpPr/>
+          <p:nvPr/>
+        </p:nvSpPr>
+        <p:spPr>
+          <a:xfrm>
+            <a:off x="4370832" y="2670048"/>
+            <a:ext cx="594360" cy="146304"/>
+          </a:xfrm>
+          <a:prstGeom prst="rect">
+            <a:avLst/>
+          </a:prstGeom>
+          <a:noFill/>
+          <a:ln/>
+        </p:spPr>
+        <p:txBody>
+          <a:bodyPr wrap="square" lIns="0" tIns="0" rIns="0" bIns="0" rtlCol="0" anchor="ctr"/>
+          <a:lstStyle/>
+          <a:p>
+            <a:pPr indent="0" marL="0">
+              <a:buNone/>
+            </a:pPr>
+            <a:r>
+              <a:rPr lang="en-US" sz="700" b="1" dirty="0">
+                <a:solidFill>
+                  <a:srgbClr val="0C2340"/>
+                </a:solidFill>
+                <a:latin typeface="Calibri" pitchFamily="34" charset="0"/>
+                <a:ea typeface="Calibri" pitchFamily="34" charset="-122"/>
+                <a:cs typeface="Calibri" pitchFamily="34" charset="-120"/>
+              </a:rPr>
+              <a:t>Insight</a:t>
+            </a:r>
+            <a:endParaRPr lang="en-US" sz="700" dirty="0"/>
+          </a:p>
+        </p:txBody>
+      </p:sp>
+      <p:sp>
+        <p:nvSpPr>
+          <p:cNvPr id="21" name="Text 19"/>
+          <p:cNvSpPr/>
+          <p:nvPr/>
+        </p:nvSpPr>
+        <p:spPr>
+          <a:xfrm>
+            <a:off x="4370832" y="2834640"/>
+            <a:ext cx="4407408" cy="201168"/>
+          </a:xfrm>
+          <a:prstGeom prst="rect">
+            <a:avLst/>
+          </a:prstGeom>
+          <a:noFill/>
+          <a:ln/>
+        </p:spPr>
+        <p:txBody>
+          <a:bodyPr wrap="square" lIns="0" tIns="0" rIns="0" bIns="0" rtlCol="0" anchor="ctr"/>
+          <a:lstStyle/>
+          <a:p>
+            <a:pPr indent="0" marL="0">
+              <a:buNone/>
+            </a:pPr>
+            <a:r>
+              <a:rPr lang="en-US" sz="750" b="1" dirty="0">
+                <a:solidFill>
+                  <a:srgbClr val="0C2340"/>
+                </a:solidFill>
+                <a:latin typeface="Calibri" pitchFamily="34" charset="0"/>
+                <a:ea typeface="Calibri" pitchFamily="34" charset="-122"/>
+                <a:cs typeface="Calibri" pitchFamily="34" charset="-120"/>
+              </a:rPr>
+              <a:t>베트남 정부의 북부 인프라 투자는 공항·친환경 산업단지·디지털 허브의 **3축 동시 추진**으로 전환되었습니다. 1.5년 내 착공 예정인 프로젝트들의 자금 조달·규제 승인 속도가…</a:t>
+            </a:r>
+            <a:endParaRPr lang="en-US" sz="750" dirty="0"/>
+          </a:p>
+        </p:txBody>
+      </p:sp>
+      <p:sp>
+        <p:nvSpPr>
+          <p:cNvPr id="22" name="Text 20"/>
           <p:cNvSpPr/>
           <p:nvPr/>
         </p:nvSpPr>
@@ -19580,7 +19796,7 @@
       </p:sp>
       <p:sp>
         <p:nvSpPr>
-          <p:cNvPr id="20" name="Shape 18"/>
+          <p:cNvPr id="23" name="Shape 21"/>
           <p:cNvSpPr/>
           <p:nvPr/>
         </p:nvSpPr>
@@ -19605,7 +19821,7 @@
       </p:sp>
       <p:sp>
         <p:nvSpPr>
-          <p:cNvPr id="21" name="Text 19"/>
+          <p:cNvPr id="24" name="Text 22"/>
           <p:cNvSpPr/>
           <p:nvPr/>
         </p:nvSpPr>
@@ -19644,7 +19860,7 @@
       </p:sp>
       <p:sp>
         <p:nvSpPr>
-          <p:cNvPr id="22" name="Text 20"/>
+          <p:cNvPr id="25" name="Text 23"/>
           <p:cNvSpPr/>
           <p:nvPr/>
         </p:nvSpPr>
@@ -19683,7 +19899,7 @@
       </p:sp>
       <p:sp>
         <p:nvSpPr>
-          <p:cNvPr id="23" name="Text 21"/>
+          <p:cNvPr id="26" name="Text 24"/>
           <p:cNvSpPr/>
           <p:nvPr/>
         </p:nvSpPr>
@@ -19722,7 +19938,7 @@
       </p:sp>
       <p:sp>
         <p:nvSpPr>
-          <p:cNvPr id="24" name="Text 22"/>
+          <p:cNvPr id="27" name="Text 25"/>
           <p:cNvSpPr/>
           <p:nvPr/>
         </p:nvSpPr>
@@ -19761,7 +19977,7 @@
       </p:sp>
       <p:sp>
         <p:nvSpPr>
-          <p:cNvPr id="25" name="Shape 23"/>
+          <p:cNvPr id="28" name="Shape 26"/>
           <p:cNvSpPr/>
           <p:nvPr/>
         </p:nvSpPr>
@@ -19786,7 +20002,7 @@
       </p:sp>
       <p:sp>
         <p:nvSpPr>
-          <p:cNvPr id="26" name="Shape 24"/>
+          <p:cNvPr id="29" name="Shape 27"/>
           <p:cNvSpPr/>
           <p:nvPr/>
         </p:nvSpPr>
@@ -19811,7 +20027,7 @@
       </p:sp>
       <p:sp>
         <p:nvSpPr>
-          <p:cNvPr id="27" name="Text 25"/>
+          <p:cNvPr id="30" name="Text 28"/>
           <p:cNvSpPr/>
           <p:nvPr/>
         </p:nvSpPr>
@@ -19850,7 +20066,7 @@
       </p:sp>
       <p:sp>
         <p:nvSpPr>
-          <p:cNvPr id="28" name="Text 26"/>
+          <p:cNvPr id="31" name="Text 29"/>
           <p:cNvSpPr/>
           <p:nvPr/>
         </p:nvSpPr>
@@ -19889,7 +20105,7 @@
       </p:sp>
       <p:sp>
         <p:nvSpPr>
-          <p:cNvPr id="29" name="Text 27"/>
+          <p:cNvPr id="32" name="Text 30"/>
           <p:cNvSpPr/>
           <p:nvPr/>
         </p:nvSpPr>
@@ -19928,7 +20144,7 @@
       </p:sp>
       <p:sp>
         <p:nvSpPr>
-          <p:cNvPr id="30" name="Text 28"/>
+          <p:cNvPr id="33" name="Text 31"/>
           <p:cNvSpPr/>
           <p:nvPr/>
         </p:nvSpPr>
@@ -19967,7 +20183,7 @@
       </p:sp>
       <p:sp>
         <p:nvSpPr>
-          <p:cNvPr id="31" name="Shape 29"/>
+          <p:cNvPr id="34" name="Shape 32"/>
           <p:cNvSpPr/>
           <p:nvPr/>
         </p:nvSpPr>
@@ -19992,7 +20208,7 @@
       </p:sp>
       <p:sp>
         <p:nvSpPr>
-          <p:cNvPr id="32" name="Shape 30"/>
+          <p:cNvPr id="35" name="Shape 33"/>
           <p:cNvSpPr/>
           <p:nvPr/>
         </p:nvSpPr>
@@ -20017,7 +20233,7 @@
       </p:sp>
       <p:sp>
         <p:nvSpPr>
-          <p:cNvPr id="33" name="Text 31"/>
+          <p:cNvPr id="36" name="Text 34"/>
           <p:cNvSpPr/>
           <p:nvPr/>
         </p:nvSpPr>
@@ -20056,7 +20272,7 @@
       </p:sp>
       <p:sp>
         <p:nvSpPr>
-          <p:cNvPr id="34" name="Text 32"/>
+          <p:cNvPr id="37" name="Text 35"/>
           <p:cNvSpPr/>
           <p:nvPr/>
         </p:nvSpPr>
@@ -20095,7 +20311,7 @@
       </p:sp>
       <p:sp>
         <p:nvSpPr>
-          <p:cNvPr id="35" name="Text 33"/>
+          <p:cNvPr id="38" name="Text 36"/>
           <p:cNvSpPr/>
           <p:nvPr/>
         </p:nvSpPr>
@@ -20134,7 +20350,7 @@
       </p:sp>
       <p:sp>
         <p:nvSpPr>
-          <p:cNvPr id="36" name="Text 34"/>
+          <p:cNvPr id="39" name="Text 37"/>
           <p:cNvSpPr/>
           <p:nvPr/>
         </p:nvSpPr>
@@ -20173,7 +20389,7 @@
       </p:sp>
       <p:sp>
         <p:nvSpPr>
-          <p:cNvPr id="37" name="Shape 35"/>
+          <p:cNvPr id="40" name="Shape 38"/>
           <p:cNvSpPr/>
           <p:nvPr/>
         </p:nvSpPr>
@@ -20198,7 +20414,7 @@
       </p:sp>
       <p:sp>
         <p:nvSpPr>
-          <p:cNvPr id="38" name="Shape 36"/>
+          <p:cNvPr id="41" name="Shape 39"/>
           <p:cNvSpPr/>
           <p:nvPr/>
         </p:nvSpPr>
@@ -20223,7 +20439,7 @@
       </p:sp>
       <p:sp>
         <p:nvSpPr>
-          <p:cNvPr id="39" name="Text 37"/>
+          <p:cNvPr id="42" name="Text 40"/>
           <p:cNvSpPr/>
           <p:nvPr/>
         </p:nvSpPr>
@@ -20262,7 +20478,7 @@
       </p:sp>
       <p:sp>
         <p:nvSpPr>
-          <p:cNvPr id="40" name="Text 38"/>
+          <p:cNvPr id="43" name="Text 41"/>
           <p:cNvSpPr/>
           <p:nvPr/>
         </p:nvSpPr>
@@ -20301,7 +20517,7 @@
       </p:sp>
       <p:sp>
         <p:nvSpPr>
-          <p:cNvPr id="41" name="Text 39"/>
+          <p:cNvPr id="44" name="Text 42"/>
           <p:cNvSpPr/>
           <p:nvPr/>
         </p:nvSpPr>
@@ -20340,7 +20556,7 @@
       </p:sp>
       <p:sp>
         <p:nvSpPr>
-          <p:cNvPr id="42" name="Text 40"/>
+          <p:cNvPr id="45" name="Text 43"/>
           <p:cNvSpPr/>
           <p:nvPr/>
         </p:nvSpPr>
@@ -20379,7 +20595,7 @@
       </p:sp>
       <p:sp>
         <p:nvSpPr>
-          <p:cNvPr id="43" name="Shape 41"/>
+          <p:cNvPr id="46" name="Shape 44"/>
           <p:cNvSpPr/>
           <p:nvPr/>
         </p:nvSpPr>
@@ -20404,7 +20620,7 @@
       </p:sp>
       <p:sp>
         <p:nvSpPr>
-          <p:cNvPr id="44" name="Shape 42"/>
+          <p:cNvPr id="47" name="Shape 45"/>
           <p:cNvSpPr/>
           <p:nvPr/>
         </p:nvSpPr>
@@ -20429,7 +20645,7 @@
       </p:sp>
       <p:sp>
         <p:nvSpPr>
-          <p:cNvPr id="45" name="Text 43"/>
+          <p:cNvPr id="48" name="Text 46"/>
           <p:cNvSpPr/>
           <p:nvPr/>
         </p:nvSpPr>
@@ -20468,7 +20684,7 @@
       </p:sp>
       <p:sp>
         <p:nvSpPr>
-          <p:cNvPr id="46" name="Text 44"/>
+          <p:cNvPr id="49" name="Text 47"/>
           <p:cNvSpPr/>
           <p:nvPr/>
         </p:nvSpPr>
@@ -20507,7 +20723,7 @@
       </p:sp>
       <p:sp>
         <p:nvSpPr>
-          <p:cNvPr id="47" name="Text 45"/>
+          <p:cNvPr id="50" name="Text 48"/>
           <p:cNvSpPr/>
           <p:nvPr/>
         </p:nvSpPr>
@@ -20546,7 +20762,7 @@
       </p:sp>
       <p:sp>
         <p:nvSpPr>
-          <p:cNvPr id="48" name="Text 46"/>
+          <p:cNvPr id="51" name="Text 49"/>
           <p:cNvSpPr/>
           <p:nvPr/>
         </p:nvSpPr>
@@ -20585,7 +20801,7 @@
       </p:sp>
       <p:sp>
         <p:nvSpPr>
-          <p:cNvPr id="49" name="Shape 47"/>
+          <p:cNvPr id="52" name="Shape 50"/>
           <p:cNvSpPr/>
           <p:nvPr/>
         </p:nvSpPr>
@@ -20610,7 +20826,7 @@
       </p:sp>
       <p:sp>
         <p:nvSpPr>
-          <p:cNvPr id="50" name="Shape 48"/>
+          <p:cNvPr id="53" name="Shape 51"/>
           <p:cNvSpPr/>
           <p:nvPr/>
         </p:nvSpPr>
@@ -20635,7 +20851,7 @@
       </p:sp>
       <p:sp>
         <p:nvSpPr>
-          <p:cNvPr id="51" name="Text 49"/>
+          <p:cNvPr id="54" name="Text 52"/>
           <p:cNvSpPr/>
           <p:nvPr/>
         </p:nvSpPr>
@@ -20674,7 +20890,7 @@
       </p:sp>
       <p:sp>
         <p:nvSpPr>
-          <p:cNvPr id="52" name="Text 50"/>
+          <p:cNvPr id="55" name="Text 53"/>
           <p:cNvSpPr/>
           <p:nvPr/>
         </p:nvSpPr>
@@ -20713,7 +20929,7 @@
       </p:sp>
       <p:sp>
         <p:nvSpPr>
-          <p:cNvPr id="53" name="Text 51"/>
+          <p:cNvPr id="56" name="Text 54"/>
           <p:cNvSpPr/>
           <p:nvPr/>
         </p:nvSpPr>
@@ -20752,7 +20968,7 @@
       </p:sp>
       <p:sp>
         <p:nvSpPr>
-          <p:cNvPr id="54" name="Text 52"/>
+          <p:cNvPr id="57" name="Text 55"/>
           <p:cNvSpPr/>
           <p:nvPr/>
         </p:nvSpPr>
@@ -20791,7 +21007,7 @@
       </p:sp>
       <p:sp>
         <p:nvSpPr>
-          <p:cNvPr id="55" name="Shape 53"/>
+          <p:cNvPr id="58" name="Shape 56"/>
           <p:cNvSpPr/>
           <p:nvPr/>
         </p:nvSpPr>
@@ -20816,7 +21032,7 @@
       </p:sp>
       <p:sp>
         <p:nvSpPr>
-          <p:cNvPr id="56" name="Shape 54"/>
+          <p:cNvPr id="59" name="Shape 57"/>
           <p:cNvSpPr/>
           <p:nvPr/>
         </p:nvSpPr>
@@ -20841,7 +21057,7 @@
       </p:sp>
       <p:sp>
         <p:nvSpPr>
-          <p:cNvPr id="57" name="Text 55"/>
+          <p:cNvPr id="60" name="Text 58"/>
           <p:cNvSpPr/>
           <p:nvPr/>
         </p:nvSpPr>
@@ -20880,7 +21096,7 @@
       </p:sp>
       <p:sp>
         <p:nvSpPr>
-          <p:cNvPr id="58" name="Text 56"/>
+          <p:cNvPr id="61" name="Text 59"/>
           <p:cNvSpPr/>
           <p:nvPr/>
         </p:nvSpPr>
@@ -20919,7 +21135,7 @@
       </p:sp>
       <p:sp>
         <p:nvSpPr>
-          <p:cNvPr id="59" name="Text 57"/>
+          <p:cNvPr id="62" name="Text 60"/>
           <p:cNvSpPr/>
           <p:nvPr/>
         </p:nvSpPr>
@@ -20958,7 +21174,7 @@
       </p:sp>
       <p:sp>
         <p:nvSpPr>
-          <p:cNvPr id="60" name="Text 58"/>
+          <p:cNvPr id="63" name="Text 61"/>
           <p:cNvSpPr/>
           <p:nvPr/>
         </p:nvSpPr>
@@ -20997,7 +21213,7 @@
       </p:sp>
       <p:sp>
         <p:nvSpPr>
-          <p:cNvPr id="61" name="Shape 59"/>
+          <p:cNvPr id="64" name="Shape 62"/>
           <p:cNvSpPr/>
           <p:nvPr/>
         </p:nvSpPr>
@@ -21022,7 +21238,7 @@
       </p:sp>
       <p:sp>
         <p:nvSpPr>
-          <p:cNvPr id="62" name="Shape 60"/>
+          <p:cNvPr id="65" name="Shape 63"/>
           <p:cNvSpPr/>
           <p:nvPr/>
         </p:nvSpPr>
@@ -21047,7 +21263,7 @@
       </p:sp>
       <p:sp>
         <p:nvSpPr>
-          <p:cNvPr id="63" name="Text 61"/>
+          <p:cNvPr id="66" name="Text 64"/>
           <p:cNvSpPr/>
           <p:nvPr/>
         </p:nvSpPr>
@@ -21086,7 +21302,7 @@
       </p:sp>
       <p:sp>
         <p:nvSpPr>
-          <p:cNvPr id="64" name="Text 62"/>
+          <p:cNvPr id="67" name="Text 65"/>
           <p:cNvSpPr/>
           <p:nvPr/>
         </p:nvSpPr>
@@ -21125,7 +21341,7 @@
       </p:sp>
       <p:sp>
         <p:nvSpPr>
-          <p:cNvPr id="65" name="Text 63"/>
+          <p:cNvPr id="68" name="Text 66"/>
           <p:cNvSpPr/>
           <p:nvPr/>
         </p:nvSpPr>
@@ -21164,7 +21380,7 @@
       </p:sp>
       <p:sp>
         <p:nvSpPr>
-          <p:cNvPr id="66" name="Text 64"/>
+          <p:cNvPr id="69" name="Text 67"/>
           <p:cNvSpPr/>
           <p:nvPr/>
         </p:nvSpPr>
@@ -21203,7 +21419,7 @@
       </p:sp>
       <p:sp>
         <p:nvSpPr>
-          <p:cNvPr id="67" name="Shape 65"/>
+          <p:cNvPr id="70" name="Shape 68"/>
           <p:cNvSpPr/>
           <p:nvPr/>
         </p:nvSpPr>
@@ -21228,7 +21444,7 @@
       </p:sp>
       <p:sp>
         <p:nvSpPr>
-          <p:cNvPr id="68" name="Shape 66"/>
+          <p:cNvPr id="71" name="Shape 69"/>
           <p:cNvSpPr/>
           <p:nvPr/>
         </p:nvSpPr>
@@ -21253,7 +21469,7 @@
       </p:sp>
       <p:sp>
         <p:nvSpPr>
-          <p:cNvPr id="69" name="Text 67"/>
+          <p:cNvPr id="72" name="Text 70"/>
           <p:cNvSpPr/>
           <p:nvPr/>
         </p:nvSpPr>
@@ -21292,7 +21508,7 @@
       </p:sp>
       <p:sp>
         <p:nvSpPr>
-          <p:cNvPr id="70" name="Text 68"/>
+          <p:cNvPr id="73" name="Text 71"/>
           <p:cNvSpPr/>
           <p:nvPr/>
         </p:nvSpPr>
@@ -21331,7 +21547,7 @@
       </p:sp>
       <p:sp>
         <p:nvSpPr>
-          <p:cNvPr id="71" name="Text 69"/>
+          <p:cNvPr id="74" name="Text 72"/>
           <p:cNvSpPr/>
           <p:nvPr/>
         </p:nvSpPr>
@@ -21370,7 +21586,7 @@
       </p:sp>
       <p:sp>
         <p:nvSpPr>
-          <p:cNvPr id="72" name="Text 70"/>
+          <p:cNvPr id="75" name="Text 73"/>
           <p:cNvSpPr/>
           <p:nvPr/>
         </p:nvSpPr>
@@ -21409,7 +21625,7 @@
       </p:sp>
       <p:sp>
         <p:nvSpPr>
-          <p:cNvPr id="73" name="Text 71"/>
+          <p:cNvPr id="76" name="Text 74"/>
           <p:cNvSpPr/>
           <p:nvPr/>
         </p:nvSpPr>
@@ -21448,7 +21664,7 @@
       </p:sp>
       <p:sp>
         <p:nvSpPr>
-          <p:cNvPr id="74" name="Shape 72"/>
+          <p:cNvPr id="77" name="Shape 75"/>
           <p:cNvSpPr/>
           <p:nvPr/>
         </p:nvSpPr>
@@ -21473,7 +21689,7 @@
       </p:sp>
       <p:sp>
         <p:nvSpPr>
-          <p:cNvPr id="75" name="Text 73"/>
+          <p:cNvPr id="78" name="Text 76"/>
           <p:cNvSpPr/>
           <p:nvPr/>
         </p:nvSpPr>
@@ -21512,7 +21728,7 @@
       </p:sp>
       <p:sp>
         <p:nvSpPr>
-          <p:cNvPr id="76" name="Text 74"/>
+          <p:cNvPr id="79" name="Text 77"/>
           <p:cNvSpPr/>
           <p:nvPr/>
         </p:nvSpPr>
@@ -22118,7 +22334,7 @@
                 <a:ea typeface="Calibri" pitchFamily="34" charset="-122"/>
                 <a:cs typeface="Calibri" pitchFamily="34" charset="-120"/>
               </a:rPr>
-              <a:t>**진행단계 맥락 평가**</a:t>
+              <a:t>**사업 진행단계 &amp; 맥락 평가**</a:t>
             </a:r>
             <a:endParaRPr lang="en-US" sz="800" dirty="0"/>
           </a:p>
@@ -22126,6 +22342,12 @@
             <a:pPr indent="0" marL="0">
               <a:buNone/>
             </a:pPr>
+            <a:endParaRPr lang="en-US" sz="800" dirty="0"/>
+          </a:p>
+          <a:p>
+            <a:pPr indent="0" marL="0">
+              <a:buNone/>
+            </a:pPr>
             <a:r>
               <a:rPr lang="en-US" sz="800" dirty="0">
                 <a:solidFill>
@@ -22135,7 +22357,53 @@
                 <a:ea typeface="Calibri" pitchFamily="34" charset="-122"/>
                 <a:cs typeface="Calibri" pitchFamily="34" charset="-120"/>
               </a:rPr>
-              <a:t>베트남 교통 인프라 마스터플랜이 구체적 실행 단계에 진입했습니다. 4월 말부터 호치민시 지하철 터널링 착공(14억 달러), 고가도로 개통(2.47억 달러), 롱탄 국제공항 1단계 상업운영(2026년 목표) 등 주요 프로젝트들이 순차적으로 추진 중입니다. **★ 이번 주 핵심 변화: 롱탄 공항 프로젝트의 최고 지도자 직접 가속화 촉구**가 신호탄으로, 정부 차원의 …</a:t>
+              <a:t>베트남 교통 인프라 마스터플랜 2021-2030은 ★**2026년 상업 운영 목표 시점 도입 단계**에 진입했습니다. </a:t>
+            </a:r>
+            <a:endParaRPr lang="en-US" sz="800" dirty="0"/>
+          </a:p>
+          <a:p>
+            <a:pPr indent="0" marL="0">
+              <a:buNone/>
+            </a:pPr>
+            <a:endParaRPr lang="en-US" sz="800" dirty="0"/>
+          </a:p>
+          <a:p>
+            <a:pPr indent="0" marL="0">
+              <a:buNone/>
+            </a:pPr>
+            <a:r>
+              <a:rPr lang="en-US" sz="800" dirty="0">
+                <a:solidFill>
+                  <a:srgbClr val="374151"/>
+                </a:solidFill>
+                <a:latin typeface="Calibri" pitchFamily="34" charset="0"/>
+                <a:ea typeface="Calibri" pitchFamily="34" charset="-122"/>
+                <a:cs typeface="Calibri" pitchFamily="34" charset="-120"/>
+              </a:rPr>
+              <a:t>히스토리(4월 말)에서 동나이 43억 달러 운송 링크 계획, 호치민 사이공강 지하철 14억 달러 착공 등 **대규모 동시다중 프로젝트 추진**이 시작되었고, 이번 주(5월 초)에는 이러한 모멘텀이 강화됩니다:</a:t>
+            </a:r>
+            <a:endParaRPr lang="en-US" sz="800" dirty="0"/>
+          </a:p>
+          <a:p>
+            <a:pPr indent="0" marL="0">
+              <a:buNone/>
+            </a:pPr>
+            <a:endParaRPr lang="en-US" sz="800" dirty="0"/>
+          </a:p>
+          <a:p>
+            <a:pPr indent="0" marL="0">
+              <a:buNone/>
+            </a:pPr>
+            <a:r>
+              <a:rPr lang="en-US" sz="800" dirty="0">
+                <a:solidFill>
+                  <a:srgbClr val="374151"/>
+                </a:solidFill>
+                <a:latin typeface="Calibri" pitchFamily="34" charset="0"/>
+                <a:ea typeface="Calibri" pitchFamily="34" charset="-122"/>
+                <a:cs typeface="Calibri" pitchFamily="34" charset="-120"/>
+              </a:rPr>
+              <a:t>- **공항 인프라**…</a:t>
             </a:r>
             <a:endParaRPr lang="en-US" sz="800" dirty="0"/>
           </a:p>
@@ -22238,7 +22506,7 @@
                 <a:ea typeface="Calibri" pitchFamily="34" charset="-122"/>
                 <a:cs typeface="Calibri" pitchFamily="34" charset="-120"/>
               </a:rPr>
-              <a:t>롱탄공항 2026년 상업운영 진전은 호찌민 교통망 완성의 핵심 마일스톤이며, 무디스 긍정적 평가는 향후 인프라 프로젝트 재정조달 여건이 개선될 것을 시사합니다. 한국 건설사 수주…</a:t>
+              <a:t>베트남의 국제신용등급 상향(무디스)과 대규모 인프라 동시추진은 투자 리스크 감소 신호입니다. 롱탄공항 2026년 상업운영 달성 여부와 동나이 운송 링크 완성도가 **향후 2-3년…</a:t>
             </a:r>
             <a:endParaRPr lang="en-US" sz="750" dirty="0"/>
           </a:p>
@@ -26375,17 +26643,17 @@
         <p:spPr>
           <a:xfrm>
             <a:off x="1069848" y="813816"/>
-            <a:ext cx="2468880" cy="82296"/>
+            <a:ext cx="617220" cy="82296"/>
           </a:xfrm>
           <a:prstGeom prst="rect">
             <a:avLst/>
           </a:prstGeom>
           <a:solidFill>
-            <a:srgbClr val="D4820A"/>
+            <a:srgbClr val="1B4F8A"/>
           </a:solidFill>
           <a:ln w="12700">
             <a:solidFill>
-              <a:srgbClr val="D4820A"/>
+              <a:srgbClr val="1B4F8A"/>
             </a:solidFill>
             <a:prstDash val="solid"/>
           </a:ln>
@@ -26418,13 +26686,13 @@
             <a:r>
               <a:rPr lang="en-US" sz="750" b="1" dirty="0">
                 <a:solidFill>
-                  <a:srgbClr val="D4820A"/>
-                </a:solidFill>
-                <a:latin typeface="Calibri" pitchFamily="34" charset="0"/>
-                <a:ea typeface="Calibri" pitchFamily="34" charset="-122"/>
-                <a:cs typeface="Calibri" pitchFamily="34" charset="-120"/>
-              </a:rPr>
-              <a:t>건설·시공</a:t>
+                  <a:srgbClr val="1B4F8A"/>
+                </a:solidFill>
+                <a:latin typeface="Calibri" pitchFamily="34" charset="0"/>
+                <a:ea typeface="Calibri" pitchFamily="34" charset="-122"/>
+                <a:cs typeface="Calibri" pitchFamily="34" charset="-120"/>
+              </a:rPr>
+              <a:t>계획·승인</a:t>
             </a:r>
             <a:endParaRPr lang="en-US" sz="750" dirty="0"/>
           </a:p>
@@ -26542,7 +26810,7 @@
         <p:spPr>
           <a:xfrm>
             <a:off x="4325112" y="1353312"/>
-            <a:ext cx="4498848" cy="1243584"/>
+            <a:ext cx="4498848" cy="1700784"/>
           </a:xfrm>
           <a:prstGeom prst="rect">
             <a:avLst/>
@@ -26567,7 +26835,7 @@
         <p:spPr>
           <a:xfrm>
             <a:off x="4325112" y="1353312"/>
-            <a:ext cx="36576" cy="1243584"/>
+            <a:ext cx="36576" cy="1700784"/>
           </a:xfrm>
           <a:prstGeom prst="rect">
             <a:avLst/>
@@ -26592,7 +26860,7 @@
         <p:spPr>
           <a:xfrm>
             <a:off x="4398264" y="1353312"/>
-            <a:ext cx="4389120" cy="1243584"/>
+            <a:ext cx="4389120" cy="1700784"/>
           </a:xfrm>
           <a:prstGeom prst="rect">
             <a:avLst/>
@@ -26616,7 +26884,7 @@
                 <a:ea typeface="Calibri" pitchFamily="34" charset="-122"/>
                 <a:cs typeface="Calibri" pitchFamily="34" charset="-120"/>
               </a:rPr>
-              <a:t>**진행단계 맥락 평가:**</a:t>
+              <a:t># VN-URB-METRO-2030 진행현황 분석 리포트</a:t>
             </a:r>
             <a:endParaRPr lang="en-US" sz="800" dirty="0"/>
           </a:p>
@@ -26624,6 +26892,12 @@
             <a:pPr indent="0" marL="0">
               <a:buNone/>
             </a:pPr>
+            <a:endParaRPr lang="en-US" sz="800" dirty="0"/>
+          </a:p>
+          <a:p>
+            <a:pPr indent="0" marL="0">
+              <a:buNone/>
+            </a:pPr>
             <a:r>
               <a:rPr lang="en-US" sz="800" dirty="0">
                 <a:solidFill>
@@ -26633,7 +26907,7 @@
                 <a:ea typeface="Calibri" pitchFamily="34" charset="-122"/>
                 <a:cs typeface="Calibri" pitchFamily="34" charset="-120"/>
               </a:rPr>
-              <a:t>히스토리 기사(4월)는 하노이·호치민시 30개 노선 건설, Long Thanh 공항 연계, TOD(역세권 개발) 정책 수립 등 **전략 수립 → 실행 초기 단계**를 나타냅니다. 신규 기사들은 이를 보완하는 **수요 창출 및 스마트 인프라 통합** 신호입니다.</a:t>
+              <a:t>---</a:t>
             </a:r>
             <a:endParaRPr lang="en-US" sz="800" dirty="0"/>
           </a:p>
@@ -26656,7 +26930,7 @@
                 <a:ea typeface="Calibri" pitchFamily="34" charset="-122"/>
                 <a:cs typeface="Calibri" pitchFamily="34" charset="-120"/>
               </a:rPr>
-              <a:t>★ **핵심 포인트:**</a:t>
+              <a:t>## 1. 최신 뉴스 분석</a:t>
             </a:r>
             <a:endParaRPr lang="en-US" sz="800" dirty="0"/>
           </a:p>
@@ -26664,6 +26938,12 @@
             <a:pPr indent="0" marL="0">
               <a:buNone/>
             </a:pPr>
+            <a:endParaRPr lang="en-US" sz="800" dirty="0"/>
+          </a:p>
+          <a:p>
+            <a:pPr indent="0" marL="0">
+              <a:buNone/>
+            </a:pPr>
             <a:r>
               <a:rPr lang="en-US" sz="800" dirty="0">
                 <a:solidFill>
@@ -26673,118 +26953,32 @@
                 <a:ea typeface="Calibri" pitchFamily="34" charset="-122"/>
                 <a:cs typeface="Calibri" pitchFamily="34" charset="-120"/>
               </a:rPr>
-              <a:t>- **수요 측면**: 아고다 국내 여행 검색 81% 증가 → 메트로 수요 …</a:t>
+              <a:t>**진행단계 맥락:**</a:t>
             </a:r>
             <a:endParaRPr lang="en-US" sz="800" dirty="0"/>
           </a:p>
-        </p:txBody>
-      </p:sp>
-      <p:sp>
-        <p:nvSpPr>
-          <p:cNvPr id="19" name="Shape 17"/>
-          <p:cNvSpPr/>
-          <p:nvPr/>
-        </p:nvSpPr>
-        <p:spPr>
-          <a:xfrm>
-            <a:off x="4325112" y="2651760"/>
-            <a:ext cx="4498848" cy="402336"/>
-          </a:xfrm>
-          <a:prstGeom prst="rect">
-            <a:avLst/>
-          </a:prstGeom>
-          <a:solidFill>
-            <a:srgbClr val="E8EEF4"/>
-          </a:solidFill>
-          <a:ln w="12700">
-            <a:solidFill>
-              <a:srgbClr val="0C2340"/>
-            </a:solidFill>
-            <a:prstDash val="solid"/>
-          </a:ln>
-        </p:spPr>
-      </p:sp>
-      <p:sp>
-        <p:nvSpPr>
-          <p:cNvPr id="20" name="Text 18"/>
-          <p:cNvSpPr/>
-          <p:nvPr/>
-        </p:nvSpPr>
-        <p:spPr>
-          <a:xfrm>
-            <a:off x="4370832" y="2670048"/>
-            <a:ext cx="594360" cy="146304"/>
-          </a:xfrm>
-          <a:prstGeom prst="rect">
-            <a:avLst/>
-          </a:prstGeom>
-          <a:noFill/>
-          <a:ln/>
-        </p:spPr>
-        <p:txBody>
-          <a:bodyPr wrap="square" lIns="0" tIns="0" rIns="0" bIns="0" rtlCol="0" anchor="ctr"/>
-          <a:lstStyle/>
-          <a:p>
-            <a:pPr indent="0" marL="0">
-              <a:buNone/>
-            </a:pPr>
-            <a:r>
-              <a:rPr lang="en-US" sz="700" b="1" dirty="0">
-                <a:solidFill>
-                  <a:srgbClr val="0C2340"/>
-                </a:solidFill>
-                <a:latin typeface="Calibri" pitchFamily="34" charset="0"/>
-                <a:ea typeface="Calibri" pitchFamily="34" charset="-122"/>
-                <a:cs typeface="Calibri" pitchFamily="34" charset="-120"/>
-              </a:rPr>
-              <a:t>Insight</a:t>
-            </a:r>
-            <a:endParaRPr lang="en-US" sz="700" dirty="0"/>
-          </a:p>
-        </p:txBody>
-      </p:sp>
-      <p:sp>
-        <p:nvSpPr>
-          <p:cNvPr id="21" name="Text 19"/>
-          <p:cNvSpPr/>
-          <p:nvPr/>
-        </p:nvSpPr>
-        <p:spPr>
-          <a:xfrm>
-            <a:off x="4370832" y="2834640"/>
-            <a:ext cx="4407408" cy="201168"/>
-          </a:xfrm>
-          <a:prstGeom prst="rect">
-            <a:avLst/>
-          </a:prstGeom>
-          <a:noFill/>
-          <a:ln/>
-        </p:spPr>
-        <p:txBody>
-          <a:bodyPr wrap="square" lIns="0" tIns="0" rIns="0" bIns="0" rtlCol="0" anchor="ctr"/>
-          <a:lstStyle/>
-          <a:p>
-            <a:pPr indent="0" marL="0">
-              <a:buNone/>
-            </a:pPr>
-            <a:r>
-              <a:rPr lang="en-US" sz="750" b="1" dirty="0">
-                <a:solidFill>
-                  <a:srgbClr val="0C2340"/>
-                </a:solidFill>
-                <a:latin typeface="Calibri" pitchFamily="34" charset="0"/>
-                <a:ea typeface="Calibri" pitchFamily="34" charset="-122"/>
-                <a:cs typeface="Calibri" pitchFamily="34" charset="-120"/>
-              </a:rPr>
-              <a:t>호치민시의 스마트시티 통합 추진과 관광 수요 급증(81%)이 메트로 프로젝트의 **투자 타당성을 재강화**하고 있습니다. 베트남이 단순 대중교통을 넘어 **스마트 모빌리티 + 도…</a:t>
-            </a:r>
-            <a:endParaRPr lang="en-US" sz="750" dirty="0"/>
-          </a:p>
-        </p:txBody>
-      </p:sp>
-      <p:sp>
-        <p:nvSpPr>
-          <p:cNvPr id="22" name="Text 20"/>
+          <a:p>
+            <a:pPr indent="0" marL="0">
+              <a:buNone/>
+            </a:pPr>
+            <a:r>
+              <a:rPr lang="en-US" sz="800" dirty="0">
+                <a:solidFill>
+                  <a:srgbClr val="374151"/>
+                </a:solidFill>
+                <a:latin typeface="Calibri" pitchFamily="34" charset="0"/>
+                <a:ea typeface="Calibri" pitchFamily="34" charset="-122"/>
+                <a:cs typeface="Calibri" pitchFamily="34" charset="-120"/>
+              </a:rPr>
+              <a:t>히스토리 기사(4월)는 30개 노선 건설 선언, 토지취득, TOD 우선처리 등 **실행 초기 단계(Phase 1: 계획→착공준비)**를 보여줍니다. 이번 주 신규 기사는 관광수요 증가(아고다 81% 상승)와 스마트시티 기술 연계라는 **수요창출 및 기술통합 단계(Phase…</a:t>
+            </a:r>
+            <a:endParaRPr lang="en-US" sz="800" dirty="0"/>
+          </a:p>
+        </p:txBody>
+      </p:sp>
+      <p:sp>
+        <p:nvSpPr>
+          <p:cNvPr id="19" name="Text 17"/>
           <p:cNvSpPr/>
           <p:nvPr/>
         </p:nvSpPr>
@@ -26823,7 +27017,7 @@
       </p:sp>
       <p:sp>
         <p:nvSpPr>
-          <p:cNvPr id="23" name="Shape 21"/>
+          <p:cNvPr id="20" name="Shape 18"/>
           <p:cNvSpPr/>
           <p:nvPr/>
         </p:nvSpPr>
@@ -26848,7 +27042,7 @@
       </p:sp>
       <p:sp>
         <p:nvSpPr>
-          <p:cNvPr id="24" name="Text 22"/>
+          <p:cNvPr id="21" name="Text 19"/>
           <p:cNvSpPr/>
           <p:nvPr/>
         </p:nvSpPr>
@@ -26887,7 +27081,7 @@
       </p:sp>
       <p:sp>
         <p:nvSpPr>
-          <p:cNvPr id="25" name="Text 23"/>
+          <p:cNvPr id="22" name="Text 20"/>
           <p:cNvSpPr/>
           <p:nvPr/>
         </p:nvSpPr>
@@ -26926,7 +27120,7 @@
       </p:sp>
       <p:sp>
         <p:nvSpPr>
-          <p:cNvPr id="26" name="Text 24"/>
+          <p:cNvPr id="23" name="Text 21"/>
           <p:cNvSpPr/>
           <p:nvPr/>
         </p:nvSpPr>
@@ -26965,7 +27159,7 @@
       </p:sp>
       <p:sp>
         <p:nvSpPr>
-          <p:cNvPr id="27" name="Text 25"/>
+          <p:cNvPr id="24" name="Text 22"/>
           <p:cNvSpPr/>
           <p:nvPr/>
         </p:nvSpPr>
@@ -27004,7 +27198,7 @@
       </p:sp>
       <p:sp>
         <p:nvSpPr>
-          <p:cNvPr id="28" name="Shape 26"/>
+          <p:cNvPr id="25" name="Shape 23"/>
           <p:cNvSpPr/>
           <p:nvPr/>
         </p:nvSpPr>
@@ -27029,7 +27223,7 @@
       </p:sp>
       <p:sp>
         <p:nvSpPr>
-          <p:cNvPr id="29" name="Shape 27"/>
+          <p:cNvPr id="26" name="Shape 24"/>
           <p:cNvSpPr/>
           <p:nvPr/>
         </p:nvSpPr>
@@ -27054,7 +27248,7 @@
       </p:sp>
       <p:sp>
         <p:nvSpPr>
-          <p:cNvPr id="30" name="Text 28"/>
+          <p:cNvPr id="27" name="Text 25"/>
           <p:cNvSpPr/>
           <p:nvPr/>
         </p:nvSpPr>
@@ -27093,7 +27287,7 @@
       </p:sp>
       <p:sp>
         <p:nvSpPr>
-          <p:cNvPr id="31" name="Text 29"/>
+          <p:cNvPr id="28" name="Text 26"/>
           <p:cNvSpPr/>
           <p:nvPr/>
         </p:nvSpPr>
@@ -27132,7 +27326,7 @@
       </p:sp>
       <p:sp>
         <p:nvSpPr>
-          <p:cNvPr id="32" name="Text 30"/>
+          <p:cNvPr id="29" name="Text 27"/>
           <p:cNvSpPr/>
           <p:nvPr/>
         </p:nvSpPr>
@@ -27171,7 +27365,7 @@
       </p:sp>
       <p:sp>
         <p:nvSpPr>
-          <p:cNvPr id="33" name="Text 31"/>
+          <p:cNvPr id="30" name="Text 28"/>
           <p:cNvSpPr/>
           <p:nvPr/>
         </p:nvSpPr>
@@ -27210,7 +27404,7 @@
       </p:sp>
       <p:sp>
         <p:nvSpPr>
-          <p:cNvPr id="34" name="Shape 32"/>
+          <p:cNvPr id="31" name="Shape 29"/>
           <p:cNvSpPr/>
           <p:nvPr/>
         </p:nvSpPr>
@@ -27235,7 +27429,7 @@
       </p:sp>
       <p:sp>
         <p:nvSpPr>
-          <p:cNvPr id="35" name="Shape 33"/>
+          <p:cNvPr id="32" name="Shape 30"/>
           <p:cNvSpPr/>
           <p:nvPr/>
         </p:nvSpPr>
@@ -27260,7 +27454,7 @@
       </p:sp>
       <p:sp>
         <p:nvSpPr>
-          <p:cNvPr id="36" name="Text 34"/>
+          <p:cNvPr id="33" name="Text 31"/>
           <p:cNvSpPr/>
           <p:nvPr/>
         </p:nvSpPr>
@@ -27299,7 +27493,7 @@
       </p:sp>
       <p:sp>
         <p:nvSpPr>
-          <p:cNvPr id="37" name="Text 35"/>
+          <p:cNvPr id="34" name="Text 32"/>
           <p:cNvSpPr/>
           <p:nvPr/>
         </p:nvSpPr>
@@ -27338,7 +27532,7 @@
       </p:sp>
       <p:sp>
         <p:nvSpPr>
-          <p:cNvPr id="38" name="Text 36"/>
+          <p:cNvPr id="35" name="Text 33"/>
           <p:cNvSpPr/>
           <p:nvPr/>
         </p:nvSpPr>
@@ -27377,7 +27571,7 @@
       </p:sp>
       <p:sp>
         <p:nvSpPr>
-          <p:cNvPr id="39" name="Text 37"/>
+          <p:cNvPr id="36" name="Text 34"/>
           <p:cNvSpPr/>
           <p:nvPr/>
         </p:nvSpPr>
@@ -27416,7 +27610,7 @@
       </p:sp>
       <p:sp>
         <p:nvSpPr>
-          <p:cNvPr id="40" name="Shape 38"/>
+          <p:cNvPr id="37" name="Shape 35"/>
           <p:cNvSpPr/>
           <p:nvPr/>
         </p:nvSpPr>
@@ -27441,7 +27635,7 @@
       </p:sp>
       <p:sp>
         <p:nvSpPr>
-          <p:cNvPr id="41" name="Shape 39"/>
+          <p:cNvPr id="38" name="Shape 36"/>
           <p:cNvSpPr/>
           <p:nvPr/>
         </p:nvSpPr>
@@ -27466,7 +27660,7 @@
       </p:sp>
       <p:sp>
         <p:nvSpPr>
-          <p:cNvPr id="42" name="Text 40"/>
+          <p:cNvPr id="39" name="Text 37"/>
           <p:cNvSpPr/>
           <p:nvPr/>
         </p:nvSpPr>
@@ -27505,7 +27699,7 @@
       </p:sp>
       <p:sp>
         <p:nvSpPr>
-          <p:cNvPr id="43" name="Text 41"/>
+          <p:cNvPr id="40" name="Text 38"/>
           <p:cNvSpPr/>
           <p:nvPr/>
         </p:nvSpPr>
@@ -27544,7 +27738,7 @@
       </p:sp>
       <p:sp>
         <p:nvSpPr>
-          <p:cNvPr id="44" name="Text 42"/>
+          <p:cNvPr id="41" name="Text 39"/>
           <p:cNvSpPr/>
           <p:nvPr/>
         </p:nvSpPr>
@@ -27583,7 +27777,7 @@
       </p:sp>
       <p:sp>
         <p:nvSpPr>
-          <p:cNvPr id="45" name="Text 43"/>
+          <p:cNvPr id="42" name="Text 40"/>
           <p:cNvSpPr/>
           <p:nvPr/>
         </p:nvSpPr>
@@ -27622,7 +27816,7 @@
       </p:sp>
       <p:sp>
         <p:nvSpPr>
-          <p:cNvPr id="46" name="Shape 44"/>
+          <p:cNvPr id="43" name="Shape 41"/>
           <p:cNvSpPr/>
           <p:nvPr/>
         </p:nvSpPr>
@@ -27647,7 +27841,7 @@
       </p:sp>
       <p:sp>
         <p:nvSpPr>
-          <p:cNvPr id="47" name="Shape 45"/>
+          <p:cNvPr id="44" name="Shape 42"/>
           <p:cNvSpPr/>
           <p:nvPr/>
         </p:nvSpPr>
@@ -27672,7 +27866,7 @@
       </p:sp>
       <p:sp>
         <p:nvSpPr>
-          <p:cNvPr id="48" name="Text 46"/>
+          <p:cNvPr id="45" name="Text 43"/>
           <p:cNvSpPr/>
           <p:nvPr/>
         </p:nvSpPr>
@@ -27711,7 +27905,7 @@
       </p:sp>
       <p:sp>
         <p:nvSpPr>
-          <p:cNvPr id="49" name="Text 47"/>
+          <p:cNvPr id="46" name="Text 44"/>
           <p:cNvSpPr/>
           <p:nvPr/>
         </p:nvSpPr>
@@ -27750,7 +27944,7 @@
       </p:sp>
       <p:sp>
         <p:nvSpPr>
-          <p:cNvPr id="50" name="Text 48"/>
+          <p:cNvPr id="47" name="Text 45"/>
           <p:cNvSpPr/>
           <p:nvPr/>
         </p:nvSpPr>
@@ -27789,7 +27983,7 @@
       </p:sp>
       <p:sp>
         <p:nvSpPr>
-          <p:cNvPr id="51" name="Text 49"/>
+          <p:cNvPr id="48" name="Text 46"/>
           <p:cNvSpPr/>
           <p:nvPr/>
         </p:nvSpPr>
@@ -27828,7 +28022,7 @@
       </p:sp>
       <p:sp>
         <p:nvSpPr>
-          <p:cNvPr id="52" name="Shape 50"/>
+          <p:cNvPr id="49" name="Shape 47"/>
           <p:cNvSpPr/>
           <p:nvPr/>
         </p:nvSpPr>
@@ -27853,7 +28047,7 @@
       </p:sp>
       <p:sp>
         <p:nvSpPr>
-          <p:cNvPr id="53" name="Shape 51"/>
+          <p:cNvPr id="50" name="Shape 48"/>
           <p:cNvSpPr/>
           <p:nvPr/>
         </p:nvSpPr>
@@ -27878,7 +28072,7 @@
       </p:sp>
       <p:sp>
         <p:nvSpPr>
-          <p:cNvPr id="54" name="Text 52"/>
+          <p:cNvPr id="51" name="Text 49"/>
           <p:cNvSpPr/>
           <p:nvPr/>
         </p:nvSpPr>
@@ -27917,7 +28111,7 @@
       </p:sp>
       <p:sp>
         <p:nvSpPr>
-          <p:cNvPr id="55" name="Text 53"/>
+          <p:cNvPr id="52" name="Text 50"/>
           <p:cNvSpPr/>
           <p:nvPr/>
         </p:nvSpPr>
@@ -27956,7 +28150,7 @@
       </p:sp>
       <p:sp>
         <p:nvSpPr>
-          <p:cNvPr id="56" name="Text 54"/>
+          <p:cNvPr id="53" name="Text 51"/>
           <p:cNvSpPr/>
           <p:nvPr/>
         </p:nvSpPr>
@@ -27995,7 +28189,7 @@
       </p:sp>
       <p:sp>
         <p:nvSpPr>
-          <p:cNvPr id="57" name="Text 55"/>
+          <p:cNvPr id="54" name="Text 52"/>
           <p:cNvSpPr/>
           <p:nvPr/>
         </p:nvSpPr>
@@ -28034,7 +28228,7 @@
       </p:sp>
       <p:sp>
         <p:nvSpPr>
-          <p:cNvPr id="58" name="Shape 56"/>
+          <p:cNvPr id="55" name="Shape 53"/>
           <p:cNvSpPr/>
           <p:nvPr/>
         </p:nvSpPr>
@@ -28059,7 +28253,7 @@
       </p:sp>
       <p:sp>
         <p:nvSpPr>
-          <p:cNvPr id="59" name="Shape 57"/>
+          <p:cNvPr id="56" name="Shape 54"/>
           <p:cNvSpPr/>
           <p:nvPr/>
         </p:nvSpPr>
@@ -28084,7 +28278,7 @@
       </p:sp>
       <p:sp>
         <p:nvSpPr>
-          <p:cNvPr id="60" name="Text 58"/>
+          <p:cNvPr id="57" name="Text 55"/>
           <p:cNvSpPr/>
           <p:nvPr/>
         </p:nvSpPr>
@@ -28123,7 +28317,7 @@
       </p:sp>
       <p:sp>
         <p:nvSpPr>
-          <p:cNvPr id="61" name="Text 59"/>
+          <p:cNvPr id="58" name="Text 56"/>
           <p:cNvSpPr/>
           <p:nvPr/>
         </p:nvSpPr>
@@ -28162,7 +28356,7 @@
       </p:sp>
       <p:sp>
         <p:nvSpPr>
-          <p:cNvPr id="62" name="Text 60"/>
+          <p:cNvPr id="59" name="Text 57"/>
           <p:cNvSpPr/>
           <p:nvPr/>
         </p:nvSpPr>
@@ -28201,7 +28395,7 @@
       </p:sp>
       <p:sp>
         <p:nvSpPr>
-          <p:cNvPr id="63" name="Text 61"/>
+          <p:cNvPr id="60" name="Text 58"/>
           <p:cNvSpPr/>
           <p:nvPr/>
         </p:nvSpPr>
@@ -28240,7 +28434,7 @@
       </p:sp>
       <p:sp>
         <p:nvSpPr>
-          <p:cNvPr id="64" name="Shape 62"/>
+          <p:cNvPr id="61" name="Shape 59"/>
           <p:cNvSpPr/>
           <p:nvPr/>
         </p:nvSpPr>
@@ -28265,7 +28459,7 @@
       </p:sp>
       <p:sp>
         <p:nvSpPr>
-          <p:cNvPr id="65" name="Shape 63"/>
+          <p:cNvPr id="62" name="Shape 60"/>
           <p:cNvSpPr/>
           <p:nvPr/>
         </p:nvSpPr>
@@ -28290,7 +28484,7 @@
       </p:sp>
       <p:sp>
         <p:nvSpPr>
-          <p:cNvPr id="66" name="Text 64"/>
+          <p:cNvPr id="63" name="Text 61"/>
           <p:cNvSpPr/>
           <p:nvPr/>
         </p:nvSpPr>
@@ -28329,7 +28523,7 @@
       </p:sp>
       <p:sp>
         <p:nvSpPr>
-          <p:cNvPr id="67" name="Text 65"/>
+          <p:cNvPr id="64" name="Text 62"/>
           <p:cNvSpPr/>
           <p:nvPr/>
         </p:nvSpPr>
@@ -28368,7 +28562,7 @@
       </p:sp>
       <p:sp>
         <p:nvSpPr>
-          <p:cNvPr id="68" name="Text 66"/>
+          <p:cNvPr id="65" name="Text 63"/>
           <p:cNvSpPr/>
           <p:nvPr/>
         </p:nvSpPr>
@@ -28407,7 +28601,7 @@
       </p:sp>
       <p:sp>
         <p:nvSpPr>
-          <p:cNvPr id="69" name="Text 67"/>
+          <p:cNvPr id="66" name="Text 64"/>
           <p:cNvSpPr/>
           <p:nvPr/>
         </p:nvSpPr>
@@ -28446,7 +28640,7 @@
       </p:sp>
       <p:sp>
         <p:nvSpPr>
-          <p:cNvPr id="70" name="Shape 68"/>
+          <p:cNvPr id="67" name="Shape 65"/>
           <p:cNvSpPr/>
           <p:nvPr/>
         </p:nvSpPr>
@@ -28471,7 +28665,7 @@
       </p:sp>
       <p:sp>
         <p:nvSpPr>
-          <p:cNvPr id="71" name="Shape 69"/>
+          <p:cNvPr id="68" name="Shape 66"/>
           <p:cNvSpPr/>
           <p:nvPr/>
         </p:nvSpPr>
@@ -28496,7 +28690,7 @@
       </p:sp>
       <p:sp>
         <p:nvSpPr>
-          <p:cNvPr id="72" name="Text 70"/>
+          <p:cNvPr id="69" name="Text 67"/>
           <p:cNvSpPr/>
           <p:nvPr/>
         </p:nvSpPr>
@@ -28535,7 +28729,7 @@
       </p:sp>
       <p:sp>
         <p:nvSpPr>
-          <p:cNvPr id="73" name="Text 71"/>
+          <p:cNvPr id="70" name="Text 68"/>
           <p:cNvSpPr/>
           <p:nvPr/>
         </p:nvSpPr>
@@ -28574,7 +28768,7 @@
       </p:sp>
       <p:sp>
         <p:nvSpPr>
-          <p:cNvPr id="74" name="Text 72"/>
+          <p:cNvPr id="71" name="Text 69"/>
           <p:cNvSpPr/>
           <p:nvPr/>
         </p:nvSpPr>
@@ -28613,7 +28807,7 @@
       </p:sp>
       <p:sp>
         <p:nvSpPr>
-          <p:cNvPr id="75" name="Text 73"/>
+          <p:cNvPr id="72" name="Text 70"/>
           <p:cNvSpPr/>
           <p:nvPr/>
         </p:nvSpPr>
@@ -28652,7 +28846,7 @@
       </p:sp>
       <p:sp>
         <p:nvSpPr>
-          <p:cNvPr id="76" name="Text 74"/>
+          <p:cNvPr id="73" name="Text 71"/>
           <p:cNvSpPr/>
           <p:nvPr/>
         </p:nvSpPr>
@@ -28691,7 +28885,7 @@
       </p:sp>
       <p:sp>
         <p:nvSpPr>
-          <p:cNvPr id="77" name="Shape 75"/>
+          <p:cNvPr id="74" name="Shape 72"/>
           <p:cNvSpPr/>
           <p:nvPr/>
         </p:nvSpPr>
@@ -28716,7 +28910,7 @@
       </p:sp>
       <p:sp>
         <p:nvSpPr>
-          <p:cNvPr id="78" name="Text 76"/>
+          <p:cNvPr id="75" name="Text 73"/>
           <p:cNvSpPr/>
           <p:nvPr/>
         </p:nvSpPr>
@@ -28755,7 +28949,7 @@
       </p:sp>
       <p:sp>
         <p:nvSpPr>
-          <p:cNvPr id="79" name="Text 77"/>
+          <p:cNvPr id="76" name="Text 74"/>
           <p:cNvSpPr/>
           <p:nvPr/>
         </p:nvSpPr>
@@ -29386,7 +29580,7 @@
                 <a:ea typeface="Calibri" pitchFamily="34" charset="-122"/>
                 <a:cs typeface="Calibri" pitchFamily="34" charset="-120"/>
               </a:rPr>
-              <a:t># VN-SC-2030 분석 리포트 (2026-05-05 업데이트)</a:t>
+              <a:t># VN-SC-2030 진행현황 분석 리포트 (2026-05-05)</a:t>
             </a:r>
             <a:endParaRPr lang="en-US" sz="800" dirty="0"/>
           </a:p>
@@ -29409,7 +29603,7 @@
                 <a:ea typeface="Calibri" pitchFamily="34" charset="-122"/>
                 <a:cs typeface="Calibri" pitchFamily="34" charset="-120"/>
               </a:rPr>
-              <a:t>---</a:t>
+              <a:t>## 1. 【최신 뉴스 분석】</a:t>
             </a:r>
             <a:endParaRPr lang="en-US" sz="800" dirty="0"/>
           </a:p>
@@ -29432,7 +29626,7 @@
                 <a:ea typeface="Calibri" pitchFamily="34" charset="-122"/>
                 <a:cs typeface="Calibri" pitchFamily="34" charset="-120"/>
               </a:rPr>
-              <a:t>## 1. 최신 뉴스 분석</a:t>
+              <a:t>**사업 진행단계 맥락:**</a:t>
             </a:r>
             <a:endParaRPr lang="en-US" sz="800" dirty="0"/>
           </a:p>
@@ -29440,12 +29634,6 @@
             <a:pPr indent="0" marL="0">
               <a:buNone/>
             </a:pPr>
-            <a:endParaRPr lang="en-US" sz="800" dirty="0"/>
-          </a:p>
-          <a:p>
-            <a:pPr indent="0" marL="0">
-              <a:buNone/>
-            </a:pPr>
             <a:r>
               <a:rPr lang="en-US" sz="800" dirty="0">
                 <a:solidFill>
@@ -29455,24 +29643,7 @@
                 <a:ea typeface="Calibri" pitchFamily="34" charset="-122"/>
                 <a:cs typeface="Calibri" pitchFamily="34" charset="-120"/>
               </a:rPr>
-              <a:t>**진행단계 평가:**</a:t>
-            </a:r>
-            <a:endParaRPr lang="en-US" sz="800" dirty="0"/>
-          </a:p>
-          <a:p>
-            <a:pPr indent="0" marL="0">
-              <a:buNone/>
-            </a:pPr>
-            <a:r>
-              <a:rPr lang="en-US" sz="800" dirty="0">
-                <a:solidFill>
-                  <a:srgbClr val="374151"/>
-                </a:solidFill>
-                <a:latin typeface="Calibri" pitchFamily="34" charset="0"/>
-                <a:ea typeface="Calibri" pitchFamily="34" charset="-122"/>
-                <a:cs typeface="Calibri" pitchFamily="34" charset="-120"/>
-              </a:rPr>
-              <a:t>히스토리 기사들(2026년 2~4월)은 5G·블록체인·디지털전환 등 **ICT 인프라 기층 구축 단계**를 보여주며, 신규 기사는 **활용층 확대 단계**로의 진입을 시사합니다. 특히 휴(Hue) 문화관광 앱(2018→2026년 디지털전환)은 스마트시티 인프라의…</a:t>
+              <a:t>히스토리 기사들(5G 인프라, 블록체인, 디지털 전환)은 광역 기반 마련 단계였다면, 신규 기사는 ★스마트시티 인프라를 시민 서비스로 구현하는 **'응용 전환기'**로 진입했음을 시사합니다. 휴시의 문화여권 앱(GPS 체크인, 보상시스템)은 디지털 기반 위 구축…</a:t>
             </a:r>
             <a:endParaRPr lang="en-US" sz="800" dirty="0"/>
           </a:p>
@@ -31340,7 +31511,7 @@
         <p:spPr>
           <a:xfrm>
             <a:off x="4325112" y="1353312"/>
-            <a:ext cx="4498848" cy="1243584"/>
+            <a:ext cx="4498848" cy="1700784"/>
           </a:xfrm>
           <a:prstGeom prst="rect">
             <a:avLst/>
@@ -31365,7 +31536,7 @@
         <p:spPr>
           <a:xfrm>
             <a:off x="4325112" y="1353312"/>
-            <a:ext cx="36576" cy="1243584"/>
+            <a:ext cx="36576" cy="1700784"/>
           </a:xfrm>
           <a:prstGeom prst="rect">
             <a:avLst/>
@@ -31390,7 +31561,7 @@
         <p:spPr>
           <a:xfrm>
             <a:off x="4398264" y="1353312"/>
-            <a:ext cx="4389120" cy="1243584"/>
+            <a:ext cx="4389120" cy="1700784"/>
           </a:xfrm>
           <a:prstGeom prst="rect">
             <a:avLst/>
@@ -31414,7 +31585,7 @@
                 <a:ea typeface="Calibri" pitchFamily="34" charset="-122"/>
                 <a:cs typeface="Calibri" pitchFamily="34" charset="-120"/>
               </a:rPr>
-              <a:t>히스토리 4건은 EV 전환(VinFast 순수 전기차 전환, 전기버스 보급, 충전·배터리 인프라)에 집중된 반면, 신규 기사는 **E10 휘발유 전국 출시**로 기존 내연기관 차량 기반 시장의 저탄소 전환 전략을 보여줍니다. </a:t>
+              <a:t># VN-EV-2030 진행현황 분석 리포트</a:t>
             </a:r>
             <a:endParaRPr lang="en-US" sz="800" dirty="0"/>
           </a:p>
@@ -31422,12 +31593,29 @@
             <a:pPr indent="0" marL="0">
               <a:buNone/>
             </a:pPr>
+            <a:r>
+              <a:rPr lang="en-US" sz="800" dirty="0">
+                <a:solidFill>
+                  <a:srgbClr val="374151"/>
+                </a:solidFill>
+                <a:latin typeface="Calibri" pitchFamily="34" charset="0"/>
+                <a:ea typeface="Calibri" pitchFamily="34" charset="-122"/>
+                <a:cs typeface="Calibri" pitchFamily="34" charset="-120"/>
+              </a:rPr>
+              <a:t>**분석일시:** 2026-05-04 (주간 누적 6건)</a:t>
+            </a:r>
             <a:endParaRPr lang="en-US" sz="800" dirty="0"/>
           </a:p>
           <a:p>
             <a:pPr indent="0" marL="0">
               <a:buNone/>
             </a:pPr>
+            <a:endParaRPr lang="en-US" sz="800" dirty="0"/>
+          </a:p>
+          <a:p>
+            <a:pPr indent="0" marL="0">
+              <a:buNone/>
+            </a:pPr>
             <a:r>
               <a:rPr lang="en-US" sz="800" dirty="0">
                 <a:solidFill>
@@ -31437,118 +31625,78 @@
                 <a:ea typeface="Calibri" pitchFamily="34" charset="-122"/>
                 <a:cs typeface="Calibri" pitchFamily="34" charset="-120"/>
               </a:rPr>
-              <a:t>★**핵심 변화: 이중 경로 전략 확인** — EV 직접 전환과 함께 기존 가솔린 인프라의 바이오에탄올 혼합(E10)으로 과도기 배출 감축. 단, **KPI 목표 …</a:t>
+              <a:t>---</a:t>
             </a:r>
             <a:endParaRPr lang="en-US" sz="800" dirty="0"/>
           </a:p>
-        </p:txBody>
-      </p:sp>
-      <p:sp>
-        <p:nvSpPr>
-          <p:cNvPr id="19" name="Shape 17"/>
-          <p:cNvSpPr/>
-          <p:nvPr/>
-        </p:nvSpPr>
-        <p:spPr>
-          <a:xfrm>
-            <a:off x="4325112" y="2651760"/>
-            <a:ext cx="4498848" cy="402336"/>
-          </a:xfrm>
-          <a:prstGeom prst="rect">
-            <a:avLst/>
-          </a:prstGeom>
-          <a:solidFill>
-            <a:srgbClr val="E8EEF4"/>
-          </a:solidFill>
-          <a:ln w="12700">
-            <a:solidFill>
-              <a:srgbClr val="0C2340"/>
-            </a:solidFill>
-            <a:prstDash val="solid"/>
-          </a:ln>
-        </p:spPr>
-      </p:sp>
-      <p:sp>
-        <p:nvSpPr>
-          <p:cNvPr id="20" name="Text 18"/>
-          <p:cNvSpPr/>
-          <p:nvPr/>
-        </p:nvSpPr>
-        <p:spPr>
-          <a:xfrm>
-            <a:off x="4370832" y="2670048"/>
-            <a:ext cx="594360" cy="146304"/>
-          </a:xfrm>
-          <a:prstGeom prst="rect">
-            <a:avLst/>
-          </a:prstGeom>
-          <a:noFill/>
-          <a:ln/>
-        </p:spPr>
-        <p:txBody>
-          <a:bodyPr wrap="square" lIns="0" tIns="0" rIns="0" bIns="0" rtlCol="0" anchor="ctr"/>
-          <a:lstStyle/>
-          <a:p>
-            <a:pPr indent="0" marL="0">
-              <a:buNone/>
-            </a:pPr>
-            <a:r>
-              <a:rPr lang="en-US" sz="700" b="1" dirty="0">
-                <a:solidFill>
-                  <a:srgbClr val="0C2340"/>
-                </a:solidFill>
-                <a:latin typeface="Calibri" pitchFamily="34" charset="0"/>
-                <a:ea typeface="Calibri" pitchFamily="34" charset="-122"/>
-                <a:cs typeface="Calibri" pitchFamily="34" charset="-120"/>
-              </a:rPr>
-              <a:t>Insight</a:t>
-            </a:r>
-            <a:endParaRPr lang="en-US" sz="700" dirty="0"/>
-          </a:p>
-        </p:txBody>
-      </p:sp>
-      <p:sp>
-        <p:nvSpPr>
-          <p:cNvPr id="21" name="Text 19"/>
-          <p:cNvSpPr/>
-          <p:nvPr/>
-        </p:nvSpPr>
-        <p:spPr>
-          <a:xfrm>
-            <a:off x="4370832" y="2834640"/>
-            <a:ext cx="4407408" cy="201168"/>
-          </a:xfrm>
-          <a:prstGeom prst="rect">
-            <a:avLst/>
-          </a:prstGeom>
-          <a:noFill/>
-          <a:ln/>
-        </p:spPr>
-        <p:txBody>
-          <a:bodyPr wrap="square" lIns="0" tIns="0" rIns="0" bIns="0" rtlCol="0" anchor="ctr"/>
-          <a:lstStyle/>
-          <a:p>
-            <a:pPr indent="0" marL="0">
-              <a:buNone/>
-            </a:pPr>
-            <a:r>
-              <a:rPr lang="en-US" sz="750" b="1" dirty="0">
-                <a:solidFill>
-                  <a:srgbClr val="0C2340"/>
-                </a:solidFill>
-                <a:latin typeface="Calibri" pitchFamily="34" charset="0"/>
-                <a:ea typeface="Calibri" pitchFamily="34" charset="-122"/>
-                <a:cs typeface="Calibri" pitchFamily="34" charset="-120"/>
-              </a:rPr>
-              <a:t>E10 도입은 EV 전환 시간을 벌기 위한 과도기 전략이지만, 정책 일관성 측면에서 2030년 탄소중립 목표와의 명확한 연계고리 부재가 우려됩니다. 정책 체계화와 통합 에너지 전…</a:t>
-            </a:r>
-            <a:endParaRPr lang="en-US" sz="750" dirty="0"/>
-          </a:p>
-        </p:txBody>
-      </p:sp>
-      <p:sp>
-        <p:nvSpPr>
-          <p:cNvPr id="22" name="Text 20"/>
+          <a:p>
+            <a:pPr indent="0" marL="0">
+              <a:buNone/>
+            </a:pPr>
+            <a:endParaRPr lang="en-US" sz="800" dirty="0"/>
+          </a:p>
+          <a:p>
+            <a:pPr indent="0" marL="0">
+              <a:buNone/>
+            </a:pPr>
+            <a:r>
+              <a:rPr lang="en-US" sz="800" dirty="0">
+                <a:solidFill>
+                  <a:srgbClr val="374151"/>
+                </a:solidFill>
+                <a:latin typeface="Calibri" pitchFamily="34" charset="0"/>
+                <a:ea typeface="Calibri" pitchFamily="34" charset="-122"/>
+                <a:cs typeface="Calibri" pitchFamily="34" charset="-120"/>
+              </a:rPr>
+              <a:t>## 1. 최신 뉴스 분석</a:t>
+            </a:r>
+            <a:endParaRPr lang="en-US" sz="800" dirty="0"/>
+          </a:p>
+          <a:p>
+            <a:pPr indent="0" marL="0">
+              <a:buNone/>
+            </a:pPr>
+            <a:endParaRPr lang="en-US" sz="800" dirty="0"/>
+          </a:p>
+          <a:p>
+            <a:pPr indent="0" marL="0">
+              <a:buNone/>
+            </a:pPr>
+            <a:r>
+              <a:rPr lang="en-US" sz="800" dirty="0">
+                <a:solidFill>
+                  <a:srgbClr val="374151"/>
+                </a:solidFill>
+                <a:latin typeface="Calibri" pitchFamily="34" charset="0"/>
+                <a:ea typeface="Calibri" pitchFamily="34" charset="-122"/>
+                <a:cs typeface="Calibri" pitchFamily="34" charset="-120"/>
+              </a:rPr>
+              <a:t>**사업 진행단계 맥락:**</a:t>
+            </a:r>
+            <a:endParaRPr lang="en-US" sz="800" dirty="0"/>
+          </a:p>
+          <a:p>
+            <a:pPr indent="0" marL="0">
+              <a:buNone/>
+            </a:pPr>
+            <a:r>
+              <a:rPr lang="en-US" sz="800" dirty="0">
+                <a:solidFill>
+                  <a:srgbClr val="374151"/>
+                </a:solidFill>
+                <a:latin typeface="Calibri" pitchFamily="34" charset="0"/>
+                <a:ea typeface="Calibri" pitchFamily="34" charset="-122"/>
+                <a:cs typeface="Calibri" pitchFamily="34" charset="-120"/>
+              </a:rPr>
+              <a:t>베트남 친환경 교통 전략은 **EV 중심 전환과 과도기적 바이오연료 병행** 단계로 진입했습니다. 히스토리 기사(4월)에서 VinFast의 가솔린 단절 선언→하노이의 전기버스 확대→전력망 최적화 검토로 이어지던 EV 가속화…</a:t>
+            </a:r>
+            <a:endParaRPr lang="en-US" sz="800" dirty="0"/>
+          </a:p>
+        </p:txBody>
+      </p:sp>
+      <p:sp>
+        <p:nvSpPr>
+          <p:cNvPr id="19" name="Text 17"/>
           <p:cNvSpPr/>
           <p:nvPr/>
         </p:nvSpPr>
@@ -31587,7 +31735,7 @@
       </p:sp>
       <p:sp>
         <p:nvSpPr>
-          <p:cNvPr id="23" name="Shape 21"/>
+          <p:cNvPr id="20" name="Shape 18"/>
           <p:cNvSpPr/>
           <p:nvPr/>
         </p:nvSpPr>
@@ -31612,7 +31760,7 @@
       </p:sp>
       <p:sp>
         <p:nvSpPr>
-          <p:cNvPr id="24" name="Text 22"/>
+          <p:cNvPr id="21" name="Text 19"/>
           <p:cNvSpPr/>
           <p:nvPr/>
         </p:nvSpPr>
@@ -31651,7 +31799,7 @@
       </p:sp>
       <p:sp>
         <p:nvSpPr>
-          <p:cNvPr id="25" name="Text 23"/>
+          <p:cNvPr id="22" name="Text 20"/>
           <p:cNvSpPr/>
           <p:nvPr/>
         </p:nvSpPr>
@@ -31690,7 +31838,7 @@
       </p:sp>
       <p:sp>
         <p:nvSpPr>
-          <p:cNvPr id="26" name="Text 24"/>
+          <p:cNvPr id="23" name="Text 21"/>
           <p:cNvSpPr/>
           <p:nvPr/>
         </p:nvSpPr>
@@ -31729,7 +31877,7 @@
       </p:sp>
       <p:sp>
         <p:nvSpPr>
-          <p:cNvPr id="27" name="Text 25"/>
+          <p:cNvPr id="24" name="Text 22"/>
           <p:cNvSpPr/>
           <p:nvPr/>
         </p:nvSpPr>
@@ -31768,7 +31916,7 @@
       </p:sp>
       <p:sp>
         <p:nvSpPr>
-          <p:cNvPr id="28" name="Shape 26"/>
+          <p:cNvPr id="25" name="Shape 23"/>
           <p:cNvSpPr/>
           <p:nvPr/>
         </p:nvSpPr>
@@ -31793,7 +31941,7 @@
       </p:sp>
       <p:sp>
         <p:nvSpPr>
-          <p:cNvPr id="29" name="Shape 27"/>
+          <p:cNvPr id="26" name="Shape 24"/>
           <p:cNvSpPr/>
           <p:nvPr/>
         </p:nvSpPr>
@@ -31818,7 +31966,7 @@
       </p:sp>
       <p:sp>
         <p:nvSpPr>
-          <p:cNvPr id="30" name="Text 28"/>
+          <p:cNvPr id="27" name="Text 25"/>
           <p:cNvSpPr/>
           <p:nvPr/>
         </p:nvSpPr>
@@ -31857,7 +32005,7 @@
       </p:sp>
       <p:sp>
         <p:nvSpPr>
-          <p:cNvPr id="31" name="Text 29"/>
+          <p:cNvPr id="28" name="Text 26"/>
           <p:cNvSpPr/>
           <p:nvPr/>
         </p:nvSpPr>
@@ -31896,7 +32044,7 @@
       </p:sp>
       <p:sp>
         <p:nvSpPr>
-          <p:cNvPr id="32" name="Text 30"/>
+          <p:cNvPr id="29" name="Text 27"/>
           <p:cNvSpPr/>
           <p:nvPr/>
         </p:nvSpPr>
@@ -31935,7 +32083,7 @@
       </p:sp>
       <p:sp>
         <p:nvSpPr>
-          <p:cNvPr id="33" name="Text 31"/>
+          <p:cNvPr id="30" name="Text 28"/>
           <p:cNvSpPr/>
           <p:nvPr/>
         </p:nvSpPr>
@@ -31974,7 +32122,7 @@
       </p:sp>
       <p:sp>
         <p:nvSpPr>
-          <p:cNvPr id="34" name="Shape 32"/>
+          <p:cNvPr id="31" name="Shape 29"/>
           <p:cNvSpPr/>
           <p:nvPr/>
         </p:nvSpPr>
@@ -31999,7 +32147,7 @@
       </p:sp>
       <p:sp>
         <p:nvSpPr>
-          <p:cNvPr id="35" name="Shape 33"/>
+          <p:cNvPr id="32" name="Shape 30"/>
           <p:cNvSpPr/>
           <p:nvPr/>
         </p:nvSpPr>
@@ -32024,7 +32172,7 @@
       </p:sp>
       <p:sp>
         <p:nvSpPr>
-          <p:cNvPr id="36" name="Text 34"/>
+          <p:cNvPr id="33" name="Text 31"/>
           <p:cNvSpPr/>
           <p:nvPr/>
         </p:nvSpPr>
@@ -32063,7 +32211,7 @@
       </p:sp>
       <p:sp>
         <p:nvSpPr>
-          <p:cNvPr id="37" name="Text 35"/>
+          <p:cNvPr id="34" name="Text 32"/>
           <p:cNvSpPr/>
           <p:nvPr/>
         </p:nvSpPr>
@@ -32102,7 +32250,7 @@
       </p:sp>
       <p:sp>
         <p:nvSpPr>
-          <p:cNvPr id="38" name="Text 36"/>
+          <p:cNvPr id="35" name="Text 33"/>
           <p:cNvSpPr/>
           <p:nvPr/>
         </p:nvSpPr>
@@ -32141,7 +32289,7 @@
       </p:sp>
       <p:sp>
         <p:nvSpPr>
-          <p:cNvPr id="39" name="Text 37"/>
+          <p:cNvPr id="36" name="Text 34"/>
           <p:cNvSpPr/>
           <p:nvPr/>
         </p:nvSpPr>
@@ -32180,7 +32328,7 @@
       </p:sp>
       <p:sp>
         <p:nvSpPr>
-          <p:cNvPr id="40" name="Shape 38"/>
+          <p:cNvPr id="37" name="Shape 35"/>
           <p:cNvSpPr/>
           <p:nvPr/>
         </p:nvSpPr>
@@ -32205,7 +32353,7 @@
       </p:sp>
       <p:sp>
         <p:nvSpPr>
-          <p:cNvPr id="41" name="Shape 39"/>
+          <p:cNvPr id="38" name="Shape 36"/>
           <p:cNvSpPr/>
           <p:nvPr/>
         </p:nvSpPr>
@@ -32230,7 +32378,7 @@
       </p:sp>
       <p:sp>
         <p:nvSpPr>
-          <p:cNvPr id="42" name="Text 40"/>
+          <p:cNvPr id="39" name="Text 37"/>
           <p:cNvSpPr/>
           <p:nvPr/>
         </p:nvSpPr>
@@ -32269,7 +32417,7 @@
       </p:sp>
       <p:sp>
         <p:nvSpPr>
-          <p:cNvPr id="43" name="Text 41"/>
+          <p:cNvPr id="40" name="Text 38"/>
           <p:cNvSpPr/>
           <p:nvPr/>
         </p:nvSpPr>
@@ -32308,7 +32456,7 @@
       </p:sp>
       <p:sp>
         <p:nvSpPr>
-          <p:cNvPr id="44" name="Text 42"/>
+          <p:cNvPr id="41" name="Text 39"/>
           <p:cNvSpPr/>
           <p:nvPr/>
         </p:nvSpPr>
@@ -32347,7 +32495,7 @@
       </p:sp>
       <p:sp>
         <p:nvSpPr>
-          <p:cNvPr id="45" name="Text 43"/>
+          <p:cNvPr id="42" name="Text 40"/>
           <p:cNvSpPr/>
           <p:nvPr/>
         </p:nvSpPr>
@@ -32386,7 +32534,7 @@
       </p:sp>
       <p:sp>
         <p:nvSpPr>
-          <p:cNvPr id="46" name="Shape 44"/>
+          <p:cNvPr id="43" name="Shape 41"/>
           <p:cNvSpPr/>
           <p:nvPr/>
         </p:nvSpPr>
@@ -32411,7 +32559,7 @@
       </p:sp>
       <p:sp>
         <p:nvSpPr>
-          <p:cNvPr id="47" name="Shape 45"/>
+          <p:cNvPr id="44" name="Shape 42"/>
           <p:cNvSpPr/>
           <p:nvPr/>
         </p:nvSpPr>
@@ -32436,7 +32584,7 @@
       </p:sp>
       <p:sp>
         <p:nvSpPr>
-          <p:cNvPr id="48" name="Text 46"/>
+          <p:cNvPr id="45" name="Text 43"/>
           <p:cNvSpPr/>
           <p:nvPr/>
         </p:nvSpPr>
@@ -32475,7 +32623,7 @@
       </p:sp>
       <p:sp>
         <p:nvSpPr>
-          <p:cNvPr id="49" name="Text 47"/>
+          <p:cNvPr id="46" name="Text 44"/>
           <p:cNvSpPr/>
           <p:nvPr/>
         </p:nvSpPr>
@@ -32514,7 +32662,7 @@
       </p:sp>
       <p:sp>
         <p:nvSpPr>
-          <p:cNvPr id="50" name="Text 48"/>
+          <p:cNvPr id="47" name="Text 45"/>
           <p:cNvSpPr/>
           <p:nvPr/>
         </p:nvSpPr>
@@ -32553,7 +32701,7 @@
       </p:sp>
       <p:sp>
         <p:nvSpPr>
-          <p:cNvPr id="51" name="Text 49"/>
+          <p:cNvPr id="48" name="Text 46"/>
           <p:cNvSpPr/>
           <p:nvPr/>
         </p:nvSpPr>
@@ -32592,7 +32740,7 @@
       </p:sp>
       <p:sp>
         <p:nvSpPr>
-          <p:cNvPr id="52" name="Shape 50"/>
+          <p:cNvPr id="49" name="Shape 47"/>
           <p:cNvSpPr/>
           <p:nvPr/>
         </p:nvSpPr>
@@ -32617,7 +32765,7 @@
       </p:sp>
       <p:sp>
         <p:nvSpPr>
-          <p:cNvPr id="53" name="Shape 51"/>
+          <p:cNvPr id="50" name="Shape 48"/>
           <p:cNvSpPr/>
           <p:nvPr/>
         </p:nvSpPr>
@@ -32642,7 +32790,7 @@
       </p:sp>
       <p:sp>
         <p:nvSpPr>
-          <p:cNvPr id="54" name="Text 52"/>
+          <p:cNvPr id="51" name="Text 49"/>
           <p:cNvSpPr/>
           <p:nvPr/>
         </p:nvSpPr>
@@ -32681,7 +32829,7 @@
       </p:sp>
       <p:sp>
         <p:nvSpPr>
-          <p:cNvPr id="55" name="Text 53"/>
+          <p:cNvPr id="52" name="Text 50"/>
           <p:cNvSpPr/>
           <p:nvPr/>
         </p:nvSpPr>
@@ -32720,7 +32868,7 @@
       </p:sp>
       <p:sp>
         <p:nvSpPr>
-          <p:cNvPr id="56" name="Text 54"/>
+          <p:cNvPr id="53" name="Text 51"/>
           <p:cNvSpPr/>
           <p:nvPr/>
         </p:nvSpPr>
@@ -32759,7 +32907,7 @@
       </p:sp>
       <p:sp>
         <p:nvSpPr>
-          <p:cNvPr id="57" name="Text 55"/>
+          <p:cNvPr id="54" name="Text 52"/>
           <p:cNvSpPr/>
           <p:nvPr/>
         </p:nvSpPr>
@@ -32798,7 +32946,7 @@
       </p:sp>
       <p:sp>
         <p:nvSpPr>
-          <p:cNvPr id="58" name="Shape 56"/>
+          <p:cNvPr id="55" name="Shape 53"/>
           <p:cNvSpPr/>
           <p:nvPr/>
         </p:nvSpPr>
@@ -32823,7 +32971,7 @@
       </p:sp>
       <p:sp>
         <p:nvSpPr>
-          <p:cNvPr id="59" name="Text 57"/>
+          <p:cNvPr id="56" name="Text 54"/>
           <p:cNvSpPr/>
           <p:nvPr/>
         </p:nvSpPr>
@@ -32862,7 +33010,7 @@
       </p:sp>
       <p:sp>
         <p:nvSpPr>
-          <p:cNvPr id="60" name="Text 58"/>
+          <p:cNvPr id="57" name="Text 55"/>
           <p:cNvSpPr/>
           <p:nvPr/>
         </p:nvSpPr>
@@ -33408,7 +33556,7 @@
         <p:spPr>
           <a:xfrm>
             <a:off x="4325112" y="1353312"/>
-            <a:ext cx="4498848" cy="1243584"/>
+            <a:ext cx="4498848" cy="1700784"/>
           </a:xfrm>
           <a:prstGeom prst="rect">
             <a:avLst/>
@@ -33433,7 +33581,7 @@
         <p:spPr>
           <a:xfrm>
             <a:off x="4325112" y="1353312"/>
-            <a:ext cx="36576" cy="1243584"/>
+            <a:ext cx="36576" cy="1700784"/>
           </a:xfrm>
           <a:prstGeom prst="rect">
             <a:avLst/>
@@ -33458,7 +33606,7 @@
         <p:spPr>
           <a:xfrm>
             <a:off x="4398264" y="1353312"/>
-            <a:ext cx="4389120" cy="1243584"/>
+            <a:ext cx="4389120" cy="1700784"/>
           </a:xfrm>
           <a:prstGeom prst="rect">
             <a:avLst/>
@@ -33482,6 +33630,52 @@
                 <a:ea typeface="Calibri" pitchFamily="34" charset="-122"/>
                 <a:cs typeface="Calibri" pitchFamily="34" charset="-120"/>
               </a:rPr>
+              <a:t># HN-URBAN-INFRA 진행현황 분석 (2026-05-04)</a:t>
+            </a:r>
+            <a:endParaRPr lang="en-US" sz="800" dirty="0"/>
+          </a:p>
+          <a:p>
+            <a:pPr indent="0" marL="0">
+              <a:buNone/>
+            </a:pPr>
+            <a:endParaRPr lang="en-US" sz="800" dirty="0"/>
+          </a:p>
+          <a:p>
+            <a:pPr indent="0" marL="0">
+              <a:buNone/>
+            </a:pPr>
+            <a:r>
+              <a:rPr lang="en-US" sz="800" dirty="0">
+                <a:solidFill>
+                  <a:srgbClr val="374151"/>
+                </a:solidFill>
+                <a:latin typeface="Calibri" pitchFamily="34" charset="0"/>
+                <a:ea typeface="Calibri" pitchFamily="34" charset="-122"/>
+                <a:cs typeface="Calibri" pitchFamily="34" charset="-120"/>
+              </a:rPr>
+              <a:t>## 1. 최신 뉴스 분석</a:t>
+            </a:r>
+            <a:endParaRPr lang="en-US" sz="800" dirty="0"/>
+          </a:p>
+          <a:p>
+            <a:pPr indent="0" marL="0">
+              <a:buNone/>
+            </a:pPr>
+            <a:endParaRPr lang="en-US" sz="800" dirty="0"/>
+          </a:p>
+          <a:p>
+            <a:pPr indent="0" marL="0">
+              <a:buNone/>
+            </a:pPr>
+            <a:r>
+              <a:rPr lang="en-US" sz="800" dirty="0">
+                <a:solidFill>
+                  <a:srgbClr val="374151"/>
+                </a:solidFill>
+                <a:latin typeface="Calibri" pitchFamily="34" charset="0"/>
+                <a:ea typeface="Calibri" pitchFamily="34" charset="-122"/>
+                <a:cs typeface="Calibri" pitchFamily="34" charset="-120"/>
+              </a:rPr>
               <a:t>**진행단계 맥락:**</a:t>
             </a:r>
             <a:endParaRPr lang="en-US" sz="800" dirty="0"/>
@@ -33499,158 +33693,15 @@
                 <a:ea typeface="Calibri" pitchFamily="34" charset="-122"/>
                 <a:cs typeface="Calibri" pitchFamily="34" charset="-120"/>
               </a:rPr>
-              <a:t>하노이 도시 인프라 계획 2030은 현재 **긴급 대응 및 가속화 단계**에 진입했습니다. 4월 30일 배수 시스템 우기 준비, 3월 링로드4(113km) 6월 개통 목표, 그리고 이번 주 신규 기사의 "긴급 프로젝트 진행 촉진"은 일관된 **우기 대비 집중 추진** 신호입니다.</a:t>
+              <a:t>하노이 도시 인프라 계획은 우기 대응 중심으로 실행 단계에 진입했습니다. 4월 배수시스템 운영 성공에 이어 신규 기사(5월 4일)는 우기 전 긴급 사업 추진 가속화를 보도하고 있습니다. 링로드4 병행도로(113km, 6월 개통 목표)와 배수 인프라가 핵심 추진 프로젝트임…</a:t>
             </a:r>
             <a:endParaRPr lang="en-US" sz="800" dirty="0"/>
           </a:p>
-          <a:p>
-            <a:pPr indent="0" marL="0">
-              <a:buNone/>
-            </a:pPr>
-            <a:endParaRPr lang="en-US" sz="800" dirty="0"/>
-          </a:p>
-          <a:p>
-            <a:pPr indent="0" marL="0">
-              <a:buNone/>
-            </a:pPr>
-            <a:r>
-              <a:rPr lang="en-US" sz="800" dirty="0">
-                <a:solidFill>
-                  <a:srgbClr val="374151"/>
-                </a:solidFill>
-                <a:latin typeface="Calibri" pitchFamily="34" charset="0"/>
-                <a:ea typeface="Calibri" pitchFamily="34" charset="-122"/>
-                <a:cs typeface="Calibri" pitchFamily="34" charset="-120"/>
-              </a:rPr>
-              <a:t>**KPI 목표 대비 달성 수준:**</a:t>
-            </a:r>
-            <a:endParaRPr lang="en-US" sz="800" dirty="0"/>
-          </a:p>
-          <a:p>
-            <a:pPr indent="0" marL="0">
-              <a:buNone/>
-            </a:pPr>
-            <a:r>
-              <a:rPr lang="en-US" sz="800" dirty="0">
-                <a:solidFill>
-                  <a:srgbClr val="374151"/>
-                </a:solidFill>
-                <a:latin typeface="Calibri" pitchFamily="34" charset="0"/>
-                <a:ea typeface="Calibri" pitchFamily="34" charset="-122"/>
-                <a:cs typeface="Calibri" pitchFamily="34" charset="-120"/>
-              </a:rPr>
-              <a:t>- 구체적 KPI 목표 미설정 상태이나, **배수…</a:t>
-            </a:r>
-            <a:endParaRPr lang="en-US" sz="800" dirty="0"/>
-          </a:p>
-        </p:txBody>
-      </p:sp>
-      <p:sp>
-        <p:nvSpPr>
-          <p:cNvPr id="19" name="Shape 17"/>
-          <p:cNvSpPr/>
-          <p:nvPr/>
-        </p:nvSpPr>
-        <p:spPr>
-          <a:xfrm>
-            <a:off x="4325112" y="2651760"/>
-            <a:ext cx="4498848" cy="402336"/>
-          </a:xfrm>
-          <a:prstGeom prst="rect">
-            <a:avLst/>
-          </a:prstGeom>
-          <a:solidFill>
-            <a:srgbClr val="E8EEF4"/>
-          </a:solidFill>
-          <a:ln w="12700">
-            <a:solidFill>
-              <a:srgbClr val="0C2340"/>
-            </a:solidFill>
-            <a:prstDash val="solid"/>
-          </a:ln>
-        </p:spPr>
-      </p:sp>
-      <p:sp>
-        <p:nvSpPr>
-          <p:cNvPr id="20" name="Text 18"/>
-          <p:cNvSpPr/>
-          <p:nvPr/>
-        </p:nvSpPr>
-        <p:spPr>
-          <a:xfrm>
-            <a:off x="4370832" y="2670048"/>
-            <a:ext cx="594360" cy="146304"/>
-          </a:xfrm>
-          <a:prstGeom prst="rect">
-            <a:avLst/>
-          </a:prstGeom>
-          <a:noFill/>
-          <a:ln/>
-        </p:spPr>
-        <p:txBody>
-          <a:bodyPr wrap="square" lIns="0" tIns="0" rIns="0" bIns="0" rtlCol="0" anchor="ctr"/>
-          <a:lstStyle/>
-          <a:p>
-            <a:pPr indent="0" marL="0">
-              <a:buNone/>
-            </a:pPr>
-            <a:r>
-              <a:rPr lang="en-US" sz="700" b="1" dirty="0">
-                <a:solidFill>
-                  <a:srgbClr val="0C2340"/>
-                </a:solidFill>
-                <a:latin typeface="Calibri" pitchFamily="34" charset="0"/>
-                <a:ea typeface="Calibri" pitchFamily="34" charset="-122"/>
-                <a:cs typeface="Calibri" pitchFamily="34" charset="-120"/>
-              </a:rPr>
-              <a:t>Insight</a:t>
-            </a:r>
-            <a:endParaRPr lang="en-US" sz="700" dirty="0"/>
-          </a:p>
-        </p:txBody>
-      </p:sp>
-      <p:sp>
-        <p:nvSpPr>
-          <p:cNvPr id="21" name="Text 19"/>
-          <p:cNvSpPr/>
-          <p:nvPr/>
-        </p:nvSpPr>
-        <p:spPr>
-          <a:xfrm>
-            <a:off x="4370832" y="2834640"/>
-            <a:ext cx="4407408" cy="201168"/>
-          </a:xfrm>
-          <a:prstGeom prst="rect">
-            <a:avLst/>
-          </a:prstGeom>
-          <a:noFill/>
-          <a:ln/>
-        </p:spPr>
-        <p:txBody>
-          <a:bodyPr wrap="square" lIns="0" tIns="0" rIns="0" bIns="0" rtlCol="0" anchor="ctr"/>
-          <a:lstStyle/>
-          <a:p>
-            <a:pPr indent="0" marL="0">
-              <a:buNone/>
-            </a:pPr>
-            <a:r>
-              <a:rPr lang="en-US" sz="750" b="1" dirty="0">
-                <a:solidFill>
-                  <a:srgbClr val="0C2340"/>
-                </a:solidFill>
-                <a:latin typeface="Calibri" pitchFamily="34" charset="0"/>
-                <a:ea typeface="Calibri" pitchFamily="34" charset="-122"/>
-                <a:cs typeface="Calibri" pitchFamily="34" charset="-120"/>
-              </a:rPr>
-              <a:t>우기 대비 인프라 사업 집중 추진은 공정 지연 리스크와 품질 이슈 증가 가능성을 내포합니다. 투자자는 실제 공사 진행률, 예산 초과 여부, 링로드4 개통 지연 시나리오를 모니터링…</a:t>
-            </a:r>
-            <a:endParaRPr lang="en-US" sz="750" dirty="0"/>
-          </a:p>
-        </p:txBody>
-      </p:sp>
-      <p:sp>
-        <p:nvSpPr>
-          <p:cNvPr id="22" name="Text 20"/>
+        </p:txBody>
+      </p:sp>
+      <p:sp>
+        <p:nvSpPr>
+          <p:cNvPr id="19" name="Text 17"/>
           <p:cNvSpPr/>
           <p:nvPr/>
         </p:nvSpPr>
@@ -33689,7 +33740,7 @@
       </p:sp>
       <p:sp>
         <p:nvSpPr>
-          <p:cNvPr id="23" name="Shape 21"/>
+          <p:cNvPr id="20" name="Shape 18"/>
           <p:cNvSpPr/>
           <p:nvPr/>
         </p:nvSpPr>
@@ -33714,7 +33765,7 @@
       </p:sp>
       <p:sp>
         <p:nvSpPr>
-          <p:cNvPr id="24" name="Text 22"/>
+          <p:cNvPr id="21" name="Text 19"/>
           <p:cNvSpPr/>
           <p:nvPr/>
         </p:nvSpPr>
@@ -33753,7 +33804,7 @@
       </p:sp>
       <p:sp>
         <p:nvSpPr>
-          <p:cNvPr id="25" name="Text 23"/>
+          <p:cNvPr id="22" name="Text 20"/>
           <p:cNvSpPr/>
           <p:nvPr/>
         </p:nvSpPr>
@@ -33792,7 +33843,7 @@
       </p:sp>
       <p:sp>
         <p:nvSpPr>
-          <p:cNvPr id="26" name="Text 24"/>
+          <p:cNvPr id="23" name="Text 21"/>
           <p:cNvSpPr/>
           <p:nvPr/>
         </p:nvSpPr>
@@ -33831,7 +33882,7 @@
       </p:sp>
       <p:sp>
         <p:nvSpPr>
-          <p:cNvPr id="27" name="Text 25"/>
+          <p:cNvPr id="24" name="Text 22"/>
           <p:cNvSpPr/>
           <p:nvPr/>
         </p:nvSpPr>
@@ -33870,7 +33921,7 @@
       </p:sp>
       <p:sp>
         <p:nvSpPr>
-          <p:cNvPr id="28" name="Shape 26"/>
+          <p:cNvPr id="25" name="Shape 23"/>
           <p:cNvSpPr/>
           <p:nvPr/>
         </p:nvSpPr>
@@ -33895,7 +33946,7 @@
       </p:sp>
       <p:sp>
         <p:nvSpPr>
-          <p:cNvPr id="29" name="Shape 27"/>
+          <p:cNvPr id="26" name="Shape 24"/>
           <p:cNvSpPr/>
           <p:nvPr/>
         </p:nvSpPr>
@@ -33920,7 +33971,7 @@
       </p:sp>
       <p:sp>
         <p:nvSpPr>
-          <p:cNvPr id="30" name="Text 28"/>
+          <p:cNvPr id="27" name="Text 25"/>
           <p:cNvSpPr/>
           <p:nvPr/>
         </p:nvSpPr>
@@ -33959,7 +34010,7 @@
       </p:sp>
       <p:sp>
         <p:nvSpPr>
-          <p:cNvPr id="31" name="Text 29"/>
+          <p:cNvPr id="28" name="Text 26"/>
           <p:cNvSpPr/>
           <p:nvPr/>
         </p:nvSpPr>
@@ -33998,7 +34049,7 @@
       </p:sp>
       <p:sp>
         <p:nvSpPr>
-          <p:cNvPr id="32" name="Text 30"/>
+          <p:cNvPr id="29" name="Text 27"/>
           <p:cNvSpPr/>
           <p:nvPr/>
         </p:nvSpPr>
@@ -34037,7 +34088,7 @@
       </p:sp>
       <p:sp>
         <p:nvSpPr>
-          <p:cNvPr id="33" name="Text 31"/>
+          <p:cNvPr id="30" name="Text 28"/>
           <p:cNvSpPr/>
           <p:nvPr/>
         </p:nvSpPr>
@@ -34076,7 +34127,7 @@
       </p:sp>
       <p:sp>
         <p:nvSpPr>
-          <p:cNvPr id="34" name="Shape 32"/>
+          <p:cNvPr id="31" name="Shape 29"/>
           <p:cNvSpPr/>
           <p:nvPr/>
         </p:nvSpPr>
@@ -34101,7 +34152,7 @@
       </p:sp>
       <p:sp>
         <p:nvSpPr>
-          <p:cNvPr id="35" name="Shape 33"/>
+          <p:cNvPr id="32" name="Shape 30"/>
           <p:cNvSpPr/>
           <p:nvPr/>
         </p:nvSpPr>
@@ -34126,7 +34177,7 @@
       </p:sp>
       <p:sp>
         <p:nvSpPr>
-          <p:cNvPr id="36" name="Text 34"/>
+          <p:cNvPr id="33" name="Text 31"/>
           <p:cNvSpPr/>
           <p:nvPr/>
         </p:nvSpPr>
@@ -34165,7 +34216,7 @@
       </p:sp>
       <p:sp>
         <p:nvSpPr>
-          <p:cNvPr id="37" name="Text 35"/>
+          <p:cNvPr id="34" name="Text 32"/>
           <p:cNvSpPr/>
           <p:nvPr/>
         </p:nvSpPr>
@@ -34204,7 +34255,7 @@
       </p:sp>
       <p:sp>
         <p:nvSpPr>
-          <p:cNvPr id="38" name="Text 36"/>
+          <p:cNvPr id="35" name="Text 33"/>
           <p:cNvSpPr/>
           <p:nvPr/>
         </p:nvSpPr>
@@ -34243,7 +34294,7 @@
       </p:sp>
       <p:sp>
         <p:nvSpPr>
-          <p:cNvPr id="39" name="Text 37"/>
+          <p:cNvPr id="36" name="Text 34"/>
           <p:cNvSpPr/>
           <p:nvPr/>
         </p:nvSpPr>
@@ -34282,7 +34333,7 @@
       </p:sp>
       <p:sp>
         <p:nvSpPr>
-          <p:cNvPr id="40" name="Shape 38"/>
+          <p:cNvPr id="37" name="Shape 35"/>
           <p:cNvSpPr/>
           <p:nvPr/>
         </p:nvSpPr>
@@ -34307,7 +34358,7 @@
       </p:sp>
       <p:sp>
         <p:nvSpPr>
-          <p:cNvPr id="41" name="Shape 39"/>
+          <p:cNvPr id="38" name="Shape 36"/>
           <p:cNvSpPr/>
           <p:nvPr/>
         </p:nvSpPr>
@@ -34332,7 +34383,7 @@
       </p:sp>
       <p:sp>
         <p:nvSpPr>
-          <p:cNvPr id="42" name="Text 40"/>
+          <p:cNvPr id="39" name="Text 37"/>
           <p:cNvSpPr/>
           <p:nvPr/>
         </p:nvSpPr>
@@ -34371,7 +34422,7 @@
       </p:sp>
       <p:sp>
         <p:nvSpPr>
-          <p:cNvPr id="43" name="Text 41"/>
+          <p:cNvPr id="40" name="Text 38"/>
           <p:cNvSpPr/>
           <p:nvPr/>
         </p:nvSpPr>
@@ -34410,7 +34461,7 @@
       </p:sp>
       <p:sp>
         <p:nvSpPr>
-          <p:cNvPr id="44" name="Text 42"/>
+          <p:cNvPr id="41" name="Text 39"/>
           <p:cNvSpPr/>
           <p:nvPr/>
         </p:nvSpPr>
@@ -34449,7 +34500,7 @@
       </p:sp>
       <p:sp>
         <p:nvSpPr>
-          <p:cNvPr id="45" name="Text 43"/>
+          <p:cNvPr id="42" name="Text 40"/>
           <p:cNvSpPr/>
           <p:nvPr/>
         </p:nvSpPr>
@@ -34488,7 +34539,7 @@
       </p:sp>
       <p:sp>
         <p:nvSpPr>
-          <p:cNvPr id="46" name="Shape 44"/>
+          <p:cNvPr id="43" name="Shape 41"/>
           <p:cNvSpPr/>
           <p:nvPr/>
         </p:nvSpPr>
@@ -34513,7 +34564,7 @@
       </p:sp>
       <p:sp>
         <p:nvSpPr>
-          <p:cNvPr id="47" name="Shape 45"/>
+          <p:cNvPr id="44" name="Shape 42"/>
           <p:cNvSpPr/>
           <p:nvPr/>
         </p:nvSpPr>
@@ -34538,7 +34589,7 @@
       </p:sp>
       <p:sp>
         <p:nvSpPr>
-          <p:cNvPr id="48" name="Text 46"/>
+          <p:cNvPr id="45" name="Text 43"/>
           <p:cNvSpPr/>
           <p:nvPr/>
         </p:nvSpPr>
@@ -34577,7 +34628,7 @@
       </p:sp>
       <p:sp>
         <p:nvSpPr>
-          <p:cNvPr id="49" name="Text 47"/>
+          <p:cNvPr id="46" name="Text 44"/>
           <p:cNvSpPr/>
           <p:nvPr/>
         </p:nvSpPr>
@@ -34616,7 +34667,7 @@
       </p:sp>
       <p:sp>
         <p:nvSpPr>
-          <p:cNvPr id="50" name="Text 48"/>
+          <p:cNvPr id="47" name="Text 45"/>
           <p:cNvSpPr/>
           <p:nvPr/>
         </p:nvSpPr>
@@ -34655,7 +34706,7 @@
       </p:sp>
       <p:sp>
         <p:nvSpPr>
-          <p:cNvPr id="51" name="Text 49"/>
+          <p:cNvPr id="48" name="Text 46"/>
           <p:cNvSpPr/>
           <p:nvPr/>
         </p:nvSpPr>
@@ -34694,7 +34745,7 @@
       </p:sp>
       <p:sp>
         <p:nvSpPr>
-          <p:cNvPr id="52" name="Shape 50"/>
+          <p:cNvPr id="49" name="Shape 47"/>
           <p:cNvSpPr/>
           <p:nvPr/>
         </p:nvSpPr>
@@ -34719,7 +34770,7 @@
       </p:sp>
       <p:sp>
         <p:nvSpPr>
-          <p:cNvPr id="53" name="Shape 51"/>
+          <p:cNvPr id="50" name="Shape 48"/>
           <p:cNvSpPr/>
           <p:nvPr/>
         </p:nvSpPr>
@@ -34744,7 +34795,7 @@
       </p:sp>
       <p:sp>
         <p:nvSpPr>
-          <p:cNvPr id="54" name="Text 52"/>
+          <p:cNvPr id="51" name="Text 49"/>
           <p:cNvSpPr/>
           <p:nvPr/>
         </p:nvSpPr>
@@ -34783,7 +34834,7 @@
       </p:sp>
       <p:sp>
         <p:nvSpPr>
-          <p:cNvPr id="55" name="Text 53"/>
+          <p:cNvPr id="52" name="Text 50"/>
           <p:cNvSpPr/>
           <p:nvPr/>
         </p:nvSpPr>
@@ -34822,7 +34873,7 @@
       </p:sp>
       <p:sp>
         <p:nvSpPr>
-          <p:cNvPr id="56" name="Text 54"/>
+          <p:cNvPr id="53" name="Text 51"/>
           <p:cNvSpPr/>
           <p:nvPr/>
         </p:nvSpPr>
@@ -34861,7 +34912,7 @@
       </p:sp>
       <p:sp>
         <p:nvSpPr>
-          <p:cNvPr id="57" name="Text 55"/>
+          <p:cNvPr id="54" name="Text 52"/>
           <p:cNvSpPr/>
           <p:nvPr/>
         </p:nvSpPr>
@@ -34900,7 +34951,7 @@
       </p:sp>
       <p:sp>
         <p:nvSpPr>
-          <p:cNvPr id="58" name="Shape 56"/>
+          <p:cNvPr id="55" name="Shape 53"/>
           <p:cNvSpPr/>
           <p:nvPr/>
         </p:nvSpPr>
@@ -34925,7 +34976,7 @@
       </p:sp>
       <p:sp>
         <p:nvSpPr>
-          <p:cNvPr id="59" name="Shape 57"/>
+          <p:cNvPr id="56" name="Shape 54"/>
           <p:cNvSpPr/>
           <p:nvPr/>
         </p:nvSpPr>
@@ -34950,7 +35001,7 @@
       </p:sp>
       <p:sp>
         <p:nvSpPr>
-          <p:cNvPr id="60" name="Text 58"/>
+          <p:cNvPr id="57" name="Text 55"/>
           <p:cNvSpPr/>
           <p:nvPr/>
         </p:nvSpPr>
@@ -34989,7 +35040,7 @@
       </p:sp>
       <p:sp>
         <p:nvSpPr>
-          <p:cNvPr id="61" name="Text 59"/>
+          <p:cNvPr id="58" name="Text 56"/>
           <p:cNvSpPr/>
           <p:nvPr/>
         </p:nvSpPr>
@@ -35028,7 +35079,7 @@
       </p:sp>
       <p:sp>
         <p:nvSpPr>
-          <p:cNvPr id="62" name="Text 60"/>
+          <p:cNvPr id="59" name="Text 57"/>
           <p:cNvSpPr/>
           <p:nvPr/>
         </p:nvSpPr>
@@ -35067,7 +35118,7 @@
       </p:sp>
       <p:sp>
         <p:nvSpPr>
-          <p:cNvPr id="63" name="Text 61"/>
+          <p:cNvPr id="60" name="Text 58"/>
           <p:cNvSpPr/>
           <p:nvPr/>
         </p:nvSpPr>
@@ -35106,7 +35157,7 @@
       </p:sp>
       <p:sp>
         <p:nvSpPr>
-          <p:cNvPr id="64" name="Shape 62"/>
+          <p:cNvPr id="61" name="Shape 59"/>
           <p:cNvSpPr/>
           <p:nvPr/>
         </p:nvSpPr>
@@ -35131,7 +35182,7 @@
       </p:sp>
       <p:sp>
         <p:nvSpPr>
-          <p:cNvPr id="65" name="Shape 63"/>
+          <p:cNvPr id="62" name="Shape 60"/>
           <p:cNvSpPr/>
           <p:nvPr/>
         </p:nvSpPr>
@@ -35156,7 +35207,7 @@
       </p:sp>
       <p:sp>
         <p:nvSpPr>
-          <p:cNvPr id="66" name="Text 64"/>
+          <p:cNvPr id="63" name="Text 61"/>
           <p:cNvSpPr/>
           <p:nvPr/>
         </p:nvSpPr>
@@ -35195,7 +35246,7 @@
       </p:sp>
       <p:sp>
         <p:nvSpPr>
-          <p:cNvPr id="67" name="Text 65"/>
+          <p:cNvPr id="64" name="Text 62"/>
           <p:cNvSpPr/>
           <p:nvPr/>
         </p:nvSpPr>
@@ -35234,7 +35285,7 @@
       </p:sp>
       <p:sp>
         <p:nvSpPr>
-          <p:cNvPr id="68" name="Text 66"/>
+          <p:cNvPr id="65" name="Text 63"/>
           <p:cNvSpPr/>
           <p:nvPr/>
         </p:nvSpPr>
@@ -35273,7 +35324,7 @@
       </p:sp>
       <p:sp>
         <p:nvSpPr>
-          <p:cNvPr id="69" name="Text 67"/>
+          <p:cNvPr id="66" name="Text 64"/>
           <p:cNvSpPr/>
           <p:nvPr/>
         </p:nvSpPr>
@@ -35312,7 +35363,7 @@
       </p:sp>
       <p:sp>
         <p:nvSpPr>
-          <p:cNvPr id="70" name="Shape 68"/>
+          <p:cNvPr id="67" name="Shape 65"/>
           <p:cNvSpPr/>
           <p:nvPr/>
         </p:nvSpPr>
@@ -35337,7 +35388,7 @@
       </p:sp>
       <p:sp>
         <p:nvSpPr>
-          <p:cNvPr id="71" name="Text 69"/>
+          <p:cNvPr id="68" name="Text 66"/>
           <p:cNvSpPr/>
           <p:nvPr/>
         </p:nvSpPr>
@@ -35376,7 +35427,7 @@
       </p:sp>
       <p:sp>
         <p:nvSpPr>
-          <p:cNvPr id="72" name="Text 70"/>
+          <p:cNvPr id="69" name="Text 67"/>
           <p:cNvSpPr/>
           <p:nvPr/>
         </p:nvSpPr>
@@ -38046,7 +38097,7 @@
                 <a:ea typeface="Calibri" pitchFamily="34" charset="-122"/>
                 <a:cs typeface="Calibri" pitchFamily="34" charset="-120"/>
               </a:rPr>
-              <a:t>총 21개 마스터플랜  |  전체 445건 기사  |  신규 81건</a:t>
+              <a:t>총 21개 마스터플랜  |  전체 446건 기사  |  신규 82건</a:t>
             </a:r>
             <a:endParaRPr lang="en-US" sz="950" dirty="0"/>
           </a:p>
@@ -38404,7 +38455,7 @@
                 <a:ea typeface="Calibri" pitchFamily="34" charset="-122"/>
                 <a:cs typeface="Calibri" pitchFamily="34" charset="-120"/>
               </a:rPr>
-              <a:t>★ AI 신규 분석  |  신규 기사 81건</a:t>
+              <a:t>★ AI 신규 분석  |  신규 기사 82건</a:t>
             </a:r>
             <a:endParaRPr lang="en-US" sz="750" dirty="0"/>
           </a:p>
@@ -38485,7 +38536,7 @@
                 <a:ea typeface="Calibri" pitchFamily="34" charset="-122"/>
                 <a:cs typeface="Calibri" pitchFamily="34" charset="-120"/>
               </a:rPr>
-              <a:t>## 2026년 5월 1주차</a:t>
+              <a:t>## 2026년 5월 2주차</a:t>
             </a:r>
             <a:endParaRPr lang="en-US" sz="1150" dirty="0"/>
           </a:p>
@@ -38508,7 +38559,7 @@
                 <a:ea typeface="Calibri" pitchFamily="34" charset="-122"/>
                 <a:cs typeface="Calibri" pitchFamily="34" charset="-120"/>
               </a:rPr>
-              <a:t>**녹색산업단지 육성, 외자 유입 가속화**</a:t>
+              <a:t>**시장 동향**</a:t>
             </a:r>
             <a:endParaRPr lang="en-US" sz="1150" dirty="0"/>
           </a:p>
@@ -38516,12 +38567,29 @@
             <a:pPr indent="0" marL="0">
               <a:buNone/>
             </a:pPr>
+            <a:r>
+              <a:rPr lang="en-US" sz="1150" dirty="0">
+                <a:solidFill>
+                  <a:srgbClr val="374151"/>
+                </a:solidFill>
+                <a:latin typeface="Calibri" pitchFamily="34" charset="0"/>
+                <a:ea typeface="Calibri" pitchFamily="34" charset="-122"/>
+                <a:cs typeface="Calibri" pitchFamily="34" charset="-120"/>
+              </a:rPr>
+              <a:t>베트남의 녹색산업단지 개발이 외국인직접투자(FDI) 유치의 핵심 전략으로 부상하고 있습니다. ESG 기준을 충족하는 산업단지 조성으로 글로벌 제조업체들의 관심이 집중되고 있으며, 이는 환경규제 강화 추세와 맞물려 새로운 투자 기회를 창출하고 있습니다.</a:t>
+            </a:r>
             <a:endParaRPr lang="en-US" sz="1150" dirty="0"/>
           </a:p>
           <a:p>
             <a:pPr indent="0" marL="0">
               <a:buNone/>
             </a:pPr>
+            <a:endParaRPr lang="en-US" sz="1150" dirty="0"/>
+          </a:p>
+          <a:p>
+            <a:pPr indent="0" marL="0">
+              <a:buNone/>
+            </a:pPr>
             <a:r>
               <a:rPr lang="en-US" sz="1150" dirty="0">
                 <a:solidFill>
@@ -38531,7 +38599,7 @@
                 <a:ea typeface="Calibri" pitchFamily="34" charset="-122"/>
                 <a:cs typeface="Calibri" pitchFamily="34" charset="-120"/>
               </a:rPr>
-              <a:t>베트남 정부의 녹색산업단지 개발 전략이 본격화되면서 FDI 투자자 유치가 탄력을 받고 있습니다. 친환경 제조업 기지 조성을 통해 ESG 기준을 충족하는 글로벌 기업들의 진출을 적극 유도 중이며, 이는 도시개발과 산업단지 영역에서 의미 있는 성과입니다.</a:t>
+              <a:t>**투자자 관점**</a:t>
             </a:r>
             <a:endParaRPr lang="en-US" sz="1150" dirty="0"/>
           </a:p>
@@ -38539,12 +38607,29 @@
             <a:pPr indent="0" marL="0">
               <a:buNone/>
             </a:pPr>
+            <a:r>
+              <a:rPr lang="en-US" sz="1150" dirty="0">
+                <a:solidFill>
+                  <a:srgbClr val="374151"/>
+                </a:solidFill>
+                <a:latin typeface="Calibri" pitchFamily="34" charset="0"/>
+                <a:ea typeface="Calibri" pitchFamily="34" charset="-122"/>
+                <a:cs typeface="Calibri" pitchFamily="34" charset="-120"/>
+              </a:rPr>
+              <a:t>녹색산업단지는 장기 임차료 수익성과 안정적 현금흐름을 보장하는 매력적 자산으로 평가됩니다. 특히 반도체, 전자제품, 신재생에너지 관련 제조업체들의 입주 수요가 증가 추세입니다.</a:t>
+            </a:r>
             <a:endParaRPr lang="en-US" sz="1150" dirty="0"/>
           </a:p>
           <a:p>
             <a:pPr indent="0" marL="0">
               <a:buNone/>
             </a:pPr>
+            <a:endParaRPr lang="en-US" sz="1150" dirty="0"/>
+          </a:p>
+          <a:p>
+            <a:pPr indent="0" marL="0">
+              <a:buNone/>
+            </a:pPr>
             <a:r>
               <a:rPr lang="en-US" sz="1150" dirty="0">
                 <a:solidFill>
@@ -38554,7 +38639,7 @@
                 <a:ea typeface="Calibri" pitchFamily="34" charset="-122"/>
                 <a:cs typeface="Calibri" pitchFamily="34" charset="-120"/>
               </a:rPr>
-              <a:t>**사업기회 분석**</a:t>
+              <a:t>**사업개발자 전략**</a:t>
             </a:r>
             <a:endParaRPr lang="en-US" sz="1150" dirty="0"/>
           </a:p>
@@ -38571,7 +38656,7 @@
                 <a:ea typeface="Calibri" pitchFamily="34" charset="-122"/>
                 <a:cs typeface="Calibri" pitchFamily="34" charset="-120"/>
               </a:rPr>
-              <a:t>- **산업단지**: 녹색 인증 기준 충족 시 정부 인센티브 및 장기 안정성 보장으로 운영사, 개발사의 수익성 개선 기대</a:t>
+              <a:t>산업단지 개발 시 에너지 효율, 폐기물 관리, 녹지 조성 등 친환경 요소를 우선 배치하여 차별화 경쟁력 확보가 필수입니다. 인근 교통 인프라와의 연계 계획도 FDI 유치율 제고에 직결됩니다.</a:t>
             </a:r>
             <a:endParaRPr lang="en-US" sz="1150" dirty="0"/>
           </a:p>
@@ -38579,6 +38664,12 @@
             <a:pPr indent="0" marL="0">
               <a:buNone/>
             </a:pPr>
+            <a:endParaRPr lang="en-US" sz="1150" dirty="0"/>
+          </a:p>
+          <a:p>
+            <a:pPr indent="0" marL="0">
+              <a:buNone/>
+            </a:pPr>
             <a:r>
               <a:rPr lang="en-US" sz="1150" dirty="0">
                 <a:solidFill>
@@ -38588,7 +38679,7 @@
                 <a:ea typeface="Calibri" pitchFamily="34" charset="-122"/>
                 <a:cs typeface="Calibri" pitchFamily="34" charset="-120"/>
               </a:rPr>
-              <a:t>- **환경/에너지**: 산단 내 신재생에너지 통합시스템, 폐수처리 고도화 등 환경기술 수요 급증</a:t>
+              <a:t>**향후 전망**</a:t>
             </a:r>
             <a:endParaRPr lang="en-US" sz="1150" dirty="0"/>
           </a:p>
@@ -38605,47 +38696,7 @@
                 <a:ea typeface="Calibri" pitchFamily="34" charset="-122"/>
                 <a:cs typeface="Calibri" pitchFamily="34" charset="-120"/>
               </a:rPr>
-              <a:t>- **교통**: 산단 연계 지역 접근성 개선을 위한 도로, 항만 연결 인프라 투자 확대</a:t>
-            </a:r>
-            <a:endParaRPr lang="en-US" sz="1150" dirty="0"/>
-          </a:p>
-          <a:p>
-            <a:pPr indent="0" marL="0">
-              <a:buNone/>
-            </a:pPr>
-            <a:endParaRPr lang="en-US" sz="1150" dirty="0"/>
-          </a:p>
-          <a:p>
-            <a:pPr indent="0" marL="0">
-              <a:buNone/>
-            </a:pPr>
-            <a:r>
-              <a:rPr lang="en-US" sz="1150" dirty="0">
-                <a:solidFill>
-                  <a:srgbClr val="374151"/>
-                </a:solidFill>
-                <a:latin typeface="Calibri" pitchFamily="34" charset="0"/>
-                <a:ea typeface="Calibri" pitchFamily="34" charset="-122"/>
-                <a:cs typeface="Calibri" pitchFamily="34" charset="-120"/>
-              </a:rPr>
-              <a:t>**투자자 주의사항**</a:t>
-            </a:r>
-            <a:endParaRPr lang="en-US" sz="1150" dirty="0"/>
-          </a:p>
-          <a:p>
-            <a:pPr indent="0" marL="0">
-              <a:buNone/>
-            </a:pPr>
-            <a:r>
-              <a:rPr lang="en-US" sz="1150" dirty="0">
-                <a:solidFill>
-                  <a:srgbClr val="374151"/>
-                </a:solidFill>
-                <a:latin typeface="Calibri" pitchFamily="34" charset="0"/>
-                <a:ea typeface="Calibri" pitchFamily="34" charset="-122"/>
-                <a:cs typeface="Calibri" pitchFamily="34" charset="-120"/>
-              </a:rPr>
-              <a:t>현지 규제 변동에 따른 인증 기준 재검토, 프로젝트 타당성 재평가 필요. 글로벌 공급망 재편 흐름에 부응하는 장기 관점의 포트폴리오 구성이 핵심입니다.</a:t>
+              <a:t>녹색산업단지는 환경·경제 동시 달성 모델로서 정부 지원 확대가 예상되며, 올해 하반기 추가 프로젝트 승인 가능성이 높습니다.</a:t>
             </a:r>
             <a:endParaRPr lang="en-US" sz="1150" dirty="0"/>
           </a:p>
@@ -38748,7 +38799,7 @@
                 <a:ea typeface="Calibri" pitchFamily="34" charset="-122"/>
                 <a:cs typeface="Calibri" pitchFamily="34" charset="-120"/>
               </a:rPr>
-              <a:t>445건</a:t>
+              <a:t>446건</a:t>
             </a:r>
             <a:endParaRPr lang="en-US" sz="2000" dirty="0"/>
           </a:p>
@@ -38851,7 +38902,7 @@
                 <a:ea typeface="Calibri" pitchFamily="34" charset="-122"/>
                 <a:cs typeface="Calibri" pitchFamily="34" charset="-120"/>
               </a:rPr>
-              <a:t>81건</a:t>
+              <a:t>82건</a:t>
             </a:r>
             <a:endParaRPr lang="en-US" sz="2000" dirty="0"/>
           </a:p>
@@ -40285,7 +40336,7 @@
                 <a:ea typeface="Calibri" pitchFamily="34" charset="-122"/>
                 <a:cs typeface="Calibri" pitchFamily="34" charset="-120"/>
               </a:rPr>
-              <a:t>190건</a:t>
+              <a:t>191건</a:t>
             </a:r>
             <a:endParaRPr lang="en-US" sz="700" dirty="0"/>
           </a:p>
@@ -40324,7 +40375,7 @@
                 <a:ea typeface="Calibri" pitchFamily="34" charset="-122"/>
                 <a:cs typeface="Calibri" pitchFamily="34" charset="-120"/>
               </a:rPr>
-              <a:t>★ 9건</a:t>
+              <a:t>★ 10건</a:t>
             </a:r>
             <a:endParaRPr lang="en-US" sz="700" dirty="0"/>
           </a:p>
@@ -40533,7 +40584,7 @@
                 <a:ea typeface="Calibri" pitchFamily="34" charset="-122"/>
                 <a:cs typeface="Calibri" pitchFamily="34" charset="-120"/>
               </a:rPr>
-              <a:t>149건</a:t>
+              <a:t>150건</a:t>
             </a:r>
             <a:endParaRPr lang="en-US" sz="700" dirty="0"/>
           </a:p>
@@ -40572,7 +40623,7 @@
                 <a:ea typeface="Calibri" pitchFamily="34" charset="-122"/>
                 <a:cs typeface="Calibri" pitchFamily="34" charset="-120"/>
               </a:rPr>
-              <a:t>★ 7건</a:t>
+              <a:t>★ 8건</a:t>
             </a:r>
             <a:endParaRPr lang="en-US" sz="700" dirty="0"/>
           </a:p>
@@ -40611,7 +40662,7 @@
                 <a:ea typeface="Calibri" pitchFamily="34" charset="-122"/>
                 <a:cs typeface="Calibri" pitchFamily="34" charset="-120"/>
               </a:rPr>
-              <a:t>VN-PWR-PDP8-RENEWABLE 관련 공식 발표 확인 필요</a:t>
+              <a:t>베트남 재생에너지 사업 관련 기사 필요</a:t>
             </a:r>
             <a:endParaRPr lang="en-US" sz="700" dirty="0"/>
           </a:p>
@@ -40781,7 +40832,7 @@
                 <a:ea typeface="Calibri" pitchFamily="34" charset="-122"/>
                 <a:cs typeface="Calibri" pitchFamily="34" charset="-120"/>
               </a:rPr>
-              <a:t>155건</a:t>
+              <a:t>156건</a:t>
             </a:r>
             <a:endParaRPr lang="en-US" sz="700" dirty="0"/>
           </a:p>
@@ -40820,7 +40871,7 @@
                 <a:ea typeface="Calibri" pitchFamily="34" charset="-122"/>
                 <a:cs typeface="Calibri" pitchFamily="34" charset="-120"/>
               </a:rPr>
-              <a:t>★ 6건</a:t>
+              <a:t>★ 7건</a:t>
             </a:r>
             <a:endParaRPr lang="en-US" sz="700" dirty="0"/>
           </a:p>
@@ -41344,7 +41395,7 @@
                 <a:ea typeface="Calibri" pitchFamily="34" charset="-122"/>
                 <a:cs typeface="Calibri" pitchFamily="34" charset="-120"/>
               </a:rPr>
-              <a:t>베트남 핵전력 개발계획 관련 공식 발표 모니터링</a:t>
+              <a:t>베트남 원전 사업 관련 공식 발표 모니터링</a:t>
             </a:r>
             <a:endParaRPr lang="en-US" sz="700" dirty="0"/>
           </a:p>
@@ -41829,7 +41880,7 @@
                 <a:ea typeface="Calibri" pitchFamily="34" charset="-122"/>
                 <a:cs typeface="Calibri" pitchFamily="34" charset="-120"/>
               </a:rPr>
-              <a:t>VN-OG-2030 관련 구체적 사업 진행 정보 필요</a:t>
+              <a:t>VN-OG-2030 마스터플랜 관련 공식 발표 모니터링</a:t>
             </a:r>
             <a:endParaRPr lang="en-US" sz="700" dirty="0"/>
           </a:p>
@@ -42698,13 +42749,13 @@
             <a:r>
               <a:rPr lang="en-US" sz="700" b="1" dirty="0">
                 <a:solidFill>
-                  <a:srgbClr val="0D6E6E"/>
-                </a:solidFill>
-                <a:latin typeface="Calibri" pitchFamily="34" charset="0"/>
-                <a:ea typeface="Calibri" pitchFamily="34" charset="-122"/>
-                <a:cs typeface="Calibri" pitchFamily="34" charset="-120"/>
-              </a:rPr>
-              <a:t>운영·확장</a:t>
+                  <a:srgbClr val="D4820A"/>
+                </a:solidFill>
+                <a:latin typeface="Calibri" pitchFamily="34" charset="0"/>
+                <a:ea typeface="Calibri" pitchFamily="34" charset="-122"/>
+                <a:cs typeface="Calibri" pitchFamily="34" charset="-120"/>
+              </a:rPr>
+              <a:t>건설·시공</a:t>
             </a:r>
             <a:endParaRPr lang="en-US" sz="700" dirty="0"/>
           </a:p>
@@ -42821,7 +42872,7 @@
                 <a:ea typeface="Calibri" pitchFamily="34" charset="-122"/>
                 <a:cs typeface="Calibri" pitchFamily="34" charset="-120"/>
               </a:rPr>
-              <a:t>QR코드 시스템 확대 도입 일정 및 효율성 검증 결과</a:t>
+              <a:t>공정률 업데이트 및 준공 예정일 변경 여부</a:t>
             </a:r>
             <a:endParaRPr lang="en-US" sz="700" dirty="0"/>
           </a:p>
@@ -43565,7 +43616,7 @@
                 <a:ea typeface="Calibri" pitchFamily="34" charset="-122"/>
                 <a:cs typeface="Calibri" pitchFamily="34" charset="-120"/>
               </a:rPr>
-              <a:t>VN-TRAN-2055 관련 공식 공지 모니터링</a:t>
+              <a:t>VN-TRAN-2055 사업 관련 구체적 진행 정보 부재</a:t>
             </a:r>
             <a:endParaRPr lang="en-US" sz="700" dirty="0"/>
           </a:p>
@@ -44082,7 +44133,7 @@
                 <a:ea typeface="Calibri" pitchFamily="34" charset="-122"/>
                 <a:cs typeface="Calibri" pitchFamily="34" charset="-120"/>
               </a:rPr>
-              <a:t>기사 190건  |  ★신규 9건</a:t>
+              <a:t>기사 191건  |  ★신규 10건</a:t>
             </a:r>
             <a:endParaRPr lang="en-US" sz="900" dirty="0"/>
           </a:p>
@@ -44367,7 +44418,7 @@
         <p:spPr>
           <a:xfrm>
             <a:off x="4325112" y="1353312"/>
-            <a:ext cx="4498848" cy="1700784"/>
+            <a:ext cx="4498848" cy="1243584"/>
           </a:xfrm>
           <a:prstGeom prst="rect">
             <a:avLst/>
@@ -44392,7 +44443,7 @@
         <p:spPr>
           <a:xfrm>
             <a:off x="4325112" y="1353312"/>
-            <a:ext cx="36576" cy="1700784"/>
+            <a:ext cx="36576" cy="1243584"/>
           </a:xfrm>
           <a:prstGeom prst="rect">
             <a:avLst/>
@@ -44417,7 +44468,7 @@
         <p:spPr>
           <a:xfrm>
             <a:off x="4398264" y="1353312"/>
-            <a:ext cx="4389120" cy="1700784"/>
+            <a:ext cx="4389120" cy="1243584"/>
           </a:xfrm>
           <a:prstGeom prst="rect">
             <a:avLst/>
@@ -44441,7 +44492,7 @@
                 <a:ea typeface="Calibri" pitchFamily="34" charset="-122"/>
                 <a:cs typeface="Calibri" pitchFamily="34" charset="-120"/>
               </a:rPr>
-              <a:t># VN-PWR-PDP8 진행현황 분석 보고서 (2026년 5월)</a:t>
+              <a:t>**사업 진행단계 맥락**  </a:t>
             </a:r>
             <a:endParaRPr lang="en-US" sz="800" dirty="0"/>
           </a:p>
@@ -44449,12 +44500,29 @@
             <a:pPr indent="0" marL="0">
               <a:buNone/>
             </a:pPr>
+            <a:r>
+              <a:rPr lang="en-US" sz="800" dirty="0">
+                <a:solidFill>
+                  <a:srgbClr val="374151"/>
+                </a:solidFill>
+                <a:latin typeface="Calibri" pitchFamily="34" charset="0"/>
+                <a:ea typeface="Calibri" pitchFamily="34" charset="-122"/>
+                <a:cs typeface="Calibri" pitchFamily="34" charset="-120"/>
+              </a:rPr>
+              <a:t>PDP8은 정책 수립 및 실행 초기단계에서 본격 실행 전환 국면입니다. 신규 기사 8건은 모두 PDP8의 핵심 전략을 구현하는 동향을 반영합니다. 특히 [7번 기사] 청정에너지 촉진 및 아세안 전력연계 정책은 마스터플랜의 구체적 실행을 명시하고 있습니다.</a:t>
+            </a:r>
             <a:endParaRPr lang="en-US" sz="800" dirty="0"/>
           </a:p>
           <a:p>
             <a:pPr indent="0" marL="0">
               <a:buNone/>
             </a:pPr>
+            <a:endParaRPr lang="en-US" sz="800" dirty="0"/>
+          </a:p>
+          <a:p>
+            <a:pPr indent="0" marL="0">
+              <a:buNone/>
+            </a:pPr>
             <a:r>
               <a:rPr lang="en-US" sz="800" dirty="0">
                 <a:solidFill>
@@ -44464,7 +44532,7 @@
                 <a:ea typeface="Calibri" pitchFamily="34" charset="-122"/>
                 <a:cs typeface="Calibri" pitchFamily="34" charset="-120"/>
               </a:rPr>
-              <a:t>---</a:t>
+              <a:t>**KPI 달성도 평가**  </a:t>
             </a:r>
             <a:endParaRPr lang="en-US" sz="800" dirty="0"/>
           </a:p>
@@ -44472,93 +44540,127 @@
             <a:pPr indent="0" marL="0">
               <a:buNone/>
             </a:pPr>
+            <a:r>
+              <a:rPr lang="en-US" sz="800" dirty="0">
+                <a:solidFill>
+                  <a:srgbClr val="374151"/>
+                </a:solidFill>
+                <a:latin typeface="Calibri" pitchFamily="34" charset="0"/>
+                <a:ea typeface="Calibri" pitchFamily="34" charset="-122"/>
+                <a:cs typeface="Calibri" pitchFamily="34" charset="-120"/>
+              </a:rPr>
+              <a:t>공식 KPI 목표가 제시되지 않아 정량평가는 제한적이나, 다음 지표로 추정…</a:t>
+            </a:r>
             <a:endParaRPr lang="en-US" sz="800" dirty="0"/>
           </a:p>
-          <a:p>
-            <a:pPr indent="0" marL="0">
-              <a:buNone/>
-            </a:pPr>
-            <a:r>
-              <a:rPr lang="en-US" sz="800" dirty="0">
-                <a:solidFill>
-                  <a:srgbClr val="374151"/>
-                </a:solidFill>
-                <a:latin typeface="Calibri" pitchFamily="34" charset="0"/>
-                <a:ea typeface="Calibri" pitchFamily="34" charset="-122"/>
-                <a:cs typeface="Calibri" pitchFamily="34" charset="-120"/>
-              </a:rPr>
-              <a:t>## 1. 최신 뉴스 분석</a:t>
-            </a:r>
-            <a:endParaRPr lang="en-US" sz="800" dirty="0"/>
-          </a:p>
-          <a:p>
-            <a:pPr indent="0" marL="0">
-              <a:buNone/>
-            </a:pPr>
-            <a:endParaRPr lang="en-US" sz="800" dirty="0"/>
-          </a:p>
-          <a:p>
-            <a:pPr indent="0" marL="0">
-              <a:buNone/>
-            </a:pPr>
-            <a:r>
-              <a:rPr lang="en-US" sz="800" dirty="0">
-                <a:solidFill>
-                  <a:srgbClr val="374151"/>
-                </a:solidFill>
-                <a:latin typeface="Calibri" pitchFamily="34" charset="0"/>
-                <a:ea typeface="Calibri" pitchFamily="34" charset="-122"/>
-                <a:cs typeface="Calibri" pitchFamily="34" charset="-120"/>
-              </a:rPr>
-              <a:t>**사업 진행단계 및 맥락:**</a:t>
-            </a:r>
-            <a:endParaRPr lang="en-US" sz="800" dirty="0"/>
-          </a:p>
-          <a:p>
-            <a:pPr indent="0" marL="0">
-              <a:buNone/>
-            </a:pPr>
-            <a:r>
-              <a:rPr lang="en-US" sz="800" dirty="0">
-                <a:solidFill>
-                  <a:srgbClr val="374151"/>
-                </a:solidFill>
-                <a:latin typeface="Calibri" pitchFamily="34" charset="0"/>
-                <a:ea typeface="Calibri" pitchFamily="34" charset="-122"/>
-                <a:cs typeface="Calibri" pitchFamily="34" charset="-120"/>
-              </a:rPr>
-              <a:t>베트남 제8차 국가전력개발계획(PDP8)은 현재 **실행 초기 단계(정책수립 → 프로젝트 파일럿 전환)**에 있습니다. </a:t>
-            </a:r>
-            <a:endParaRPr lang="en-US" sz="800" dirty="0"/>
-          </a:p>
-          <a:p>
-            <a:pPr indent="0" marL="0">
-              <a:buNone/>
-            </a:pPr>
-            <a:endParaRPr lang="en-US" sz="800" dirty="0"/>
-          </a:p>
-          <a:p>
-            <a:pPr indent="0" marL="0">
-              <a:buNone/>
-            </a:pPr>
-            <a:r>
-              <a:rPr lang="en-US" sz="800" dirty="0">
-                <a:solidFill>
-                  <a:srgbClr val="374151"/>
-                </a:solidFill>
-                <a:latin typeface="Calibri" pitchFamily="34" charset="0"/>
-                <a:ea typeface="Calibri" pitchFamily="34" charset="-122"/>
-                <a:cs typeface="Calibri" pitchFamily="34" charset="-120"/>
-              </a:rPr>
-              <a:t>히스토리 기사(4월)에서 "전기 부족 심화"가 주요 정책 압력으로 작용했다면, 이번 주 신규 기사는 **대응 움직임의 가속화**를 …</a:t>
-            </a:r>
-            <a:endParaRPr lang="en-US" sz="800" dirty="0"/>
-          </a:p>
-        </p:txBody>
-      </p:sp>
-      <p:sp>
-        <p:nvSpPr>
-          <p:cNvPr id="19" name="Text 17"/>
+        </p:txBody>
+      </p:sp>
+      <p:sp>
+        <p:nvSpPr>
+          <p:cNvPr id="19" name="Shape 17"/>
+          <p:cNvSpPr/>
+          <p:nvPr/>
+        </p:nvSpPr>
+        <p:spPr>
+          <a:xfrm>
+            <a:off x="4325112" y="2651760"/>
+            <a:ext cx="4498848" cy="402336"/>
+          </a:xfrm>
+          <a:prstGeom prst="rect">
+            <a:avLst/>
+          </a:prstGeom>
+          <a:solidFill>
+            <a:srgbClr val="E8EEF4"/>
+          </a:solidFill>
+          <a:ln w="12700">
+            <a:solidFill>
+              <a:srgbClr val="0C2340"/>
+            </a:solidFill>
+            <a:prstDash val="solid"/>
+          </a:ln>
+        </p:spPr>
+      </p:sp>
+      <p:sp>
+        <p:nvSpPr>
+          <p:cNvPr id="20" name="Text 18"/>
+          <p:cNvSpPr/>
+          <p:nvPr/>
+        </p:nvSpPr>
+        <p:spPr>
+          <a:xfrm>
+            <a:off x="4370832" y="2670048"/>
+            <a:ext cx="594360" cy="146304"/>
+          </a:xfrm>
+          <a:prstGeom prst="rect">
+            <a:avLst/>
+          </a:prstGeom>
+          <a:noFill/>
+          <a:ln/>
+        </p:spPr>
+        <p:txBody>
+          <a:bodyPr wrap="square" lIns="0" tIns="0" rIns="0" bIns="0" rtlCol="0" anchor="ctr"/>
+          <a:lstStyle/>
+          <a:p>
+            <a:pPr indent="0" marL="0">
+              <a:buNone/>
+            </a:pPr>
+            <a:r>
+              <a:rPr lang="en-US" sz="700" b="1" dirty="0">
+                <a:solidFill>
+                  <a:srgbClr val="0C2340"/>
+                </a:solidFill>
+                <a:latin typeface="Calibri" pitchFamily="34" charset="0"/>
+                <a:ea typeface="Calibri" pitchFamily="34" charset="-122"/>
+                <a:cs typeface="Calibri" pitchFamily="34" charset="-120"/>
+              </a:rPr>
+              <a:t>Insight</a:t>
+            </a:r>
+            <a:endParaRPr lang="en-US" sz="700" dirty="0"/>
+          </a:p>
+        </p:txBody>
+      </p:sp>
+      <p:sp>
+        <p:nvSpPr>
+          <p:cNvPr id="21" name="Text 19"/>
+          <p:cNvSpPr/>
+          <p:nvPr/>
+        </p:nvSpPr>
+        <p:spPr>
+          <a:xfrm>
+            <a:off x="4370832" y="2834640"/>
+            <a:ext cx="4407408" cy="201168"/>
+          </a:xfrm>
+          <a:prstGeom prst="rect">
+            <a:avLst/>
+          </a:prstGeom>
+          <a:noFill/>
+          <a:ln/>
+        </p:spPr>
+        <p:txBody>
+          <a:bodyPr wrap="square" lIns="0" tIns="0" rIns="0" bIns="0" rtlCol="0" anchor="ctr"/>
+          <a:lstStyle/>
+          <a:p>
+            <a:pPr indent="0" marL="0">
+              <a:buNone/>
+            </a:pPr>
+            <a:r>
+              <a:rPr lang="en-US" sz="750" b="1" dirty="0">
+                <a:solidFill>
+                  <a:srgbClr val="0C2340"/>
+                </a:solidFill>
+                <a:latin typeface="Calibri" pitchFamily="34" charset="0"/>
+                <a:ea typeface="Calibri" pitchFamily="34" charset="-122"/>
+                <a:cs typeface="Calibri" pitchFamily="34" charset="-120"/>
+              </a:rPr>
+              <a:t>PDP8 실행력이 정책 선언에서 **구체적 인프라 구축으로 전환되는 임계점**입니다. 재생에너지 프로젝트 파이프라인 가시화(수력·태양광)와 미-한 외자 진입 동시 가속은 **자금…</a:t>
+            </a:r>
+            <a:endParaRPr lang="en-US" sz="750" dirty="0"/>
+          </a:p>
+        </p:txBody>
+      </p:sp>
+      <p:sp>
+        <p:nvSpPr>
+          <p:cNvPr id="22" name="Text 20"/>
           <p:cNvSpPr/>
           <p:nvPr/>
         </p:nvSpPr>
@@ -44589,7 +44691,7 @@
                 <a:ea typeface="Calibri" pitchFamily="34" charset="-122"/>
                 <a:cs typeface="Calibri" pitchFamily="34" charset="-120"/>
               </a:rPr>
-              <a:t>수집 기사  (★신규 9건  +  기존 181건)</a:t>
+              <a:t>수집 기사  (★신규 10건  +  기존 181건)</a:t>
             </a:r>
             <a:endParaRPr lang="en-US" sz="800" dirty="0"/>
           </a:p>
@@ -44597,7 +44699,7 @@
       </p:sp>
       <p:sp>
         <p:nvSpPr>
-          <p:cNvPr id="20" name="Shape 18"/>
+          <p:cNvPr id="23" name="Shape 21"/>
           <p:cNvSpPr/>
           <p:nvPr/>
         </p:nvSpPr>
@@ -44622,7 +44724,7 @@
       </p:sp>
       <p:sp>
         <p:nvSpPr>
-          <p:cNvPr id="21" name="Text 19"/>
+          <p:cNvPr id="24" name="Text 22"/>
           <p:cNvSpPr/>
           <p:nvPr/>
         </p:nvSpPr>
@@ -44661,7 +44763,7 @@
       </p:sp>
       <p:sp>
         <p:nvSpPr>
-          <p:cNvPr id="22" name="Text 20"/>
+          <p:cNvPr id="25" name="Text 23"/>
           <p:cNvSpPr/>
           <p:nvPr/>
         </p:nvSpPr>
@@ -44700,7 +44802,7 @@
       </p:sp>
       <p:sp>
         <p:nvSpPr>
-          <p:cNvPr id="23" name="Text 21"/>
+          <p:cNvPr id="26" name="Text 24"/>
           <p:cNvSpPr/>
           <p:nvPr/>
         </p:nvSpPr>
@@ -44739,7 +44841,7 @@
       </p:sp>
       <p:sp>
         <p:nvSpPr>
-          <p:cNvPr id="24" name="Text 22"/>
+          <p:cNvPr id="27" name="Text 25"/>
           <p:cNvSpPr/>
           <p:nvPr/>
         </p:nvSpPr>
@@ -44778,7 +44880,7 @@
       </p:sp>
       <p:sp>
         <p:nvSpPr>
-          <p:cNvPr id="25" name="Shape 23"/>
+          <p:cNvPr id="28" name="Shape 26"/>
           <p:cNvSpPr/>
           <p:nvPr/>
         </p:nvSpPr>
@@ -44803,7 +44905,7 @@
       </p:sp>
       <p:sp>
         <p:nvSpPr>
-          <p:cNvPr id="26" name="Shape 24"/>
+          <p:cNvPr id="29" name="Shape 27"/>
           <p:cNvSpPr/>
           <p:nvPr/>
         </p:nvSpPr>
@@ -44828,7 +44930,7 @@
       </p:sp>
       <p:sp>
         <p:nvSpPr>
-          <p:cNvPr id="27" name="Text 25"/>
+          <p:cNvPr id="30" name="Text 28"/>
           <p:cNvSpPr/>
           <p:nvPr/>
         </p:nvSpPr>
@@ -44867,7 +44969,7 @@
       </p:sp>
       <p:sp>
         <p:nvSpPr>
-          <p:cNvPr id="28" name="Text 26"/>
+          <p:cNvPr id="31" name="Text 29"/>
           <p:cNvSpPr/>
           <p:nvPr/>
         </p:nvSpPr>
@@ -44906,7 +45008,7 @@
       </p:sp>
       <p:sp>
         <p:nvSpPr>
-          <p:cNvPr id="29" name="Text 27"/>
+          <p:cNvPr id="32" name="Text 30"/>
           <p:cNvSpPr/>
           <p:nvPr/>
         </p:nvSpPr>
@@ -44937,7 +45039,7 @@
                 <a:ea typeface="Calibri" pitchFamily="34" charset="-122"/>
                 <a:cs typeface="Calibri" pitchFamily="34" charset="-120"/>
               </a:rPr>
-              <a:t>VnExpress I…</a:t>
+              <a:t>Mekong Eye</a:t>
             </a:r>
             <a:endParaRPr lang="en-US" sz="700" dirty="0"/>
           </a:p>
@@ -44945,7 +45047,7 @@
       </p:sp>
       <p:sp>
         <p:nvSpPr>
-          <p:cNvPr id="30" name="Text 28"/>
+          <p:cNvPr id="33" name="Text 31"/>
           <p:cNvSpPr/>
           <p:nvPr/>
         </p:nvSpPr>
@@ -44976,7 +45078,7 @@
                 <a:ea typeface="Calibri" pitchFamily="34" charset="-122"/>
                 <a:cs typeface="Calibri" pitchFamily="34" charset="-120"/>
               </a:rPr>
-              <a:t>태국, 말레이시아와의 철도 연결 가속화</a:t>
+              <a:t>라오스는 이 지역에 힘을 실어주지만 자국의 주택은 시원함을 유지하기 위해 …</a:t>
             </a:r>
             <a:endParaRPr lang="en-US" sz="750" dirty="0"/>
           </a:p>
@@ -44984,7 +45086,7 @@
       </p:sp>
       <p:sp>
         <p:nvSpPr>
-          <p:cNvPr id="31" name="Shape 29"/>
+          <p:cNvPr id="34" name="Shape 32"/>
           <p:cNvSpPr/>
           <p:nvPr/>
         </p:nvSpPr>
@@ -45009,7 +45111,7 @@
       </p:sp>
       <p:sp>
         <p:nvSpPr>
-          <p:cNvPr id="32" name="Shape 30"/>
+          <p:cNvPr id="35" name="Shape 33"/>
           <p:cNvSpPr/>
           <p:nvPr/>
         </p:nvSpPr>
@@ -45034,7 +45136,7 @@
       </p:sp>
       <p:sp>
         <p:nvSpPr>
-          <p:cNvPr id="33" name="Text 31"/>
+          <p:cNvPr id="36" name="Text 34"/>
           <p:cNvSpPr/>
           <p:nvPr/>
         </p:nvSpPr>
@@ -45073,7 +45175,7 @@
       </p:sp>
       <p:sp>
         <p:nvSpPr>
-          <p:cNvPr id="34" name="Text 32"/>
+          <p:cNvPr id="37" name="Text 35"/>
           <p:cNvSpPr/>
           <p:nvPr/>
         </p:nvSpPr>
@@ -45104,7 +45206,7 @@
                 <a:ea typeface="Calibri" pitchFamily="34" charset="-122"/>
                 <a:cs typeface="Calibri" pitchFamily="34" charset="-120"/>
               </a:rPr>
-              <a:t>05-05</a:t>
+              <a:t>05-04</a:t>
             </a:r>
             <a:endParaRPr lang="en-US" sz="700" dirty="0"/>
           </a:p>
@@ -45112,7 +45214,7 @@
       </p:sp>
       <p:sp>
         <p:nvSpPr>
-          <p:cNvPr id="35" name="Text 33"/>
+          <p:cNvPr id="38" name="Text 36"/>
           <p:cNvSpPr/>
           <p:nvPr/>
         </p:nvSpPr>
@@ -45143,7 +45245,7 @@
                 <a:ea typeface="Calibri" pitchFamily="34" charset="-122"/>
                 <a:cs typeface="Calibri" pitchFamily="34" charset="-120"/>
               </a:rPr>
-              <a:t>vietnamplus</a:t>
+              <a:t>VnExpress I…</a:t>
             </a:r>
             <a:endParaRPr lang="en-US" sz="700" dirty="0"/>
           </a:p>
@@ -45151,7 +45253,7 @@
       </p:sp>
       <p:sp>
         <p:nvSpPr>
-          <p:cNvPr id="36" name="Text 34"/>
+          <p:cNvPr id="39" name="Text 37"/>
           <p:cNvSpPr/>
           <p:nvPr/>
         </p:nvSpPr>
@@ -45182,7 +45284,7 @@
                 <a:ea typeface="Calibri" pitchFamily="34" charset="-122"/>
                 <a:cs typeface="Calibri" pitchFamily="34" charset="-120"/>
               </a:rPr>
-              <a:t>베트남, 미국, 더 강력한 에너지 협력 모색</a:t>
+              <a:t>태국, 말레이시아와의 철도 연결 가속화</a:t>
             </a:r>
             <a:endParaRPr lang="en-US" sz="750" dirty="0"/>
           </a:p>
@@ -45190,7 +45292,7 @@
       </p:sp>
       <p:sp>
         <p:nvSpPr>
-          <p:cNvPr id="37" name="Shape 35"/>
+          <p:cNvPr id="40" name="Shape 38"/>
           <p:cNvSpPr/>
           <p:nvPr/>
         </p:nvSpPr>
@@ -45215,7 +45317,7 @@
       </p:sp>
       <p:sp>
         <p:nvSpPr>
-          <p:cNvPr id="38" name="Shape 36"/>
+          <p:cNvPr id="41" name="Shape 39"/>
           <p:cNvSpPr/>
           <p:nvPr/>
         </p:nvSpPr>
@@ -45240,7 +45342,7 @@
       </p:sp>
       <p:sp>
         <p:nvSpPr>
-          <p:cNvPr id="39" name="Text 37"/>
+          <p:cNvPr id="42" name="Text 40"/>
           <p:cNvSpPr/>
           <p:nvPr/>
         </p:nvSpPr>
@@ -45279,7 +45381,7 @@
       </p:sp>
       <p:sp>
         <p:nvSpPr>
-          <p:cNvPr id="40" name="Text 38"/>
+          <p:cNvPr id="43" name="Text 41"/>
           <p:cNvSpPr/>
           <p:nvPr/>
         </p:nvSpPr>
@@ -45318,7 +45420,7 @@
       </p:sp>
       <p:sp>
         <p:nvSpPr>
-          <p:cNvPr id="41" name="Text 39"/>
+          <p:cNvPr id="44" name="Text 42"/>
           <p:cNvSpPr/>
           <p:nvPr/>
         </p:nvSpPr>
@@ -45349,7 +45451,7 @@
                 <a:ea typeface="Calibri" pitchFamily="34" charset="-122"/>
                 <a:cs typeface="Calibri" pitchFamily="34" charset="-120"/>
               </a:rPr>
-              <a:t>Moi truong …</a:t>
+              <a:t>vietnamplus</a:t>
             </a:r>
             <a:endParaRPr lang="en-US" sz="700" dirty="0"/>
           </a:p>
@@ -45357,7 +45459,7 @@
       </p:sp>
       <p:sp>
         <p:nvSpPr>
-          <p:cNvPr id="42" name="Text 40"/>
+          <p:cNvPr id="45" name="Text 43"/>
           <p:cNvSpPr/>
           <p:nvPr/>
         </p:nvSpPr>
@@ -45388,7 +45490,7 @@
                 <a:ea typeface="Calibri" pitchFamily="34" charset="-122"/>
                 <a:cs typeface="Calibri" pitchFamily="34" charset="-120"/>
               </a:rPr>
-              <a:t>부옹 수력 발전소는 건기에 활발하게 운영되어 하류의 전기 및 수도 공급을 …</a:t>
+              <a:t>베트남, 미국, 더 강력한 에너지 협력 모색</a:t>
             </a:r>
             <a:endParaRPr lang="en-US" sz="750" dirty="0"/>
           </a:p>
@@ -45396,7 +45498,7 @@
       </p:sp>
       <p:sp>
         <p:nvSpPr>
-          <p:cNvPr id="43" name="Shape 41"/>
+          <p:cNvPr id="46" name="Shape 44"/>
           <p:cNvSpPr/>
           <p:nvPr/>
         </p:nvSpPr>
@@ -45421,7 +45523,7 @@
       </p:sp>
       <p:sp>
         <p:nvSpPr>
-          <p:cNvPr id="44" name="Shape 42"/>
+          <p:cNvPr id="47" name="Shape 45"/>
           <p:cNvSpPr/>
           <p:nvPr/>
         </p:nvSpPr>
@@ -45446,7 +45548,7 @@
       </p:sp>
       <p:sp>
         <p:nvSpPr>
-          <p:cNvPr id="45" name="Text 43"/>
+          <p:cNvPr id="48" name="Text 46"/>
           <p:cNvSpPr/>
           <p:nvPr/>
         </p:nvSpPr>
@@ -45485,7 +45587,7 @@
       </p:sp>
       <p:sp>
         <p:nvSpPr>
-          <p:cNvPr id="46" name="Text 44"/>
+          <p:cNvPr id="49" name="Text 47"/>
           <p:cNvSpPr/>
           <p:nvPr/>
         </p:nvSpPr>
@@ -45524,7 +45626,7 @@
       </p:sp>
       <p:sp>
         <p:nvSpPr>
-          <p:cNvPr id="47" name="Text 45"/>
+          <p:cNvPr id="50" name="Text 48"/>
           <p:cNvSpPr/>
           <p:nvPr/>
         </p:nvSpPr>
@@ -45563,7 +45665,7 @@
       </p:sp>
       <p:sp>
         <p:nvSpPr>
-          <p:cNvPr id="48" name="Text 46"/>
+          <p:cNvPr id="51" name="Text 49"/>
           <p:cNvSpPr/>
           <p:nvPr/>
         </p:nvSpPr>
@@ -45594,7 +45696,7 @@
                 <a:ea typeface="Calibri" pitchFamily="34" charset="-122"/>
                 <a:cs typeface="Calibri" pitchFamily="34" charset="-120"/>
               </a:rPr>
-              <a:t>[동영상] El Nino 2026의 위험에 처하기 전에 수력 발전이 물을 …</a:t>
+              <a:t>부옹 수력 발전소는 건기에 활발하게 운영되어 하류의 전기 및 수도 공급을 …</a:t>
             </a:r>
             <a:endParaRPr lang="en-US" sz="750" dirty="0"/>
           </a:p>
@@ -45602,7 +45704,7 @@
       </p:sp>
       <p:sp>
         <p:nvSpPr>
-          <p:cNvPr id="49" name="Shape 47"/>
+          <p:cNvPr id="52" name="Shape 50"/>
           <p:cNvSpPr/>
           <p:nvPr/>
         </p:nvSpPr>
@@ -45627,7 +45729,7 @@
       </p:sp>
       <p:sp>
         <p:nvSpPr>
-          <p:cNvPr id="50" name="Shape 48"/>
+          <p:cNvPr id="53" name="Shape 51"/>
           <p:cNvSpPr/>
           <p:nvPr/>
         </p:nvSpPr>
@@ -45652,7 +45754,7 @@
       </p:sp>
       <p:sp>
         <p:nvSpPr>
-          <p:cNvPr id="51" name="Text 49"/>
+          <p:cNvPr id="54" name="Text 52"/>
           <p:cNvSpPr/>
           <p:nvPr/>
         </p:nvSpPr>
@@ -45691,7 +45793,7 @@
       </p:sp>
       <p:sp>
         <p:nvSpPr>
-          <p:cNvPr id="52" name="Text 50"/>
+          <p:cNvPr id="55" name="Text 53"/>
           <p:cNvSpPr/>
           <p:nvPr/>
         </p:nvSpPr>
@@ -45722,7 +45824,7 @@
                 <a:ea typeface="Calibri" pitchFamily="34" charset="-122"/>
                 <a:cs typeface="Calibri" pitchFamily="34" charset="-120"/>
               </a:rPr>
-              <a:t>05-06</a:t>
+              <a:t>05-05</a:t>
             </a:r>
             <a:endParaRPr lang="en-US" sz="700" dirty="0"/>
           </a:p>
@@ -45730,7 +45832,7 @@
       </p:sp>
       <p:sp>
         <p:nvSpPr>
-          <p:cNvPr id="53" name="Text 51"/>
+          <p:cNvPr id="56" name="Text 54"/>
           <p:cNvSpPr/>
           <p:nvPr/>
         </p:nvSpPr>
@@ -45761,7 +45863,7 @@
                 <a:ea typeface="Calibri" pitchFamily="34" charset="-122"/>
                 <a:cs typeface="Calibri" pitchFamily="34" charset="-120"/>
               </a:rPr>
-              <a:t>VnExpress B…</a:t>
+              <a:t>Moi truong …</a:t>
             </a:r>
             <a:endParaRPr lang="en-US" sz="700" dirty="0"/>
           </a:p>
@@ -45769,7 +45871,7 @@
       </p:sp>
       <p:sp>
         <p:nvSpPr>
-          <p:cNvPr id="54" name="Text 52"/>
+          <p:cNvPr id="57" name="Text 55"/>
           <p:cNvSpPr/>
           <p:nvPr/>
         </p:nvSpPr>
@@ -45800,7 +45902,7 @@
                 <a:ea typeface="Calibri" pitchFamily="34" charset="-122"/>
                 <a:cs typeface="Calibri" pitchFamily="34" charset="-120"/>
               </a:rPr>
-              <a:t>수출이 줄어들면서 과일 가격이 급락합니다.</a:t>
+              <a:t>[동영상] El Nino 2026의 위험에 처하기 전에 수력 발전이 물을 …</a:t>
             </a:r>
             <a:endParaRPr lang="en-US" sz="750" dirty="0"/>
           </a:p>
@@ -45808,7 +45910,7 @@
       </p:sp>
       <p:sp>
         <p:nvSpPr>
-          <p:cNvPr id="55" name="Shape 53"/>
+          <p:cNvPr id="58" name="Shape 56"/>
           <p:cNvSpPr/>
           <p:nvPr/>
         </p:nvSpPr>
@@ -45833,7 +45935,7 @@
       </p:sp>
       <p:sp>
         <p:nvSpPr>
-          <p:cNvPr id="56" name="Shape 54"/>
+          <p:cNvPr id="59" name="Shape 57"/>
           <p:cNvSpPr/>
           <p:nvPr/>
         </p:nvSpPr>
@@ -45858,7 +45960,7 @@
       </p:sp>
       <p:sp>
         <p:nvSpPr>
-          <p:cNvPr id="57" name="Text 55"/>
+          <p:cNvPr id="60" name="Text 58"/>
           <p:cNvSpPr/>
           <p:nvPr/>
         </p:nvSpPr>
@@ -45897,7 +45999,7 @@
       </p:sp>
       <p:sp>
         <p:nvSpPr>
-          <p:cNvPr id="58" name="Text 56"/>
+          <p:cNvPr id="61" name="Text 59"/>
           <p:cNvSpPr/>
           <p:nvPr/>
         </p:nvSpPr>
@@ -45936,7 +46038,7 @@
       </p:sp>
       <p:sp>
         <p:nvSpPr>
-          <p:cNvPr id="59" name="Text 57"/>
+          <p:cNvPr id="62" name="Text 60"/>
           <p:cNvSpPr/>
           <p:nvPr/>
         </p:nvSpPr>
@@ -45967,7 +46069,7 @@
                 <a:ea typeface="Calibri" pitchFamily="34" charset="-122"/>
                 <a:cs typeface="Calibri" pitchFamily="34" charset="-120"/>
               </a:rPr>
-              <a:t>Moi truong …</a:t>
+              <a:t>VnExpress B…</a:t>
             </a:r>
             <a:endParaRPr lang="en-US" sz="700" dirty="0"/>
           </a:p>
@@ -45975,7 +46077,7 @@
       </p:sp>
       <p:sp>
         <p:nvSpPr>
-          <p:cNvPr id="60" name="Text 58"/>
+          <p:cNvPr id="63" name="Text 61"/>
           <p:cNvSpPr/>
           <p:nvPr/>
         </p:nvSpPr>
@@ -46006,7 +46108,7 @@
                 <a:ea typeface="Calibri" pitchFamily="34" charset="-122"/>
                 <a:cs typeface="Calibri" pitchFamily="34" charset="-120"/>
               </a:rPr>
-              <a:t>베트남, 청정 에너지 촉진, 아세안 전력 연결 가속화</a:t>
+              <a:t>수출이 줄어들면서 과일 가격이 급락합니다.</a:t>
             </a:r>
             <a:endParaRPr lang="en-US" sz="750" dirty="0"/>
           </a:p>
@@ -46014,7 +46116,7 @@
       </p:sp>
       <p:sp>
         <p:nvSpPr>
-          <p:cNvPr id="61" name="Shape 59"/>
+          <p:cNvPr id="64" name="Shape 62"/>
           <p:cNvSpPr/>
           <p:nvPr/>
         </p:nvSpPr>
@@ -46039,7 +46141,7 @@
       </p:sp>
       <p:sp>
         <p:nvSpPr>
-          <p:cNvPr id="62" name="Shape 60"/>
+          <p:cNvPr id="65" name="Shape 63"/>
           <p:cNvSpPr/>
           <p:nvPr/>
         </p:nvSpPr>
@@ -46064,7 +46166,7 @@
       </p:sp>
       <p:sp>
         <p:nvSpPr>
-          <p:cNvPr id="63" name="Text 61"/>
+          <p:cNvPr id="66" name="Text 64"/>
           <p:cNvSpPr/>
           <p:nvPr/>
         </p:nvSpPr>
@@ -46103,7 +46205,7 @@
       </p:sp>
       <p:sp>
         <p:nvSpPr>
-          <p:cNvPr id="64" name="Text 62"/>
+          <p:cNvPr id="67" name="Text 65"/>
           <p:cNvSpPr/>
           <p:nvPr/>
         </p:nvSpPr>
@@ -46142,7 +46244,7 @@
       </p:sp>
       <p:sp>
         <p:nvSpPr>
-          <p:cNvPr id="65" name="Text 63"/>
+          <p:cNvPr id="68" name="Text 66"/>
           <p:cNvSpPr/>
           <p:nvPr/>
         </p:nvSpPr>
@@ -46173,7 +46275,7 @@
                 <a:ea typeface="Calibri" pitchFamily="34" charset="-122"/>
                 <a:cs typeface="Calibri" pitchFamily="34" charset="-120"/>
               </a:rPr>
-              <a:t>VnExpress B…</a:t>
+              <a:t>Moi truong …</a:t>
             </a:r>
             <a:endParaRPr lang="en-US" sz="700" dirty="0"/>
           </a:p>
@@ -46181,7 +46283,7 @@
       </p:sp>
       <p:sp>
         <p:nvSpPr>
-          <p:cNvPr id="66" name="Text 64"/>
+          <p:cNvPr id="69" name="Text 67"/>
           <p:cNvSpPr/>
           <p:nvPr/>
         </p:nvSpPr>
@@ -46212,7 +46314,7 @@
                 <a:ea typeface="Calibri" pitchFamily="34" charset="-122"/>
                 <a:cs typeface="Calibri" pitchFamily="34" charset="-120"/>
               </a:rPr>
-              <a:t>정재은, 베트남에 10MW 옥상 태양광 시스템 설치</a:t>
+              <a:t>베트남, 청정 에너지 촉진, 아세안 전력 연결 가속화</a:t>
             </a:r>
             <a:endParaRPr lang="en-US" sz="750" dirty="0"/>
           </a:p>
@@ -46220,7 +46322,7 @@
       </p:sp>
       <p:sp>
         <p:nvSpPr>
-          <p:cNvPr id="67" name="Shape 65"/>
+          <p:cNvPr id="70" name="Shape 68"/>
           <p:cNvSpPr/>
           <p:nvPr/>
         </p:nvSpPr>
@@ -46245,7 +46347,7 @@
       </p:sp>
       <p:sp>
         <p:nvSpPr>
-          <p:cNvPr id="68" name="Shape 66"/>
+          <p:cNvPr id="71" name="Shape 69"/>
           <p:cNvSpPr/>
           <p:nvPr/>
         </p:nvSpPr>
@@ -46270,7 +46372,7 @@
       </p:sp>
       <p:sp>
         <p:nvSpPr>
-          <p:cNvPr id="69" name="Text 67"/>
+          <p:cNvPr id="72" name="Text 70"/>
           <p:cNvSpPr/>
           <p:nvPr/>
         </p:nvSpPr>
@@ -46309,7 +46411,7 @@
       </p:sp>
       <p:sp>
         <p:nvSpPr>
-          <p:cNvPr id="70" name="Text 68"/>
+          <p:cNvPr id="73" name="Text 71"/>
           <p:cNvSpPr/>
           <p:nvPr/>
         </p:nvSpPr>
@@ -46340,7 +46442,7 @@
                 <a:ea typeface="Calibri" pitchFamily="34" charset="-122"/>
                 <a:cs typeface="Calibri" pitchFamily="34" charset="-120"/>
               </a:rPr>
-              <a:t>05-07</a:t>
+              <a:t>05-06</a:t>
             </a:r>
             <a:endParaRPr lang="en-US" sz="700" dirty="0"/>
           </a:p>
@@ -46348,7 +46450,7 @@
       </p:sp>
       <p:sp>
         <p:nvSpPr>
-          <p:cNvPr id="71" name="Text 69"/>
+          <p:cNvPr id="74" name="Text 72"/>
           <p:cNvSpPr/>
           <p:nvPr/>
         </p:nvSpPr>
@@ -46379,7 +46481,7 @@
                 <a:ea typeface="Calibri" pitchFamily="34" charset="-122"/>
                 <a:cs typeface="Calibri" pitchFamily="34" charset="-120"/>
               </a:rPr>
-              <a:t>Moi truong …</a:t>
+              <a:t>VnExpress B…</a:t>
             </a:r>
             <a:endParaRPr lang="en-US" sz="700" dirty="0"/>
           </a:p>
@@ -46387,7 +46489,7 @@
       </p:sp>
       <p:sp>
         <p:nvSpPr>
-          <p:cNvPr id="72" name="Text 70"/>
+          <p:cNvPr id="75" name="Text 73"/>
           <p:cNvSpPr/>
           <p:nvPr/>
         </p:nvSpPr>
@@ -46418,7 +46520,7 @@
                 <a:ea typeface="Calibri" pitchFamily="34" charset="-122"/>
                 <a:cs typeface="Calibri" pitchFamily="34" charset="-120"/>
               </a:rPr>
-              <a:t>디엔비엔푸의 승리 - 20세기의 서사시와 시대의 가치</a:t>
+              <a:t>정재은, 베트남에 10MW 옥상 태양광 시스템 설치</a:t>
             </a:r>
             <a:endParaRPr lang="en-US" sz="750" dirty="0"/>
           </a:p>
@@ -46426,7 +46528,7 @@
       </p:sp>
       <p:sp>
         <p:nvSpPr>
-          <p:cNvPr id="73" name="Text 71"/>
+          <p:cNvPr id="76" name="Text 74"/>
           <p:cNvSpPr/>
           <p:nvPr/>
         </p:nvSpPr>
@@ -46465,7 +46567,7 @@
       </p:sp>
       <p:sp>
         <p:nvSpPr>
-          <p:cNvPr id="74" name="Shape 72"/>
+          <p:cNvPr id="77" name="Shape 75"/>
           <p:cNvSpPr/>
           <p:nvPr/>
         </p:nvSpPr>
@@ -46490,7 +46592,7 @@
       </p:sp>
       <p:sp>
         <p:nvSpPr>
-          <p:cNvPr id="75" name="Text 73"/>
+          <p:cNvPr id="78" name="Text 76"/>
           <p:cNvSpPr/>
           <p:nvPr/>
         </p:nvSpPr>
@@ -46529,7 +46631,7 @@
       </p:sp>
       <p:sp>
         <p:nvSpPr>
-          <p:cNvPr id="76" name="Text 74"/>
+          <p:cNvPr id="79" name="Text 77"/>
           <p:cNvSpPr/>
           <p:nvPr/>
         </p:nvSpPr>
@@ -46790,7 +46892,7 @@
                 <a:ea typeface="Calibri" pitchFamily="34" charset="-122"/>
                 <a:cs typeface="Calibri" pitchFamily="34" charset="-120"/>
               </a:rPr>
-              <a:t>기사 149건  |  ★신규 7건</a:t>
+              <a:t>기사 150건  |  ★신규 8건</a:t>
             </a:r>
             <a:endParaRPr lang="en-US" sz="900" dirty="0"/>
           </a:p>
@@ -47124,7 +47226,7 @@
                 <a:ea typeface="Calibri" pitchFamily="34" charset="-122"/>
                 <a:cs typeface="Calibri" pitchFamily="34" charset="-120"/>
               </a:rPr>
-              <a:t># PDP8 재생에너지 진행현황 분석 보고서</a:t>
+              <a:t># VN-PWR-PDP8-RENEWABLE 진행현황 분석 보고</a:t>
             </a:r>
             <a:endParaRPr lang="en-US" sz="800" dirty="0"/>
           </a:p>
@@ -47170,7 +47272,7 @@
                 <a:ea typeface="Calibri" pitchFamily="34" charset="-122"/>
                 <a:cs typeface="Calibri" pitchFamily="34" charset="-120"/>
               </a:rPr>
-              <a:t>**사업 진행단계 맥락**</a:t>
+              <a:t>**사업 진행단계 평가**</a:t>
             </a:r>
             <a:endParaRPr lang="en-US" sz="800" dirty="0"/>
           </a:p>
@@ -47193,7 +47295,47 @@
                 <a:ea typeface="Calibri" pitchFamily="34" charset="-122"/>
                 <a:cs typeface="Calibri" pitchFamily="34" charset="-120"/>
               </a:rPr>
-              <a:t>이번 주 신규 기사 7건 중 재생에너지 관련 기사는 3건(기사 2, 3, 5)으로, PDP8 목표 달성을 위한 구체적 진전 신호를 보여줍니다. ★**풍력 컨퍼런스 개최(기사2)**는 정책 레벨의 국제 협력 강화를, **태양광 펀딩 및 옥상시스템 구축(기사3, 5)**은 민간 투자 확대를 …</a:t>
+              <a:t>PDP8 재생에너지 마스터플랜은 투자 유치 및 프로젝트 실행 단계로 진입 중입니다. 이번 주 신규 기사 8건 중 핵심 관련 기사는 3건(37.5%)으로, 태양광과 풍력 모두에서 구체적 동향이 나타나고 있습니다.</a:t>
+            </a:r>
+            <a:endParaRPr lang="en-US" sz="800" dirty="0"/>
+          </a:p>
+          <a:p>
+            <a:pPr indent="0" marL="0">
+              <a:buNone/>
+            </a:pPr>
+            <a:endParaRPr lang="en-US" sz="800" dirty="0"/>
+          </a:p>
+          <a:p>
+            <a:pPr indent="0" marL="0">
+              <a:buNone/>
+            </a:pPr>
+            <a:r>
+              <a:rPr lang="en-US" sz="800" dirty="0">
+                <a:solidFill>
+                  <a:srgbClr val="374151"/>
+                </a:solidFill>
+                <a:latin typeface="Calibri" pitchFamily="34" charset="0"/>
+                <a:ea typeface="Calibri" pitchFamily="34" charset="-122"/>
+                <a:cs typeface="Calibri" pitchFamily="34" charset="-120"/>
+              </a:rPr>
+              <a:t>**★ 핵심 동향:**</a:t>
+            </a:r>
+            <a:endParaRPr lang="en-US" sz="800" dirty="0"/>
+          </a:p>
+          <a:p>
+            <a:pPr indent="0" marL="0">
+              <a:buNone/>
+            </a:pPr>
+            <a:r>
+              <a:rPr lang="en-US" sz="800" dirty="0">
+                <a:solidFill>
+                  <a:srgbClr val="374151"/>
+                </a:solidFill>
+                <a:latin typeface="Calibri" pitchFamily="34" charset="0"/>
+                <a:ea typeface="Calibri" pitchFamily="34" charset="-122"/>
+                <a:cs typeface="Calibri" pitchFamily="34" charset="-120"/>
+              </a:rPr>
+              <a:t>- **풍력**: APAC 풍력에너…</a:t>
             </a:r>
             <a:endParaRPr lang="en-US" sz="800" dirty="0"/>
           </a:p>
@@ -47232,7 +47374,7 @@
                 <a:ea typeface="Calibri" pitchFamily="34" charset="-122"/>
                 <a:cs typeface="Calibri" pitchFamily="34" charset="-120"/>
               </a:rPr>
-              <a:t>수집 기사  (★신규 7건  +  기존 142건)</a:t>
+              <a:t>수집 기사  (★신규 8건  +  기존 142건)</a:t>
             </a:r>
             <a:endParaRPr lang="en-US" sz="800" dirty="0"/>
           </a:p>
@@ -47580,7 +47722,7 @@
                 <a:ea typeface="Calibri" pitchFamily="34" charset="-122"/>
                 <a:cs typeface="Calibri" pitchFamily="34" charset="-120"/>
               </a:rPr>
-              <a:t>VnExpress I…</a:t>
+              <a:t>Mekong Eye</a:t>
             </a:r>
             <a:endParaRPr lang="en-US" sz="700" dirty="0"/>
           </a:p>
@@ -47619,7 +47761,7 @@
                 <a:ea typeface="Calibri" pitchFamily="34" charset="-122"/>
                 <a:cs typeface="Calibri" pitchFamily="34" charset="-120"/>
               </a:rPr>
-              <a:t>태국, 말레이시아와의 철도 연결 가속화</a:t>
+              <a:t>라오스는 이 지역에 힘을 실어주지만 자국의 주택은 시원함을 유지하기 위해 …</a:t>
             </a:r>
             <a:endParaRPr lang="en-US" sz="750" dirty="0"/>
           </a:p>
@@ -47747,7 +47889,7 @@
                 <a:ea typeface="Calibri" pitchFamily="34" charset="-122"/>
                 <a:cs typeface="Calibri" pitchFamily="34" charset="-120"/>
               </a:rPr>
-              <a:t>05-05</a:t>
+              <a:t>05-04</a:t>
             </a:r>
             <a:endParaRPr lang="en-US" sz="700" dirty="0"/>
           </a:p>
@@ -47786,7 +47928,7 @@
                 <a:ea typeface="Calibri" pitchFamily="34" charset="-122"/>
                 <a:cs typeface="Calibri" pitchFamily="34" charset="-120"/>
               </a:rPr>
-              <a:t>Moi truong …</a:t>
+              <a:t>VnExpress I…</a:t>
             </a:r>
             <a:endParaRPr lang="en-US" sz="700" dirty="0"/>
           </a:p>
@@ -47825,7 +47967,7 @@
                 <a:ea typeface="Calibri" pitchFamily="34" charset="-122"/>
                 <a:cs typeface="Calibri" pitchFamily="34" charset="-120"/>
               </a:rPr>
-              <a:t>베트남, APAC 풍력 에너지 컨퍼런스 2026 개최: 풍력 발전 투자 유…</a:t>
+              <a:t>태국, 말레이시아와의 철도 연결 가속화</a:t>
             </a:r>
             <a:endParaRPr lang="en-US" sz="750" dirty="0"/>
           </a:p>
@@ -47953,7 +48095,7 @@
                 <a:ea typeface="Calibri" pitchFamily="34" charset="-122"/>
                 <a:cs typeface="Calibri" pitchFamily="34" charset="-120"/>
               </a:rPr>
-              <a:t>05-06</a:t>
+              <a:t>05-05</a:t>
             </a:r>
             <a:endParaRPr lang="en-US" sz="700" dirty="0"/>
           </a:p>
@@ -47992,7 +48134,7 @@
                 <a:ea typeface="Calibri" pitchFamily="34" charset="-122"/>
                 <a:cs typeface="Calibri" pitchFamily="34" charset="-120"/>
               </a:rPr>
-              <a:t>menafn</a:t>
+              <a:t>Moi truong …</a:t>
             </a:r>
             <a:endParaRPr lang="en-US" sz="700" dirty="0"/>
           </a:p>
@@ -48031,7 +48173,7 @@
                 <a:ea typeface="Calibri" pitchFamily="34" charset="-122"/>
                 <a:cs typeface="Calibri" pitchFamily="34" charset="-120"/>
               </a:rPr>
-              <a:t>Skycorp Solar Group Limited, $ 3.6 백만 두 번…</a:t>
+              <a:t>베트남, APAC 풍력 에너지 컨퍼런스 2026 개최: 풍력 발전 투자 유…</a:t>
             </a:r>
             <a:endParaRPr lang="en-US" sz="750" dirty="0"/>
           </a:p>
@@ -48198,7 +48340,7 @@
                 <a:ea typeface="Calibri" pitchFamily="34" charset="-122"/>
                 <a:cs typeface="Calibri" pitchFamily="34" charset="-120"/>
               </a:rPr>
-              <a:t>VnExpress B…</a:t>
+              <a:t>menafn</a:t>
             </a:r>
             <a:endParaRPr lang="en-US" sz="700" dirty="0"/>
           </a:p>
@@ -48237,7 +48379,7 @@
                 <a:ea typeface="Calibri" pitchFamily="34" charset="-122"/>
                 <a:cs typeface="Calibri" pitchFamily="34" charset="-120"/>
               </a:rPr>
-              <a:t>수출이 줄어들면서 과일 가격이 급락합니다.</a:t>
+              <a:t>Skycorp Solar Group Limited, $ 3.6 백만 두 번…</a:t>
             </a:r>
             <a:endParaRPr lang="en-US" sz="750" dirty="0"/>
           </a:p>
@@ -48443,7 +48585,7 @@
                 <a:ea typeface="Calibri" pitchFamily="34" charset="-122"/>
                 <a:cs typeface="Calibri" pitchFamily="34" charset="-120"/>
               </a:rPr>
-              <a:t>정재은, 베트남에 10MW 옥상 태양광 시스템 설치</a:t>
+              <a:t>수출이 줄어들면서 과일 가격이 급락합니다.</a:t>
             </a:r>
             <a:endParaRPr lang="en-US" sz="750" dirty="0"/>
           </a:p>
@@ -48571,7 +48713,7 @@
                 <a:ea typeface="Calibri" pitchFamily="34" charset="-122"/>
                 <a:cs typeface="Calibri" pitchFamily="34" charset="-120"/>
               </a:rPr>
-              <a:t>05-07</a:t>
+              <a:t>05-06</a:t>
             </a:r>
             <a:endParaRPr lang="en-US" sz="700" dirty="0"/>
           </a:p>
@@ -48610,7 +48752,7 @@
                 <a:ea typeface="Calibri" pitchFamily="34" charset="-122"/>
                 <a:cs typeface="Calibri" pitchFamily="34" charset="-120"/>
               </a:rPr>
-              <a:t>Moi truong …</a:t>
+              <a:t>VnExpress B…</a:t>
             </a:r>
             <a:endParaRPr lang="en-US" sz="700" dirty="0"/>
           </a:p>
@@ -48649,7 +48791,7 @@
                 <a:ea typeface="Calibri" pitchFamily="34" charset="-122"/>
                 <a:cs typeface="Calibri" pitchFamily="34" charset="-120"/>
               </a:rPr>
-              <a:t>디엔비엔푸의 승리 - 20세기의 서사시와 시대의 가치</a:t>
+              <a:t>정재은, 베트남에 10MW 옥상 태양광 시스템 설치</a:t>
             </a:r>
             <a:endParaRPr lang="en-US" sz="750" dirty="0"/>
           </a:p>
@@ -48777,7 +48919,7 @@
                 <a:ea typeface="Calibri" pitchFamily="34" charset="-122"/>
                 <a:cs typeface="Calibri" pitchFamily="34" charset="-120"/>
               </a:rPr>
-              <a:t>05-08</a:t>
+              <a:t>05-07</a:t>
             </a:r>
             <a:endParaRPr lang="en-US" sz="700" dirty="0"/>
           </a:p>
@@ -48816,7 +48958,7 @@
                 <a:ea typeface="Calibri" pitchFamily="34" charset="-122"/>
                 <a:cs typeface="Calibri" pitchFamily="34" charset="-120"/>
               </a:rPr>
-              <a:t>VnExpress I…</a:t>
+              <a:t>Moi truong …</a:t>
             </a:r>
             <a:endParaRPr lang="en-US" sz="700" dirty="0"/>
           </a:p>
@@ -48855,7 +48997,7 @@
                 <a:ea typeface="Calibri" pitchFamily="34" charset="-122"/>
                 <a:cs typeface="Calibri" pitchFamily="34" charset="-120"/>
               </a:rPr>
-              <a:t>태국, PM2.5 오염 관리 진전 보고</a:t>
+              <a:t>디엔비엔푸의 승리 - 20세기의 서사시와 시대의 가치</a:t>
             </a:r>
             <a:endParaRPr lang="en-US" sz="750" dirty="0"/>
           </a:p>
@@ -48876,11 +49018,11 @@
             <a:avLst/>
           </a:prstGeom>
           <a:solidFill>
-            <a:srgbClr val="FFFFFF"/>
+            <a:srgbClr val="FFF9C4"/>
           </a:solidFill>
           <a:ln w="12700">
             <a:solidFill>
-              <a:srgbClr val="E5E7EB"/>
+              <a:srgbClr val="FCD34D"/>
             </a:solidFill>
             <a:prstDash val="solid"/>
           </a:ln>
@@ -48901,11 +49043,11 @@
             <a:avLst/>
           </a:prstGeom>
           <a:solidFill>
-            <a:srgbClr val="9CA3AF"/>
+            <a:srgbClr val="F59E0B"/>
           </a:solidFill>
           <a:ln w="12700">
             <a:solidFill>
-              <a:srgbClr val="9CA3AF"/>
+              <a:srgbClr val="F59E0B"/>
             </a:solidFill>
             <a:prstDash val="solid"/>
           </a:ln>
@@ -48944,7 +49086,7 @@
                 <a:ea typeface="Calibri" pitchFamily="34" charset="-122"/>
                 <a:cs typeface="Calibri" pitchFamily="34" charset="-120"/>
               </a:rPr>
-              <a:t>MED</a:t>
+              <a:t>NEW</a:t>
             </a:r>
             <a:endParaRPr lang="en-US" sz="650" dirty="0"/>
           </a:p>
@@ -48983,7 +49125,7 @@
                 <a:ea typeface="Calibri" pitchFamily="34" charset="-122"/>
                 <a:cs typeface="Calibri" pitchFamily="34" charset="-120"/>
               </a:rPr>
-              <a:t>02-09</a:t>
+              <a:t>05-08</a:t>
             </a:r>
             <a:endParaRPr lang="en-US" sz="700" dirty="0"/>
           </a:p>
@@ -49022,7 +49164,7 @@
                 <a:ea typeface="Calibri" pitchFamily="34" charset="-122"/>
                 <a:cs typeface="Calibri" pitchFamily="34" charset="-120"/>
               </a:rPr>
-              <a:t>Thanh Nien …</a:t>
+              <a:t>VnExpress I…</a:t>
             </a:r>
             <a:endParaRPr lang="en-US" sz="700" dirty="0"/>
           </a:p>
@@ -49053,15 +49195,15 @@
               <a:buNone/>
             </a:pPr>
             <a:r>
-              <a:rPr lang="en-US" sz="750" dirty="0">
-                <a:solidFill>
-                  <a:srgbClr val="374151"/>
-                </a:solidFill>
-                <a:latin typeface="Calibri" pitchFamily="34" charset="0"/>
-                <a:ea typeface="Calibri" pitchFamily="34" charset="-122"/>
-                <a:cs typeface="Calibri" pitchFamily="34" charset="-120"/>
-              </a:rPr>
-              <a:t>수억 달러 규모의 입찰에 성공한 합작사가 공개되며, 꽝차크 2 가스 발전소…</a:t>
+              <a:rPr lang="en-US" sz="750" b="1" dirty="0">
+                <a:solidFill>
+                  <a:srgbClr val="111827"/>
+                </a:solidFill>
+                <a:latin typeface="Calibri" pitchFamily="34" charset="0"/>
+                <a:ea typeface="Calibri" pitchFamily="34" charset="-122"/>
+                <a:cs typeface="Calibri" pitchFamily="34" charset="-120"/>
+              </a:rPr>
+              <a:t>태국, PM2.5 오염 관리 진전 보고</a:t>
             </a:r>
             <a:endParaRPr lang="en-US" sz="750" dirty="0"/>
           </a:p>
@@ -49433,7 +49575,7 @@
                 <a:ea typeface="Calibri" pitchFamily="34" charset="-122"/>
                 <a:cs typeface="Calibri" pitchFamily="34" charset="-120"/>
               </a:rPr>
-              <a:t>기사 155건  |  ★신규 6건</a:t>
+              <a:t>기사 156건  |  ★신규 7건</a:t>
             </a:r>
             <a:endParaRPr lang="en-US" sz="900" dirty="0"/>
           </a:p>
@@ -49767,7 +49909,7 @@
                 <a:ea typeface="Calibri" pitchFamily="34" charset="-122"/>
                 <a:cs typeface="Calibri" pitchFamily="34" charset="-120"/>
               </a:rPr>
-              <a:t># VN-PWR-PDP8-LNG 사업 진행현황 분석</a:t>
+              <a:t># VN-PWR-PDP8-LNG 진행현황 분석</a:t>
             </a:r>
             <a:endParaRPr lang="en-US" sz="800" dirty="0"/>
           </a:p>
@@ -49813,7 +49955,7 @@
                 <a:ea typeface="Calibri" pitchFamily="34" charset="-122"/>
                 <a:cs typeface="Calibri" pitchFamily="34" charset="-120"/>
               </a:rPr>
-              <a:t>**진행단계 평가**: PDP8 LNG 가스발전 사업은 정책 수립 및 메커니즘 설계 단계에서 진행 중입니다. 5월 6일 보도(기사[3])에서 ★**LNG 발전 프로젝트 메커니즘 완성**이 보도되며, EVN 주도하의 제도적 기반이 확립되는 단계입니다. </a:t>
+              <a:t>**사업 진행단계 맥락**</a:t>
             </a:r>
             <a:endParaRPr lang="en-US" sz="800" dirty="0"/>
           </a:p>
@@ -49836,7 +49978,7 @@
                 <a:ea typeface="Calibri" pitchFamily="34" charset="-122"/>
                 <a:cs typeface="Calibri" pitchFamily="34" charset="-120"/>
               </a:rPr>
-              <a:t>**KPI 평가**: KPI 목표 정보 부재로 정량적 평…</a:t>
+              <a:t>PDP8 LNG 가스발전 사업은 현재 **정책/메커니즘 고도화 단계**로 진입했습니다. 핵심 기사[4]에서 베트남 정부가 "LNG 발전 프로젝트 메커니즘 완성"을 추진 중임을 확인했습니다. 이는 사업 초기 인허가→설계단계를 거쳐 **경제성 보장 체계 구축**으로 진화하는 중요한 전환점입…</a:t>
             </a:r>
             <a:endParaRPr lang="en-US" sz="800" dirty="0"/>
           </a:p>
@@ -49875,7 +50017,7 @@
                 <a:ea typeface="Calibri" pitchFamily="34" charset="-122"/>
                 <a:cs typeface="Calibri" pitchFamily="34" charset="-120"/>
               </a:rPr>
-              <a:t>수집 기사  (★신규 6건  +  기존 149건)</a:t>
+              <a:t>수집 기사  (★신규 7건  +  기존 149건)</a:t>
             </a:r>
             <a:endParaRPr lang="en-US" sz="800" dirty="0"/>
           </a:p>
@@ -50223,7 +50365,7 @@
                 <a:ea typeface="Calibri" pitchFamily="34" charset="-122"/>
                 <a:cs typeface="Calibri" pitchFamily="34" charset="-120"/>
               </a:rPr>
-              <a:t>VnExpress I…</a:t>
+              <a:t>Mekong Eye</a:t>
             </a:r>
             <a:endParaRPr lang="en-US" sz="700" dirty="0"/>
           </a:p>
@@ -50262,7 +50404,7 @@
                 <a:ea typeface="Calibri" pitchFamily="34" charset="-122"/>
                 <a:cs typeface="Calibri" pitchFamily="34" charset="-120"/>
               </a:rPr>
-              <a:t>태국, 말레이시아와의 철도 연결 가속화</a:t>
+              <a:t>라오스는 이 지역에 힘을 실어주지만 자국의 주택은 시원함을 유지하기 위해 …</a:t>
             </a:r>
             <a:endParaRPr lang="en-US" sz="750" dirty="0"/>
           </a:p>
@@ -50390,7 +50532,7 @@
                 <a:ea typeface="Calibri" pitchFamily="34" charset="-122"/>
                 <a:cs typeface="Calibri" pitchFamily="34" charset="-120"/>
               </a:rPr>
-              <a:t>05-06</a:t>
+              <a:t>05-04</a:t>
             </a:r>
             <a:endParaRPr lang="en-US" sz="700" dirty="0"/>
           </a:p>
@@ -50429,7 +50571,7 @@
                 <a:ea typeface="Calibri" pitchFamily="34" charset="-122"/>
                 <a:cs typeface="Calibri" pitchFamily="34" charset="-120"/>
               </a:rPr>
-              <a:t>VnExpress B…</a:t>
+              <a:t>VnExpress I…</a:t>
             </a:r>
             <a:endParaRPr lang="en-US" sz="700" dirty="0"/>
           </a:p>
@@ -50468,7 +50610,7 @@
                 <a:ea typeface="Calibri" pitchFamily="34" charset="-122"/>
                 <a:cs typeface="Calibri" pitchFamily="34" charset="-120"/>
               </a:rPr>
-              <a:t>수출이 줄어들면서 과일 가격이 급락합니다.</a:t>
+              <a:t>태국, 말레이시아와의 철도 연결 가속화</a:t>
             </a:r>
             <a:endParaRPr lang="en-US" sz="750" dirty="0"/>
           </a:p>
@@ -50635,7 +50777,7 @@
                 <a:ea typeface="Calibri" pitchFamily="34" charset="-122"/>
                 <a:cs typeface="Calibri" pitchFamily="34" charset="-120"/>
               </a:rPr>
-              <a:t>Moi truong …</a:t>
+              <a:t>VnExpress B…</a:t>
             </a:r>
             <a:endParaRPr lang="en-US" sz="700" dirty="0"/>
           </a:p>
@@ -50674,7 +50816,7 @@
                 <a:ea typeface="Calibri" pitchFamily="34" charset="-122"/>
                 <a:cs typeface="Calibri" pitchFamily="34" charset="-120"/>
               </a:rPr>
-              <a:t>LNG 발전 프로젝트 메커니즘 완성: 전기 가격에 압력을 가하지 않고 출력…</a:t>
+              <a:t>수출이 줄어들면서 과일 가격이 급락합니다.</a:t>
             </a:r>
             <a:endParaRPr lang="en-US" sz="750" dirty="0"/>
           </a:p>
@@ -50841,7 +50983,7 @@
                 <a:ea typeface="Calibri" pitchFamily="34" charset="-122"/>
                 <a:cs typeface="Calibri" pitchFamily="34" charset="-120"/>
               </a:rPr>
-              <a:t>VnExpress B…</a:t>
+              <a:t>Moi truong …</a:t>
             </a:r>
             <a:endParaRPr lang="en-US" sz="700" dirty="0"/>
           </a:p>
@@ -50880,7 +51022,7 @@
                 <a:ea typeface="Calibri" pitchFamily="34" charset="-122"/>
                 <a:cs typeface="Calibri" pitchFamily="34" charset="-120"/>
               </a:rPr>
-              <a:t>정재은, 베트남에 10MW 옥상 태양광 시스템 설치</a:t>
+              <a:t>LNG 발전 프로젝트 메커니즘 완성: 전기 가격에 압력을 가하지 않고 출력…</a:t>
             </a:r>
             <a:endParaRPr lang="en-US" sz="750" dirty="0"/>
           </a:p>
@@ -51008,7 +51150,7 @@
                 <a:ea typeface="Calibri" pitchFamily="34" charset="-122"/>
                 <a:cs typeface="Calibri" pitchFamily="34" charset="-120"/>
               </a:rPr>
-              <a:t>05-07</a:t>
+              <a:t>05-06</a:t>
             </a:r>
             <a:endParaRPr lang="en-US" sz="700" dirty="0"/>
           </a:p>
@@ -51047,7 +51189,7 @@
                 <a:ea typeface="Calibri" pitchFamily="34" charset="-122"/>
                 <a:cs typeface="Calibri" pitchFamily="34" charset="-120"/>
               </a:rPr>
-              <a:t>Moi truong …</a:t>
+              <a:t>VnExpress B…</a:t>
             </a:r>
             <a:endParaRPr lang="en-US" sz="700" dirty="0"/>
           </a:p>
@@ -51086,7 +51228,7 @@
                 <a:ea typeface="Calibri" pitchFamily="34" charset="-122"/>
                 <a:cs typeface="Calibri" pitchFamily="34" charset="-120"/>
               </a:rPr>
-              <a:t>디엔비엔푸의 승리 - 20세기의 서사시와 시대의 가치</a:t>
+              <a:t>정재은, 베트남에 10MW 옥상 태양광 시스템 설치</a:t>
             </a:r>
             <a:endParaRPr lang="en-US" sz="750" dirty="0"/>
           </a:p>
@@ -51214,7 +51356,7 @@
                 <a:ea typeface="Calibri" pitchFamily="34" charset="-122"/>
                 <a:cs typeface="Calibri" pitchFamily="34" charset="-120"/>
               </a:rPr>
-              <a:t>05-08</a:t>
+              <a:t>05-07</a:t>
             </a:r>
             <a:endParaRPr lang="en-US" sz="700" dirty="0"/>
           </a:p>
@@ -51253,7 +51395,7 @@
                 <a:ea typeface="Calibri" pitchFamily="34" charset="-122"/>
                 <a:cs typeface="Calibri" pitchFamily="34" charset="-120"/>
               </a:rPr>
-              <a:t>VnExpress I…</a:t>
+              <a:t>Moi truong …</a:t>
             </a:r>
             <a:endParaRPr lang="en-US" sz="700" dirty="0"/>
           </a:p>
@@ -51292,6 +51434,212 @@
                 <a:ea typeface="Calibri" pitchFamily="34" charset="-122"/>
                 <a:cs typeface="Calibri" pitchFamily="34" charset="-120"/>
               </a:rPr>
+              <a:t>디엔비엔푸의 승리 - 20세기의 서사시와 시대의 가치</a:t>
+            </a:r>
+            <a:endParaRPr lang="en-US" sz="750" dirty="0"/>
+          </a:p>
+        </p:txBody>
+      </p:sp>
+      <p:sp>
+        <p:nvSpPr>
+          <p:cNvPr id="60" name="Shape 58"/>
+          <p:cNvSpPr/>
+          <p:nvPr/>
+        </p:nvSpPr>
+        <p:spPr>
+          <a:xfrm>
+            <a:off x="320040" y="4471416"/>
+            <a:ext cx="8503920" cy="196596"/>
+          </a:xfrm>
+          <a:prstGeom prst="rect">
+            <a:avLst/>
+          </a:prstGeom>
+          <a:solidFill>
+            <a:srgbClr val="FFF9C4"/>
+          </a:solidFill>
+          <a:ln w="12700">
+            <a:solidFill>
+              <a:srgbClr val="FCD34D"/>
+            </a:solidFill>
+            <a:prstDash val="solid"/>
+          </a:ln>
+        </p:spPr>
+      </p:sp>
+      <p:sp>
+        <p:nvSpPr>
+          <p:cNvPr id="61" name="Shape 59"/>
+          <p:cNvSpPr/>
+          <p:nvPr/>
+        </p:nvSpPr>
+        <p:spPr>
+          <a:xfrm>
+            <a:off x="338328" y="4503420"/>
+            <a:ext cx="347472" cy="132588"/>
+          </a:xfrm>
+          <a:prstGeom prst="rect">
+            <a:avLst/>
+          </a:prstGeom>
+          <a:solidFill>
+            <a:srgbClr val="F59E0B"/>
+          </a:solidFill>
+          <a:ln w="12700">
+            <a:solidFill>
+              <a:srgbClr val="F59E0B"/>
+            </a:solidFill>
+            <a:prstDash val="solid"/>
+          </a:ln>
+        </p:spPr>
+      </p:sp>
+      <p:sp>
+        <p:nvSpPr>
+          <p:cNvPr id="62" name="Text 60"/>
+          <p:cNvSpPr/>
+          <p:nvPr/>
+        </p:nvSpPr>
+        <p:spPr>
+          <a:xfrm>
+            <a:off x="338328" y="4503420"/>
+            <a:ext cx="347472" cy="132588"/>
+          </a:xfrm>
+          <a:prstGeom prst="rect">
+            <a:avLst/>
+          </a:prstGeom>
+          <a:noFill/>
+          <a:ln/>
+        </p:spPr>
+        <p:txBody>
+          <a:bodyPr wrap="square" lIns="0" tIns="0" rIns="0" bIns="0" rtlCol="0" anchor="ctr"/>
+          <a:lstStyle/>
+          <a:p>
+            <a:pPr algn="ctr" indent="0" marL="0">
+              <a:buNone/>
+            </a:pPr>
+            <a:r>
+              <a:rPr lang="en-US" sz="650" b="1" dirty="0">
+                <a:solidFill>
+                  <a:srgbClr val="FFFFFF"/>
+                </a:solidFill>
+                <a:latin typeface="Calibri" pitchFamily="34" charset="0"/>
+                <a:ea typeface="Calibri" pitchFamily="34" charset="-122"/>
+                <a:cs typeface="Calibri" pitchFamily="34" charset="-120"/>
+              </a:rPr>
+              <a:t>NEW</a:t>
+            </a:r>
+            <a:endParaRPr lang="en-US" sz="650" dirty="0"/>
+          </a:p>
+        </p:txBody>
+      </p:sp>
+      <p:sp>
+        <p:nvSpPr>
+          <p:cNvPr id="63" name="Text 61"/>
+          <p:cNvSpPr/>
+          <p:nvPr/>
+        </p:nvSpPr>
+        <p:spPr>
+          <a:xfrm>
+            <a:off x="704088" y="4471416"/>
+            <a:ext cx="594360" cy="196596"/>
+          </a:xfrm>
+          <a:prstGeom prst="rect">
+            <a:avLst/>
+          </a:prstGeom>
+          <a:noFill/>
+          <a:ln/>
+        </p:spPr>
+        <p:txBody>
+          <a:bodyPr wrap="square" lIns="0" tIns="0" rIns="0" bIns="0" rtlCol="0" anchor="ctr"/>
+          <a:lstStyle/>
+          <a:p>
+            <a:pPr algn="ctr" indent="0" marL="0">
+              <a:buNone/>
+            </a:pPr>
+            <a:r>
+              <a:rPr lang="en-US" sz="700" dirty="0">
+                <a:solidFill>
+                  <a:srgbClr val="6B7280"/>
+                </a:solidFill>
+                <a:latin typeface="Calibri" pitchFamily="34" charset="0"/>
+                <a:ea typeface="Calibri" pitchFamily="34" charset="-122"/>
+                <a:cs typeface="Calibri" pitchFamily="34" charset="-120"/>
+              </a:rPr>
+              <a:t>05-08</a:t>
+            </a:r>
+            <a:endParaRPr lang="en-US" sz="700" dirty="0"/>
+          </a:p>
+        </p:txBody>
+      </p:sp>
+      <p:sp>
+        <p:nvSpPr>
+          <p:cNvPr id="64" name="Text 62"/>
+          <p:cNvSpPr/>
+          <p:nvPr/>
+        </p:nvSpPr>
+        <p:spPr>
+          <a:xfrm>
+            <a:off x="1298448" y="4471416"/>
+            <a:ext cx="777240" cy="196596"/>
+          </a:xfrm>
+          <a:prstGeom prst="rect">
+            <a:avLst/>
+          </a:prstGeom>
+          <a:noFill/>
+          <a:ln/>
+        </p:spPr>
+        <p:txBody>
+          <a:bodyPr wrap="square" lIns="0" tIns="0" rIns="0" bIns="0" rtlCol="0" anchor="ctr"/>
+          <a:lstStyle/>
+          <a:p>
+            <a:pPr indent="0" marL="0">
+              <a:buNone/>
+            </a:pPr>
+            <a:r>
+              <a:rPr lang="en-US" sz="700" dirty="0">
+                <a:solidFill>
+                  <a:srgbClr val="6B7280"/>
+                </a:solidFill>
+                <a:latin typeface="Calibri" pitchFamily="34" charset="0"/>
+                <a:ea typeface="Calibri" pitchFamily="34" charset="-122"/>
+                <a:cs typeface="Calibri" pitchFamily="34" charset="-120"/>
+              </a:rPr>
+              <a:t>VnExpress I…</a:t>
+            </a:r>
+            <a:endParaRPr lang="en-US" sz="700" dirty="0"/>
+          </a:p>
+        </p:txBody>
+      </p:sp>
+      <p:sp>
+        <p:nvSpPr>
+          <p:cNvPr id="65" name="Text 63"/>
+          <p:cNvSpPr/>
+          <p:nvPr/>
+        </p:nvSpPr>
+        <p:spPr>
+          <a:xfrm>
+            <a:off x="2075688" y="4471416"/>
+            <a:ext cx="6675120" cy="196596"/>
+          </a:xfrm>
+          <a:prstGeom prst="rect">
+            <a:avLst/>
+          </a:prstGeom>
+          <a:noFill/>
+          <a:ln/>
+        </p:spPr>
+        <p:txBody>
+          <a:bodyPr wrap="square" lIns="0" tIns="0" rIns="0" bIns="0" rtlCol="0" anchor="ctr"/>
+          <a:lstStyle/>
+          <a:p>
+            <a:pPr indent="0" marL="0">
+              <a:buNone/>
+            </a:pPr>
+            <a:r>
+              <a:rPr lang="en-US" sz="750" b="1" dirty="0">
+                <a:solidFill>
+                  <a:srgbClr val="111827"/>
+                </a:solidFill>
+                <a:latin typeface="Calibri" pitchFamily="34" charset="0"/>
+                <a:ea typeface="Calibri" pitchFamily="34" charset="-122"/>
+                <a:cs typeface="Calibri" pitchFamily="34" charset="-120"/>
+              </a:rPr>
               <a:t>태국, PM2.5 오염 관리 진전 보고</a:t>
             </a:r>
             <a:endParaRPr lang="en-US" sz="750" dirty="0"/>
@@ -51300,13 +51648,13 @@
       </p:sp>
       <p:sp>
         <p:nvSpPr>
-          <p:cNvPr id="60" name="Shape 58"/>
-          <p:cNvSpPr/>
-          <p:nvPr/>
-        </p:nvSpPr>
-        <p:spPr>
-          <a:xfrm>
-            <a:off x="320040" y="4471416"/>
+          <p:cNvPr id="66" name="Shape 64"/>
+          <p:cNvSpPr/>
+          <p:nvPr/>
+        </p:nvSpPr>
+        <p:spPr>
+          <a:xfrm>
+            <a:off x="320040" y="4668012"/>
             <a:ext cx="8503920" cy="196596"/>
           </a:xfrm>
           <a:prstGeom prst="rect">
@@ -51325,13 +51673,13 @@
       </p:sp>
       <p:sp>
         <p:nvSpPr>
-          <p:cNvPr id="61" name="Shape 59"/>
-          <p:cNvSpPr/>
-          <p:nvPr/>
-        </p:nvSpPr>
-        <p:spPr>
-          <a:xfrm>
-            <a:off x="338328" y="4503420"/>
+          <p:cNvPr id="67" name="Shape 65"/>
+          <p:cNvSpPr/>
+          <p:nvPr/>
+        </p:nvSpPr>
+        <p:spPr>
+          <a:xfrm>
+            <a:off x="338328" y="4700016"/>
             <a:ext cx="347472" cy="132588"/>
           </a:xfrm>
           <a:prstGeom prst="rect">
@@ -51350,188 +51698,7 @@
       </p:sp>
       <p:sp>
         <p:nvSpPr>
-          <p:cNvPr id="62" name="Text 60"/>
-          <p:cNvSpPr/>
-          <p:nvPr/>
-        </p:nvSpPr>
-        <p:spPr>
-          <a:xfrm>
-            <a:off x="338328" y="4503420"/>
-            <a:ext cx="347472" cy="132588"/>
-          </a:xfrm>
-          <a:prstGeom prst="rect">
-            <a:avLst/>
-          </a:prstGeom>
-          <a:noFill/>
-          <a:ln/>
-        </p:spPr>
-        <p:txBody>
-          <a:bodyPr wrap="square" lIns="0" tIns="0" rIns="0" bIns="0" rtlCol="0" anchor="ctr"/>
-          <a:lstStyle/>
-          <a:p>
-            <a:pPr algn="ctr" indent="0" marL="0">
-              <a:buNone/>
-            </a:pPr>
-            <a:r>
-              <a:rPr lang="en-US" sz="650" b="1" dirty="0">
-                <a:solidFill>
-                  <a:srgbClr val="FFFFFF"/>
-                </a:solidFill>
-                <a:latin typeface="Calibri" pitchFamily="34" charset="0"/>
-                <a:ea typeface="Calibri" pitchFamily="34" charset="-122"/>
-                <a:cs typeface="Calibri" pitchFamily="34" charset="-120"/>
-              </a:rPr>
-              <a:t>HIGH</a:t>
-            </a:r>
-            <a:endParaRPr lang="en-US" sz="650" dirty="0"/>
-          </a:p>
-        </p:txBody>
-      </p:sp>
-      <p:sp>
-        <p:nvSpPr>
-          <p:cNvPr id="63" name="Text 61"/>
-          <p:cNvSpPr/>
-          <p:nvPr/>
-        </p:nvSpPr>
-        <p:spPr>
-          <a:xfrm>
-            <a:off x="704088" y="4471416"/>
-            <a:ext cx="594360" cy="196596"/>
-          </a:xfrm>
-          <a:prstGeom prst="rect">
-            <a:avLst/>
-          </a:prstGeom>
-          <a:noFill/>
-          <a:ln/>
-        </p:spPr>
-        <p:txBody>
-          <a:bodyPr wrap="square" lIns="0" tIns="0" rIns="0" bIns="0" rtlCol="0" anchor="ctr"/>
-          <a:lstStyle/>
-          <a:p>
-            <a:pPr algn="ctr" indent="0" marL="0">
-              <a:buNone/>
-            </a:pPr>
-            <a:r>
-              <a:rPr lang="en-US" sz="700" dirty="0">
-                <a:solidFill>
-                  <a:srgbClr val="6B7280"/>
-                </a:solidFill>
-                <a:latin typeface="Calibri" pitchFamily="34" charset="0"/>
-                <a:ea typeface="Calibri" pitchFamily="34" charset="-122"/>
-                <a:cs typeface="Calibri" pitchFamily="34" charset="-120"/>
-              </a:rPr>
-              <a:t>04-08</a:t>
-            </a:r>
-            <a:endParaRPr lang="en-US" sz="700" dirty="0"/>
-          </a:p>
-        </p:txBody>
-      </p:sp>
-      <p:sp>
-        <p:nvSpPr>
-          <p:cNvPr id="64" name="Text 62"/>
-          <p:cNvSpPr/>
-          <p:nvPr/>
-        </p:nvSpPr>
-        <p:spPr>
-          <a:xfrm>
-            <a:off x="1298448" y="4471416"/>
-            <a:ext cx="777240" cy="196596"/>
-          </a:xfrm>
-          <a:prstGeom prst="rect">
-            <a:avLst/>
-          </a:prstGeom>
-          <a:noFill/>
-          <a:ln/>
-        </p:spPr>
-        <p:txBody>
-          <a:bodyPr wrap="square" lIns="0" tIns="0" rIns="0" bIns="0" rtlCol="0" anchor="ctr"/>
-          <a:lstStyle/>
-          <a:p>
-            <a:pPr indent="0" marL="0">
-              <a:buNone/>
-            </a:pPr>
-            <a:r>
-              <a:rPr lang="en-US" sz="700" dirty="0">
-                <a:solidFill>
-                  <a:srgbClr val="6B7280"/>
-                </a:solidFill>
-                <a:latin typeface="Calibri" pitchFamily="34" charset="0"/>
-                <a:ea typeface="Calibri" pitchFamily="34" charset="-122"/>
-                <a:cs typeface="Calibri" pitchFamily="34" charset="-120"/>
-              </a:rPr>
-              <a:t>NewsData/Wa…</a:t>
-            </a:r>
-            <a:endParaRPr lang="en-US" sz="700" dirty="0"/>
-          </a:p>
-        </p:txBody>
-      </p:sp>
-      <p:sp>
-        <p:nvSpPr>
-          <p:cNvPr id="65" name="Text 63"/>
-          <p:cNvSpPr/>
-          <p:nvPr/>
-        </p:nvSpPr>
-        <p:spPr>
-          <a:xfrm>
-            <a:off x="2075688" y="4471416"/>
-            <a:ext cx="6675120" cy="196596"/>
-          </a:xfrm>
-          <a:prstGeom prst="rect">
-            <a:avLst/>
-          </a:prstGeom>
-          <a:noFill/>
-          <a:ln/>
-        </p:spPr>
-        <p:txBody>
-          <a:bodyPr wrap="square" lIns="0" tIns="0" rIns="0" bIns="0" rtlCol="0" anchor="ctr"/>
-          <a:lstStyle/>
-          <a:p>
-            <a:pPr indent="0" marL="0">
-              <a:buNone/>
-            </a:pPr>
-            <a:r>
-              <a:rPr lang="en-US" sz="750" dirty="0">
-                <a:solidFill>
-                  <a:srgbClr val="374151"/>
-                </a:solidFill>
-                <a:latin typeface="Calibri" pitchFamily="34" charset="0"/>
-                <a:ea typeface="Calibri" pitchFamily="34" charset="-122"/>
-                <a:cs typeface="Calibri" pitchFamily="34" charset="-120"/>
-              </a:rPr>
-              <a:t>PV GAS, 티바이 LNG 터미널 처리 능력 확대</a:t>
-            </a:r>
-            <a:endParaRPr lang="en-US" sz="750" dirty="0"/>
-          </a:p>
-        </p:txBody>
-      </p:sp>
-      <p:sp>
-        <p:nvSpPr>
-          <p:cNvPr id="66" name="Shape 64"/>
-          <p:cNvSpPr/>
-          <p:nvPr/>
-        </p:nvSpPr>
-        <p:spPr>
-          <a:xfrm>
-            <a:off x="320040" y="4668012"/>
-            <a:ext cx="8503920" cy="196596"/>
-          </a:xfrm>
-          <a:prstGeom prst="rect">
-            <a:avLst/>
-          </a:prstGeom>
-          <a:solidFill>
-            <a:srgbClr val="FFFFFF"/>
-          </a:solidFill>
-          <a:ln w="12700">
-            <a:solidFill>
-              <a:srgbClr val="E5E7EB"/>
-            </a:solidFill>
-            <a:prstDash val="solid"/>
-          </a:ln>
-        </p:spPr>
-      </p:sp>
-      <p:sp>
-        <p:nvSpPr>
-          <p:cNvPr id="67" name="Shape 65"/>
+          <p:cNvPr id="68" name="Text 66"/>
           <p:cNvSpPr/>
           <p:nvPr/>
         </p:nvSpPr>
@@ -51543,31 +51710,6 @@
           <a:prstGeom prst="rect">
             <a:avLst/>
           </a:prstGeom>
-          <a:solidFill>
-            <a:srgbClr val="1B4F8A"/>
-          </a:solidFill>
-          <a:ln w="12700">
-            <a:solidFill>
-              <a:srgbClr val="1B4F8A"/>
-            </a:solidFill>
-            <a:prstDash val="solid"/>
-          </a:ln>
-        </p:spPr>
-      </p:sp>
-      <p:sp>
-        <p:nvSpPr>
-          <p:cNvPr id="68" name="Text 66"/>
-          <p:cNvSpPr/>
-          <p:nvPr/>
-        </p:nvSpPr>
-        <p:spPr>
-          <a:xfrm>
-            <a:off x="338328" y="4700016"/>
-            <a:ext cx="347472" cy="132588"/>
-          </a:xfrm>
-          <a:prstGeom prst="rect">
-            <a:avLst/>
-          </a:prstGeom>
           <a:noFill/>
           <a:ln/>
         </p:spPr>
@@ -51665,7 +51807,7 @@
                 <a:ea typeface="Calibri" pitchFamily="34" charset="-122"/>
                 <a:cs typeface="Calibri" pitchFamily="34" charset="-120"/>
               </a:rPr>
-              <a:t>SGGP News E…</a:t>
+              <a:t>NewsData/Wa…</a:t>
             </a:r>
             <a:endParaRPr lang="en-US" sz="700" dirty="0"/>
           </a:p>
@@ -51704,7 +51846,7 @@
                 <a:ea typeface="Calibri" pitchFamily="34" charset="-122"/>
                 <a:cs typeface="Calibri" pitchFamily="34" charset="-120"/>
               </a:rPr>
-              <a:t>티바이 LNG 터미널의 재기화 처리 능력이 시간당 288톤으로 확대되었다</a:t>
+              <a:t>PV GAS, 티바이 LNG 터미널 처리 능력 확대</a:t>
             </a:r>
             <a:endParaRPr lang="en-US" sz="750" dirty="0"/>
           </a:p>
